--- a/Snake/Presentación de Snake.pptx
+++ b/Snake/Presentación de Snake.pptx
@@ -14,9 +14,13 @@
     <p:sldId id="262" r:id="rId8"/>
     <p:sldId id="263" r:id="rId9"/>
     <p:sldId id="264" r:id="rId10"/>
+    <p:sldId id="265" r:id="rId11"/>
+    <p:sldId id="266" r:id="rId12"/>
+    <p:sldId id="267" r:id="rId13"/>
+    <p:sldId id="268" r:id="rId14"/>
   </p:sldIdLst>
   <p:notesMasterIdLst>
-    <p:notesMasterId r:id="rId11"/>
+    <p:notesMasterId r:id="rId15"/>
   </p:notesMasterIdLst>
   <p:sldSz cx="9144000" cy="5143500"/>
   <p:notesSz cx="5143500" cy="9144000"/>
@@ -115,17 +119,17 @@
   <p:extLst>
     <p:ext uri="{521415D9-36F7-43E2-AB2F-B90AF26B5E84}">
       <p14:sectionLst xmlns:p14="http://schemas.microsoft.com/office/powerpoint/2010/main">
-        <p14:section name="Introducción" id="{5b57ecbe-5dd2-a8c8-b9ce-708db0243c11}">
+        <p14:section name="Introducción" id="{8a5ec402-20bb-4347-3fb9-c6501466db52}">
           <p14:sldIdLst>
             <p14:sldId id="256"/>
           </p14:sldIdLst>
         </p14:section>
-        <p14:section name="Diseño del juego" id="{3caa6af6-81b6-eaa8-09a2-9ca0528cb2a6}">
+        <p14:section name="Diseño del juego" id="{72dcfdef-32ac-bf65-558f-32dc5c7e185e}">
           <p14:sldIdLst>
             <p14:sldId id="257"/>
           </p14:sldIdLst>
         </p14:section>
-        <p14:section name="Tecnología" id="{6a4104b7-32c9-700f-d2e3-9b49d84342cb}">
+        <p14:section name="Tecnología" id="{b79fe5a4-7007-4f4c-ad97-f9a3a21c2a79}">
           <p14:sldIdLst>
             <p14:sldId id="258"/>
             <p14:sldId id="259"/>
@@ -133,11 +137,15 @@
             <p14:sldId id="261"/>
             <p14:sldId id="262"/>
             <p14:sldId id="263"/>
+            <p14:sldId id="264"/>
+            <p14:sldId id="265"/>
+            <p14:sldId id="266"/>
+            <p14:sldId id="267"/>
           </p14:sldIdLst>
         </p14:section>
-        <p14:section name="Código" id="{b940b870-84b4-d56c-2310-aa9ebb710565}">
+        <p14:section name="Código" id="{f3289061-8e64-d131-f47f-a228e10e8421}">
           <p14:sldIdLst>
-            <p14:sldId id="264"/>
+            <p14:sldId id="268"/>
           </p14:sldIdLst>
         </p14:section>
       </p14:sectionLst>
@@ -544,7 +552,7 @@
           <a:p>
             <a:r>
               <a:rPr lang="en-US" dirty="0"/>
-              <a:t>Presentación del juego Snake desarrollado con Phaser 3 para la materia de Desarrollo de Juegos Interactivos.</a:t>
+              <a:t/>
             </a:r>
             <a:endParaRPr lang="en-US" dirty="0"/>
           </a:p>
@@ -568,6 +576,358 @@
             <a:fld id="{F7021451-1387-4CA6-816F-3879F97B5CBC}" type="slidenum">
               <a:rPr lang="en-US"/>
               <a:t>1</a:t>
+            </a:fld>
+            <a:endParaRPr lang="en-US"/>
+          </a:p>
+        </p:txBody>
+      </p:sp>
+    </p:spTree>
+    <p:extLst>
+      <p:ext uri="{BB962C8B-B14F-4D97-AF65-F5344CB8AC3E}">
+        <p14:creationId xmlns:p14="http://schemas.microsoft.com/office/powerpoint/2010/main" val="1024086991"/>
+      </p:ext>
+    </p:extLst>
+  </p:cSld>
+  <p:clrMapOvr>
+    <a:masterClrMapping/>
+  </p:clrMapOvr>
+</p:notes>
+</file>
+
+<file path=ppt/notesSlides/notesSlide10.xml><?xml version="1.0" encoding="utf-8"?>
+<p:notes xmlns:a="http://schemas.openxmlformats.org/drawingml/2006/main" xmlns:r="http://schemas.openxmlformats.org/officeDocument/2006/relationships" xmlns:p="http://schemas.openxmlformats.org/presentationml/2006/main">
+  <p:cSld>
+    <p:spTree>
+      <p:nvGrpSpPr>
+        <p:cNvPr id="1" name=""/>
+        <p:cNvGrpSpPr/>
+        <p:nvPr/>
+      </p:nvGrpSpPr>
+      <p:grpSpPr>
+        <a:xfrm>
+          <a:off x="0" y="0"/>
+          <a:ext cx="0" cy="0"/>
+          <a:chOff x="0" y="0"/>
+          <a:chExt cx="0" cy="0"/>
+        </a:xfrm>
+      </p:grpSpPr>
+      <p:sp>
+        <p:nvSpPr>
+          <p:cNvPr id="2" name="Slide Image Placeholder 1"/>
+          <p:cNvSpPr>
+            <a:spLocks noGrp="1" noRot="1" noChangeAspect="1"/>
+          </p:cNvSpPr>
+          <p:nvPr>
+            <p:ph type="sldImg"/>
+          </p:nvPr>
+        </p:nvSpPr>
+        <p:spPr/>
+      </p:sp>
+      <p:sp>
+        <p:nvSpPr>
+          <p:cNvPr id="3" name="Notes Placeholder 2"/>
+          <p:cNvSpPr>
+            <a:spLocks noGrp="1"/>
+          </p:cNvSpPr>
+          <p:nvPr>
+            <p:ph type="body" idx="1"/>
+          </p:nvPr>
+        </p:nvSpPr>
+        <p:spPr/>
+        <p:txBody>
+          <a:bodyPr/>
+          <a:lstStyle/>
+          <a:p>
+            <a:r>
+              <a:rPr lang="en-US" dirty="0"/>
+              <a:t/>
+            </a:r>
+            <a:endParaRPr lang="en-US" dirty="0"/>
+          </a:p>
+        </p:txBody>
+      </p:sp>
+      <p:sp>
+        <p:nvSpPr>
+          <p:cNvPr id="4" name="Slide Number Placeholder 3"/>
+          <p:cNvSpPr>
+            <a:spLocks noGrp="1"/>
+          </p:cNvSpPr>
+          <p:nvPr>
+            <p:ph type="sldNum" sz="quarter" idx="10"/>
+          </p:nvPr>
+        </p:nvSpPr>
+        <p:spPr/>
+        <p:txBody>
+          <a:bodyPr/>
+          <a:lstStyle/>
+          <a:p>
+            <a:fld id="{F7021451-1387-4CA6-816F-3879F97B5CBC}" type="slidenum">
+              <a:rPr lang="en-US"/>
+              <a:t>10</a:t>
+            </a:fld>
+            <a:endParaRPr lang="en-US"/>
+          </a:p>
+        </p:txBody>
+      </p:sp>
+    </p:spTree>
+    <p:extLst>
+      <p:ext uri="{BB962C8B-B14F-4D97-AF65-F5344CB8AC3E}">
+        <p14:creationId xmlns:p14="http://schemas.microsoft.com/office/powerpoint/2010/main" val="1024086991"/>
+      </p:ext>
+    </p:extLst>
+  </p:cSld>
+  <p:clrMapOvr>
+    <a:masterClrMapping/>
+  </p:clrMapOvr>
+</p:notes>
+</file>
+
+<file path=ppt/notesSlides/notesSlide11.xml><?xml version="1.0" encoding="utf-8"?>
+<p:notes xmlns:a="http://schemas.openxmlformats.org/drawingml/2006/main" xmlns:r="http://schemas.openxmlformats.org/officeDocument/2006/relationships" xmlns:p="http://schemas.openxmlformats.org/presentationml/2006/main">
+  <p:cSld>
+    <p:spTree>
+      <p:nvGrpSpPr>
+        <p:cNvPr id="1" name=""/>
+        <p:cNvGrpSpPr/>
+        <p:nvPr/>
+      </p:nvGrpSpPr>
+      <p:grpSpPr>
+        <a:xfrm>
+          <a:off x="0" y="0"/>
+          <a:ext cx="0" cy="0"/>
+          <a:chOff x="0" y="0"/>
+          <a:chExt cx="0" cy="0"/>
+        </a:xfrm>
+      </p:grpSpPr>
+      <p:sp>
+        <p:nvSpPr>
+          <p:cNvPr id="2" name="Slide Image Placeholder 1"/>
+          <p:cNvSpPr>
+            <a:spLocks noGrp="1" noRot="1" noChangeAspect="1"/>
+          </p:cNvSpPr>
+          <p:nvPr>
+            <p:ph type="sldImg"/>
+          </p:nvPr>
+        </p:nvSpPr>
+        <p:spPr/>
+      </p:sp>
+      <p:sp>
+        <p:nvSpPr>
+          <p:cNvPr id="3" name="Notes Placeholder 2"/>
+          <p:cNvSpPr>
+            <a:spLocks noGrp="1"/>
+          </p:cNvSpPr>
+          <p:nvPr>
+            <p:ph type="body" idx="1"/>
+          </p:nvPr>
+        </p:nvSpPr>
+        <p:spPr/>
+        <p:txBody>
+          <a:bodyPr/>
+          <a:lstStyle/>
+          <a:p>
+            <a:r>
+              <a:rPr lang="en-US" dirty="0"/>
+              <a:t/>
+            </a:r>
+            <a:endParaRPr lang="en-US" dirty="0"/>
+          </a:p>
+        </p:txBody>
+      </p:sp>
+      <p:sp>
+        <p:nvSpPr>
+          <p:cNvPr id="4" name="Slide Number Placeholder 3"/>
+          <p:cNvSpPr>
+            <a:spLocks noGrp="1"/>
+          </p:cNvSpPr>
+          <p:nvPr>
+            <p:ph type="sldNum" sz="quarter" idx="10"/>
+          </p:nvPr>
+        </p:nvSpPr>
+        <p:spPr/>
+        <p:txBody>
+          <a:bodyPr/>
+          <a:lstStyle/>
+          <a:p>
+            <a:fld id="{F7021451-1387-4CA6-816F-3879F97B5CBC}" type="slidenum">
+              <a:rPr lang="en-US"/>
+              <a:t>11</a:t>
+            </a:fld>
+            <a:endParaRPr lang="en-US"/>
+          </a:p>
+        </p:txBody>
+      </p:sp>
+    </p:spTree>
+    <p:extLst>
+      <p:ext uri="{BB962C8B-B14F-4D97-AF65-F5344CB8AC3E}">
+        <p14:creationId xmlns:p14="http://schemas.microsoft.com/office/powerpoint/2010/main" val="1024086991"/>
+      </p:ext>
+    </p:extLst>
+  </p:cSld>
+  <p:clrMapOvr>
+    <a:masterClrMapping/>
+  </p:clrMapOvr>
+</p:notes>
+</file>
+
+<file path=ppt/notesSlides/notesSlide12.xml><?xml version="1.0" encoding="utf-8"?>
+<p:notes xmlns:a="http://schemas.openxmlformats.org/drawingml/2006/main" xmlns:r="http://schemas.openxmlformats.org/officeDocument/2006/relationships" xmlns:p="http://schemas.openxmlformats.org/presentationml/2006/main">
+  <p:cSld>
+    <p:spTree>
+      <p:nvGrpSpPr>
+        <p:cNvPr id="1" name=""/>
+        <p:cNvGrpSpPr/>
+        <p:nvPr/>
+      </p:nvGrpSpPr>
+      <p:grpSpPr>
+        <a:xfrm>
+          <a:off x="0" y="0"/>
+          <a:ext cx="0" cy="0"/>
+          <a:chOff x="0" y="0"/>
+          <a:chExt cx="0" cy="0"/>
+        </a:xfrm>
+      </p:grpSpPr>
+      <p:sp>
+        <p:nvSpPr>
+          <p:cNvPr id="2" name="Slide Image Placeholder 1"/>
+          <p:cNvSpPr>
+            <a:spLocks noGrp="1" noRot="1" noChangeAspect="1"/>
+          </p:cNvSpPr>
+          <p:nvPr>
+            <p:ph type="sldImg"/>
+          </p:nvPr>
+        </p:nvSpPr>
+        <p:spPr/>
+      </p:sp>
+      <p:sp>
+        <p:nvSpPr>
+          <p:cNvPr id="3" name="Notes Placeholder 2"/>
+          <p:cNvSpPr>
+            <a:spLocks noGrp="1"/>
+          </p:cNvSpPr>
+          <p:nvPr>
+            <p:ph type="body" idx="1"/>
+          </p:nvPr>
+        </p:nvSpPr>
+        <p:spPr/>
+        <p:txBody>
+          <a:bodyPr/>
+          <a:lstStyle/>
+          <a:p>
+            <a:r>
+              <a:rPr lang="en-US" dirty="0"/>
+              <a:t/>
+            </a:r>
+            <a:endParaRPr lang="en-US" dirty="0"/>
+          </a:p>
+        </p:txBody>
+      </p:sp>
+      <p:sp>
+        <p:nvSpPr>
+          <p:cNvPr id="4" name="Slide Number Placeholder 3"/>
+          <p:cNvSpPr>
+            <a:spLocks noGrp="1"/>
+          </p:cNvSpPr>
+          <p:nvPr>
+            <p:ph type="sldNum" sz="quarter" idx="10"/>
+          </p:nvPr>
+        </p:nvSpPr>
+        <p:spPr/>
+        <p:txBody>
+          <a:bodyPr/>
+          <a:lstStyle/>
+          <a:p>
+            <a:fld id="{F7021451-1387-4CA6-816F-3879F97B5CBC}" type="slidenum">
+              <a:rPr lang="en-US"/>
+              <a:t>12</a:t>
+            </a:fld>
+            <a:endParaRPr lang="en-US"/>
+          </a:p>
+        </p:txBody>
+      </p:sp>
+    </p:spTree>
+    <p:extLst>
+      <p:ext uri="{BB962C8B-B14F-4D97-AF65-F5344CB8AC3E}">
+        <p14:creationId xmlns:p14="http://schemas.microsoft.com/office/powerpoint/2010/main" val="1024086991"/>
+      </p:ext>
+    </p:extLst>
+  </p:cSld>
+  <p:clrMapOvr>
+    <a:masterClrMapping/>
+  </p:clrMapOvr>
+</p:notes>
+</file>
+
+<file path=ppt/notesSlides/notesSlide13.xml><?xml version="1.0" encoding="utf-8"?>
+<p:notes xmlns:a="http://schemas.openxmlformats.org/drawingml/2006/main" xmlns:r="http://schemas.openxmlformats.org/officeDocument/2006/relationships" xmlns:p="http://schemas.openxmlformats.org/presentationml/2006/main">
+  <p:cSld>
+    <p:spTree>
+      <p:nvGrpSpPr>
+        <p:cNvPr id="1" name=""/>
+        <p:cNvGrpSpPr/>
+        <p:nvPr/>
+      </p:nvGrpSpPr>
+      <p:grpSpPr>
+        <a:xfrm>
+          <a:off x="0" y="0"/>
+          <a:ext cx="0" cy="0"/>
+          <a:chOff x="0" y="0"/>
+          <a:chExt cx="0" cy="0"/>
+        </a:xfrm>
+      </p:grpSpPr>
+      <p:sp>
+        <p:nvSpPr>
+          <p:cNvPr id="2" name="Slide Image Placeholder 1"/>
+          <p:cNvSpPr>
+            <a:spLocks noGrp="1" noRot="1" noChangeAspect="1"/>
+          </p:cNvSpPr>
+          <p:nvPr>
+            <p:ph type="sldImg"/>
+          </p:nvPr>
+        </p:nvSpPr>
+        <p:spPr/>
+      </p:sp>
+      <p:sp>
+        <p:nvSpPr>
+          <p:cNvPr id="3" name="Notes Placeholder 2"/>
+          <p:cNvSpPr>
+            <a:spLocks noGrp="1"/>
+          </p:cNvSpPr>
+          <p:nvPr>
+            <p:ph type="body" idx="1"/>
+          </p:nvPr>
+        </p:nvSpPr>
+        <p:spPr/>
+        <p:txBody>
+          <a:bodyPr/>
+          <a:lstStyle/>
+          <a:p>
+            <a:r>
+              <a:rPr lang="en-US" dirty="0"/>
+              <a:t/>
+            </a:r>
+            <a:endParaRPr lang="en-US" dirty="0"/>
+          </a:p>
+        </p:txBody>
+      </p:sp>
+      <p:sp>
+        <p:nvSpPr>
+          <p:cNvPr id="4" name="Slide Number Placeholder 3"/>
+          <p:cNvSpPr>
+            <a:spLocks noGrp="1"/>
+          </p:cNvSpPr>
+          <p:nvPr>
+            <p:ph type="sldNum" sz="quarter" idx="10"/>
+          </p:nvPr>
+        </p:nvSpPr>
+        <p:spPr/>
+        <p:txBody>
+          <a:bodyPr/>
+          <a:lstStyle/>
+          <a:p>
+            <a:fld id="{F7021451-1387-4CA6-816F-3879F97B5CBC}" type="slidenum">
+              <a:rPr lang="en-US"/>
+              <a:t>13</a:t>
             </a:fld>
             <a:endParaRPr lang="en-US"/>
           </a:p>
@@ -2245,7 +2605,7 @@
                   <a:srgbClr val="94A3B8"/>
                 </a:solidFill>
               </a:rPr>
-              <a:t>El clásico de la serpiente con Phaser 3 y JavaScript.</a:t>
+              <a:t>Serpiente con relieve, poderes y cinco escenarios en Phaser 3.</a:t>
             </a:r>
             <a:endParaRPr lang="en-US" sz="1800" dirty="0"/>
           </a:p>
@@ -2309,6 +2669,2314 @@
               <a:t>github.com/2026B-sof-jueg-gr1/...</a:t>
             </a:r>
             <a:endParaRPr lang="en-US" sz="1300" dirty="0"/>
+          </a:p>
+        </p:txBody>
+      </p:sp>
+    </p:spTree>
+  </p:cSld>
+  <p:clrMapOvr>
+    <a:masterClrMapping/>
+  </p:clrMapOvr>
+</p:sld>
+</file>
+
+<file path=ppt/slides/slide10.xml><?xml version="1.0" encoding="utf-8"?>
+<p:sld xmlns:a="http://schemas.openxmlformats.org/drawingml/2006/main" xmlns:r="http://schemas.openxmlformats.org/officeDocument/2006/relationships" xmlns:p="http://schemas.openxmlformats.org/presentationml/2006/main">
+  <p:cSld name="Slide 10">
+    <p:spTree>
+      <p:nvGrpSpPr>
+        <p:cNvPr id="1" name=""/>
+        <p:cNvGrpSpPr/>
+        <p:nvPr/>
+      </p:nvGrpSpPr>
+      <p:grpSpPr>
+        <a:xfrm>
+          <a:off x="0" y="0"/>
+          <a:ext cx="0" cy="0"/>
+          <a:chOff x="0" y="0"/>
+          <a:chExt cx="0" cy="0"/>
+        </a:xfrm>
+      </p:grpSpPr>
+      <p:sp>
+        <p:nvSpPr>
+          <p:cNvPr id="2" name="Text 0"/>
+          <p:cNvSpPr/>
+          <p:nvPr>
+            <p:ph idx="100" type="title" hasCustomPrompt="1"/>
+          </p:nvPr>
+        </p:nvSpPr>
+        <p:spPr>
+          <a:xfrm>
+            <a:off x="548640" y="411480"/>
+            <a:ext cx="8046720" cy="685800"/>
+          </a:xfrm>
+          <a:prstGeom prst="rect">
+            <a:avLst/>
+          </a:prstGeom>
+          <a:noFill/>
+          <a:ln/>
+        </p:spPr>
+        <p:txBody>
+          <a:bodyPr wrap="square" lIns="0" tIns="0" rIns="0" bIns="0" rtlCol="0" anchor="ctr"/>
+          <a:lstStyle/>
+          <a:p>
+            <a:pPr algn="l" indent="0" marL="0">
+              <a:buNone/>
+            </a:pPr>
+            <a:r>
+              <a:rPr lang="en-US" sz="3200" b="1" dirty="0">
+                <a:solidFill>
+                  <a:schemeClr val="tx1"/>
+                </a:solidFill>
+                <a:latin typeface="Segoe UI Semibold" pitchFamily="34" charset="0"/>
+                <a:ea typeface="Segoe UI Semibold" pitchFamily="34" charset="-122"/>
+                <a:cs typeface="Segoe UI Semibold" pitchFamily="34" charset="-120"/>
+              </a:rPr>
+              <a:t>Controles y Menú</a:t>
+            </a:r>
+            <a:endParaRPr lang="en-US" sz="3200" dirty="0"/>
+          </a:p>
+        </p:txBody>
+      </p:sp>
+      <p:pic>
+        <p:nvPicPr>
+          <p:cNvPr id="3" name="Icono 1" descr="preencoded.png">    </p:cNvPr>
+          <p:cNvPicPr>
+            <a:picLocks noChangeAspect="1"/>
+          </p:cNvPicPr>
+          <p:nvPr/>
+        </p:nvPicPr>
+        <p:blipFill>
+          <a:blip r:embed="rId1"/>
+          <a:stretch>
+            <a:fillRect/>
+          </a:stretch>
+        </p:blipFill>
+        <p:spPr>
+          <a:xfrm>
+            <a:off x="548640" y="1399032"/>
+            <a:ext cx="256032" cy="256032"/>
+          </a:xfrm>
+          <a:prstGeom prst="rect">
+            <a:avLst/>
+          </a:prstGeom>
+        </p:spPr>
+      </p:pic>
+      <p:sp>
+        <p:nvSpPr>
+          <p:cNvPr id="4" name="Titulo 1"/>
+          <p:cNvSpPr txBox="1"/>
+          <p:nvPr/>
+        </p:nvSpPr>
+        <p:spPr>
+          <a:xfrm>
+            <a:off x="960120" y="1371600"/>
+            <a:ext cx="3566160" cy="292608"/>
+          </a:xfrm>
+          <a:prstGeom prst="rect">
+            <a:avLst/>
+          </a:prstGeom>
+          <a:noFill/>
+          <a:ln/>
+        </p:spPr>
+        <p:txBody>
+          <a:bodyPr wrap="square" lIns="0" tIns="0" rIns="0" bIns="0" rtlCol="0" anchor="ctr"/>
+          <a:lstStyle/>
+          <a:p>
+            <a:pPr indent="0" marL="0">
+              <a:buNone/>
+            </a:pPr>
+            <a:r>
+              <a:rPr lang="en-US" sz="1500" b="1" dirty="0">
+                <a:solidFill>
+                  <a:schemeClr val="tx2"/>
+                </a:solidFill>
+                <a:latin typeface="Segoe UI Semibold" pitchFamily="34" charset="0"/>
+                <a:ea typeface="Segoe UI Semibold" pitchFamily="34" charset="-122"/>
+                <a:cs typeface="Segoe UI Semibold" pitchFamily="34" charset="-120"/>
+              </a:rPr>
+              <a:t>Flechas, WASD o deslizar</a:t>
+            </a:r>
+            <a:endParaRPr lang="en-US" sz="1500" dirty="0"/>
+          </a:p>
+        </p:txBody>
+      </p:sp>
+      <p:sp>
+        <p:nvSpPr>
+          <p:cNvPr id="5" name="Texto 1"/>
+          <p:cNvSpPr txBox="1"/>
+          <p:nvPr/>
+        </p:nvSpPr>
+        <p:spPr>
+          <a:xfrm>
+            <a:off x="960120" y="1673352"/>
+            <a:ext cx="3566160" cy="320040"/>
+          </a:xfrm>
+          <a:prstGeom prst="rect">
+            <a:avLst/>
+          </a:prstGeom>
+          <a:noFill/>
+          <a:ln/>
+        </p:spPr>
+        <p:txBody>
+          <a:bodyPr wrap="square" lIns="0" tIns="0" rIns="0" bIns="0" rtlCol="0" anchor="t"/>
+          <a:lstStyle/>
+          <a:p>
+            <a:pPr indent="0" marL="0">
+              <a:buNone/>
+            </a:pPr>
+            <a:r>
+              <a:rPr lang="en-US" sz="1200" dirty="0">
+                <a:solidFill>
+                  <a:schemeClr val="accent4"/>
+                </a:solidFill>
+              </a:rPr>
+              <a:t>Teclado en PC y gesto de deslizar en celular.</a:t>
+            </a:r>
+            <a:endParaRPr lang="en-US" sz="1200" dirty="0"/>
+          </a:p>
+        </p:txBody>
+      </p:sp>
+      <p:pic>
+        <p:nvPicPr>
+          <p:cNvPr id="6" name="Icono 2" descr="preencoded.png">    </p:cNvPr>
+          <p:cNvPicPr>
+            <a:picLocks noChangeAspect="1"/>
+          </p:cNvPicPr>
+          <p:nvPr/>
+        </p:nvPicPr>
+        <p:blipFill>
+          <a:blip r:embed="rId2"/>
+          <a:stretch>
+            <a:fillRect/>
+          </a:stretch>
+        </p:blipFill>
+        <p:spPr>
+          <a:xfrm>
+            <a:off x="548640" y="2084832"/>
+            <a:ext cx="256032" cy="256032"/>
+          </a:xfrm>
+          <a:prstGeom prst="rect">
+            <a:avLst/>
+          </a:prstGeom>
+        </p:spPr>
+      </p:pic>
+      <p:sp>
+        <p:nvSpPr>
+          <p:cNvPr id="7" name="Titulo 2"/>
+          <p:cNvSpPr txBox="1"/>
+          <p:nvPr/>
+        </p:nvSpPr>
+        <p:spPr>
+          <a:xfrm>
+            <a:off x="960120" y="2057400"/>
+            <a:ext cx="3566160" cy="292608"/>
+          </a:xfrm>
+          <a:prstGeom prst="rect">
+            <a:avLst/>
+          </a:prstGeom>
+          <a:noFill/>
+          <a:ln/>
+        </p:spPr>
+        <p:txBody>
+          <a:bodyPr wrap="square" lIns="0" tIns="0" rIns="0" bIns="0" rtlCol="0" anchor="ctr"/>
+          <a:lstStyle/>
+          <a:p>
+            <a:pPr indent="0" marL="0">
+              <a:buNone/>
+            </a:pPr>
+            <a:r>
+              <a:rPr lang="en-US" sz="1500" b="1" dirty="0">
+                <a:solidFill>
+                  <a:schemeClr val="tx2"/>
+                </a:solidFill>
+                <a:latin typeface="Segoe UI Semibold" pitchFamily="34" charset="0"/>
+                <a:ea typeface="Segoe UI Semibold" pitchFamily="34" charset="-122"/>
+                <a:cs typeface="Segoe UI Semibold" pitchFamily="34" charset="-120"/>
+              </a:rPr>
+              <a:t>Cola de giros</a:t>
+            </a:r>
+            <a:endParaRPr lang="en-US" sz="1500" dirty="0"/>
+          </a:p>
+        </p:txBody>
+      </p:sp>
+      <p:sp>
+        <p:nvSpPr>
+          <p:cNvPr id="8" name="Texto 2"/>
+          <p:cNvSpPr txBox="1"/>
+          <p:nvPr/>
+        </p:nvSpPr>
+        <p:spPr>
+          <a:xfrm>
+            <a:off x="960120" y="2359152"/>
+            <a:ext cx="3566160" cy="320040"/>
+          </a:xfrm>
+          <a:prstGeom prst="rect">
+            <a:avLst/>
+          </a:prstGeom>
+          <a:noFill/>
+          <a:ln/>
+        </p:spPr>
+        <p:txBody>
+          <a:bodyPr wrap="square" lIns="0" tIns="0" rIns="0" bIns="0" rtlCol="0" anchor="t"/>
+          <a:lstStyle/>
+          <a:p>
+            <a:pPr indent="0" marL="0">
+              <a:buNone/>
+            </a:pPr>
+            <a:r>
+              <a:rPr lang="en-US" sz="1200" dirty="0">
+                <a:solidFill>
+                  <a:schemeClr val="accent4"/>
+                </a:solidFill>
+              </a:rPr>
+              <a:t>Guarda hasta 2 giros para pulsaciones rápidas.</a:t>
+            </a:r>
+            <a:endParaRPr lang="en-US" sz="1200" dirty="0"/>
+          </a:p>
+        </p:txBody>
+      </p:sp>
+      <p:pic>
+        <p:nvPicPr>
+          <p:cNvPr id="9" name="Icono 3" descr="preencoded.png">    </p:cNvPr>
+          <p:cNvPicPr>
+            <a:picLocks noChangeAspect="1"/>
+          </p:cNvPicPr>
+          <p:nvPr/>
+        </p:nvPicPr>
+        <p:blipFill>
+          <a:blip r:embed="rId3"/>
+          <a:stretch>
+            <a:fillRect/>
+          </a:stretch>
+        </p:blipFill>
+        <p:spPr>
+          <a:xfrm>
+            <a:off x="548640" y="2770632"/>
+            <a:ext cx="256032" cy="256032"/>
+          </a:xfrm>
+          <a:prstGeom prst="rect">
+            <a:avLst/>
+          </a:prstGeom>
+        </p:spPr>
+      </p:pic>
+      <p:sp>
+        <p:nvSpPr>
+          <p:cNvPr id="10" name="Titulo 3"/>
+          <p:cNvSpPr txBox="1"/>
+          <p:nvPr/>
+        </p:nvSpPr>
+        <p:spPr>
+          <a:xfrm>
+            <a:off x="960120" y="2743200"/>
+            <a:ext cx="3566160" cy="292608"/>
+          </a:xfrm>
+          <a:prstGeom prst="rect">
+            <a:avLst/>
+          </a:prstGeom>
+          <a:noFill/>
+          <a:ln/>
+        </p:spPr>
+        <p:txBody>
+          <a:bodyPr wrap="square" lIns="0" tIns="0" rIns="0" bIns="0" rtlCol="0" anchor="ctr"/>
+          <a:lstStyle/>
+          <a:p>
+            <a:pPr indent="0" marL="0">
+              <a:buNone/>
+            </a:pPr>
+            <a:r>
+              <a:rPr lang="en-US" sz="1500" b="1" dirty="0">
+                <a:solidFill>
+                  <a:schemeClr val="tx2"/>
+                </a:solidFill>
+                <a:latin typeface="Segoe UI Semibold" pitchFamily="34" charset="0"/>
+                <a:ea typeface="Segoe UI Semibold" pitchFamily="34" charset="-122"/>
+                <a:cs typeface="Segoe UI Semibold" pitchFamily="34" charset="-120"/>
+              </a:rPr>
+              <a:t>Sin media vuelta</a:t>
+            </a:r>
+            <a:endParaRPr lang="en-US" sz="1500" dirty="0"/>
+          </a:p>
+        </p:txBody>
+      </p:sp>
+      <p:sp>
+        <p:nvSpPr>
+          <p:cNvPr id="11" name="Texto 3"/>
+          <p:cNvSpPr txBox="1"/>
+          <p:nvPr/>
+        </p:nvSpPr>
+        <p:spPr>
+          <a:xfrm>
+            <a:off x="960120" y="3044952"/>
+            <a:ext cx="3566160" cy="320040"/>
+          </a:xfrm>
+          <a:prstGeom prst="rect">
+            <a:avLst/>
+          </a:prstGeom>
+          <a:noFill/>
+          <a:ln/>
+        </p:spPr>
+        <p:txBody>
+          <a:bodyPr wrap="square" lIns="0" tIns="0" rIns="0" bIns="0" rtlCol="0" anchor="t"/>
+          <a:lstStyle/>
+          <a:p>
+            <a:pPr indent="0" marL="0">
+              <a:buNone/>
+            </a:pPr>
+            <a:r>
+              <a:rPr lang="en-US" sz="1200" dirty="0">
+                <a:solidFill>
+                  <a:schemeClr val="accent4"/>
+                </a:solidFill>
+              </a:rPr>
+              <a:t>Se ignora la dirección opuesta.</a:t>
+            </a:r>
+            <a:endParaRPr lang="en-US" sz="1200" dirty="0"/>
+          </a:p>
+        </p:txBody>
+      </p:sp>
+      <p:pic>
+        <p:nvPicPr>
+          <p:cNvPr id="12" name="Icono 4" descr="preencoded.png">    </p:cNvPr>
+          <p:cNvPicPr>
+            <a:picLocks noChangeAspect="1"/>
+          </p:cNvPicPr>
+          <p:nvPr/>
+        </p:nvPicPr>
+        <p:blipFill>
+          <a:blip r:embed="rId4"/>
+          <a:stretch>
+            <a:fillRect/>
+          </a:stretch>
+        </p:blipFill>
+        <p:spPr>
+          <a:xfrm>
+            <a:off x="548640" y="3456432"/>
+            <a:ext cx="256032" cy="256032"/>
+          </a:xfrm>
+          <a:prstGeom prst="rect">
+            <a:avLst/>
+          </a:prstGeom>
+        </p:spPr>
+      </p:pic>
+      <p:sp>
+        <p:nvSpPr>
+          <p:cNvPr id="13" name="Titulo 4"/>
+          <p:cNvSpPr txBox="1"/>
+          <p:nvPr/>
+        </p:nvSpPr>
+        <p:spPr>
+          <a:xfrm>
+            <a:off x="960120" y="3429000"/>
+            <a:ext cx="3566160" cy="292608"/>
+          </a:xfrm>
+          <a:prstGeom prst="rect">
+            <a:avLst/>
+          </a:prstGeom>
+          <a:noFill/>
+          <a:ln/>
+        </p:spPr>
+        <p:txBody>
+          <a:bodyPr wrap="square" lIns="0" tIns="0" rIns="0" bIns="0" rtlCol="0" anchor="ctr"/>
+          <a:lstStyle/>
+          <a:p>
+            <a:pPr indent="0" marL="0">
+              <a:buNone/>
+            </a:pPr>
+            <a:r>
+              <a:rPr lang="en-US" sz="1500" b="1" dirty="0">
+                <a:solidFill>
+                  <a:schemeClr val="tx2"/>
+                </a:solidFill>
+                <a:latin typeface="Segoe UI Semibold" pitchFamily="34" charset="0"/>
+                <a:ea typeface="Segoe UI Semibold" pitchFamily="34" charset="-122"/>
+                <a:cs typeface="Segoe UI Semibold" pitchFamily="34" charset="-120"/>
+              </a:rPr>
+              <a:t>Pausa con P o Esc</a:t>
+            </a:r>
+            <a:endParaRPr lang="en-US" sz="1500" dirty="0"/>
+          </a:p>
+        </p:txBody>
+      </p:sp>
+      <p:sp>
+        <p:nvSpPr>
+          <p:cNvPr id="14" name="Texto 4"/>
+          <p:cNvSpPr txBox="1"/>
+          <p:nvPr/>
+        </p:nvSpPr>
+        <p:spPr>
+          <a:xfrm>
+            <a:off x="960120" y="3730752"/>
+            <a:ext cx="3566160" cy="320040"/>
+          </a:xfrm>
+          <a:prstGeom prst="rect">
+            <a:avLst/>
+          </a:prstGeom>
+          <a:noFill/>
+          <a:ln/>
+        </p:spPr>
+        <p:txBody>
+          <a:bodyPr wrap="square" lIns="0" tIns="0" rIns="0" bIns="0" rtlCol="0" anchor="t"/>
+          <a:lstStyle/>
+          <a:p>
+            <a:pPr indent="0" marL="0">
+              <a:buNone/>
+            </a:pPr>
+            <a:r>
+              <a:rPr lang="en-US" sz="1200" dirty="0">
+                <a:solidFill>
+                  <a:schemeClr val="accent4"/>
+                </a:solidFill>
+              </a:rPr>
+              <a:t>Congela el tiempo, los poderes y las animaciones.</a:t>
+            </a:r>
+            <a:endParaRPr lang="en-US" sz="1200" dirty="0"/>
+          </a:p>
+        </p:txBody>
+      </p:sp>
+      <p:pic>
+        <p:nvPicPr>
+          <p:cNvPr id="15" name="Captura menu" descr="Captura del menú de inicio">    </p:cNvPr>
+          <p:cNvPicPr>
+            <a:picLocks noChangeAspect="1"/>
+          </p:cNvPicPr>
+          <p:nvPr/>
+        </p:nvPicPr>
+        <p:blipFill>
+          <a:blip r:embed="rId5"/>
+          <a:stretch>
+            <a:fillRect/>
+          </a:stretch>
+        </p:blipFill>
+        <p:spPr>
+          <a:xfrm>
+            <a:off x="4937760" y="1325880"/>
+            <a:ext cx="3657600" cy="2743200"/>
+          </a:xfrm>
+          <a:prstGeom prst="rect">
+            <a:avLst/>
+          </a:prstGeom>
+        </p:spPr>
+      </p:pic>
+      <p:sp>
+        <p:nvSpPr>
+          <p:cNvPr id="25" name="Slide Number Placeholder 0"/>
+          <p:cNvSpPr>
+            <a:spLocks noGrp="1"/>
+          </p:cNvSpPr>
+          <p:nvPr>
+            <p:ph type="sldNum" sz="quarter" idx="4294967295"/>
+          </p:nvPr>
+        </p:nvSpPr>
+        <p:spPr>
+          <a:xfrm>
+            <a:off x="8321040" y="4754880"/>
+            <a:ext cx="457200" cy="228600"/>
+          </a:xfrm>
+          <a:prstGeom prst="rect">
+            <a:avLst/>
+          </a:prstGeom>
+          <a:extLst>
+            <a:ext uri="{C572A759-6A51-4108-AA02-DFA0A04FC94B}">
+              <ma14:wrappingTextBoxFlag xmlns:ma14="http://schemas.microsoft.com/office/mac/drawingml/2011/main" val="0"/>
+            </a:ext>
+          </a:extLst>
+        </p:spPr>
+        <p:txBody>
+          <a:bodyPr/>
+          <a:lstStyle>
+            <a:lvl1pPr>
+              <a:defRPr sz="900">
+                <a:solidFill>
+                  <a:schemeClr val="accent3"/>
+                </a:solidFill>
+              </a:defRPr>
+            </a:lvl1pPr>
+          </a:lstStyle>
+          <a:p>
+            <a:pPr algn="r"/>
+            <a:fld id="{F7021451-1387-4CA6-816F-3879F97B5CBC}" type="slidenum">
+              <a:rPr b="0" lang="en-US"/>
+              <a:t>10</a:t>
+            </a:fld>
+            <a:endParaRPr lang="en-US"/>
+          </a:p>
+        </p:txBody>
+      </p:sp>
+    </p:spTree>
+  </p:cSld>
+  <p:clrMapOvr>
+    <a:masterClrMapping/>
+  </p:clrMapOvr>
+</p:sld>
+</file>
+
+<file path=ppt/slides/slide11.xml><?xml version="1.0" encoding="utf-8"?>
+<p:sld xmlns:a="http://schemas.openxmlformats.org/drawingml/2006/main" xmlns:r="http://schemas.openxmlformats.org/officeDocument/2006/relationships" xmlns:p="http://schemas.openxmlformats.org/presentationml/2006/main">
+  <p:cSld name="Slide 11">
+    <p:spTree>
+      <p:nvGrpSpPr>
+        <p:cNvPr id="1" name=""/>
+        <p:cNvGrpSpPr/>
+        <p:nvPr/>
+      </p:nvGrpSpPr>
+      <p:grpSpPr>
+        <a:xfrm>
+          <a:off x="0" y="0"/>
+          <a:ext cx="0" cy="0"/>
+          <a:chOff x="0" y="0"/>
+          <a:chExt cx="0" cy="0"/>
+        </a:xfrm>
+      </p:grpSpPr>
+      <p:sp>
+        <p:nvSpPr>
+          <p:cNvPr id="2" name="Text 0"/>
+          <p:cNvSpPr/>
+          <p:nvPr>
+            <p:ph idx="100" type="title" hasCustomPrompt="1"/>
+          </p:nvPr>
+        </p:nvSpPr>
+        <p:spPr>
+          <a:xfrm>
+            <a:off x="548640" y="411480"/>
+            <a:ext cx="8046720" cy="685800"/>
+          </a:xfrm>
+          <a:prstGeom prst="rect">
+            <a:avLst/>
+          </a:prstGeom>
+          <a:noFill/>
+          <a:ln/>
+        </p:spPr>
+        <p:txBody>
+          <a:bodyPr wrap="square" lIns="0" tIns="0" rIns="0" bIns="0" rtlCol="0" anchor="ctr"/>
+          <a:lstStyle/>
+          <a:p>
+            <a:pPr algn="ctr" indent="0" marL="0">
+              <a:buNone/>
+            </a:pPr>
+            <a:r>
+              <a:rPr lang="en-US" sz="3200" b="1" dirty="0">
+                <a:solidFill>
+                  <a:schemeClr val="tx1"/>
+                </a:solidFill>
+                <a:latin typeface="Segoe UI Semibold" pitchFamily="34" charset="0"/>
+                <a:ea typeface="Segoe UI Semibold" pitchFamily="34" charset="-122"/>
+                <a:cs typeface="Segoe UI Semibold" pitchFamily="34" charset="-120"/>
+              </a:rPr>
+              <a:t>Efectos y Pulido</a:t>
+            </a:r>
+            <a:endParaRPr lang="en-US" sz="3200" dirty="0"/>
+          </a:p>
+        </p:txBody>
+      </p:sp>
+      <p:sp>
+        <p:nvSpPr>
+          <p:cNvPr id="3" name="Tarjeta 1"/>
+          <p:cNvSpPr/>
+          <p:nvPr/>
+        </p:nvSpPr>
+        <p:spPr>
+          <a:xfrm>
+            <a:off x="548640" y="1600200"/>
+            <a:ext cx="1874520" cy="2286000"/>
+          </a:xfrm>
+          <a:prstGeom prst="roundRect">
+            <a:avLst>
+              <a:gd name="adj" fmla="val 5854"/>
+            </a:avLst>
+          </a:prstGeom>
+          <a:solidFill>
+            <a:schemeClr val="bg2"/>
+          </a:solidFill>
+          <a:ln/>
+        </p:spPr>
+      </p:sp>
+      <p:sp>
+        <p:nvSpPr>
+          <p:cNvPr id="4" name="Circulo 1"/>
+          <p:cNvSpPr/>
+          <p:nvPr/>
+        </p:nvSpPr>
+        <p:spPr>
+          <a:xfrm>
+            <a:off x="1188720" y="1828800"/>
+            <a:ext cx="594360" cy="594360"/>
+          </a:xfrm>
+          <a:prstGeom prst="ellipse">
+            <a:avLst/>
+          </a:prstGeom>
+          <a:solidFill>
+            <a:schemeClr val="accent2"/>
+          </a:solidFill>
+          <a:ln/>
+        </p:spPr>
+      </p:sp>
+      <p:pic>
+        <p:nvPicPr>
+          <p:cNvPr id="5" name="Icono 1" descr="preencoded.png">    </p:cNvPr>
+          <p:cNvPicPr>
+            <a:picLocks noChangeAspect="1"/>
+          </p:cNvPicPr>
+          <p:nvPr/>
+        </p:nvPicPr>
+        <p:blipFill>
+          <a:blip r:embed="rId1"/>
+          <a:stretch>
+            <a:fillRect/>
+          </a:stretch>
+        </p:blipFill>
+        <p:spPr>
+          <a:xfrm>
+            <a:off x="1339596" y="1979676"/>
+            <a:ext cx="292608" cy="292608"/>
+          </a:xfrm>
+          <a:prstGeom prst="rect">
+            <a:avLst/>
+          </a:prstGeom>
+        </p:spPr>
+      </p:pic>
+      <p:sp>
+        <p:nvSpPr>
+          <p:cNvPr id="6" name="Titulo 1"/>
+          <p:cNvSpPr txBox="1"/>
+          <p:nvPr/>
+        </p:nvSpPr>
+        <p:spPr>
+          <a:xfrm>
+            <a:off x="640080" y="2606040"/>
+            <a:ext cx="1691640" cy="320040"/>
+          </a:xfrm>
+          <a:prstGeom prst="rect">
+            <a:avLst/>
+          </a:prstGeom>
+          <a:noFill/>
+          <a:ln/>
+        </p:spPr>
+        <p:txBody>
+          <a:bodyPr wrap="square" lIns="0" tIns="0" rIns="0" bIns="0" rtlCol="0" anchor="ctr"/>
+          <a:lstStyle/>
+          <a:p>
+            <a:pPr algn="ctr" indent="0" marL="0">
+              <a:buNone/>
+            </a:pPr>
+            <a:r>
+              <a:rPr lang="en-US" sz="1500" b="1" dirty="0">
+                <a:solidFill>
+                  <a:schemeClr val="tx2"/>
+                </a:solidFill>
+                <a:latin typeface="Segoe UI Semibold" pitchFamily="34" charset="0"/>
+                <a:ea typeface="Segoe UI Semibold" pitchFamily="34" charset="-122"/>
+                <a:cs typeface="Segoe UI Semibold" pitchFamily="34" charset="-120"/>
+              </a:rPr>
+              <a:t>Partículas</a:t>
+            </a:r>
+            <a:endParaRPr lang="en-US" sz="1500" dirty="0"/>
+          </a:p>
+        </p:txBody>
+      </p:sp>
+      <p:sp>
+        <p:nvSpPr>
+          <p:cNvPr id="7" name="Texto 1"/>
+          <p:cNvSpPr txBox="1"/>
+          <p:nvPr/>
+        </p:nvSpPr>
+        <p:spPr>
+          <a:xfrm>
+            <a:off x="685800" y="2971800"/>
+            <a:ext cx="1600200" cy="777240"/>
+          </a:xfrm>
+          <a:prstGeom prst="rect">
+            <a:avLst/>
+          </a:prstGeom>
+          <a:noFill/>
+          <a:ln/>
+        </p:spPr>
+        <p:txBody>
+          <a:bodyPr wrap="square" lIns="0" tIns="0" rIns="0" bIns="0" rtlCol="0" anchor="t"/>
+          <a:lstStyle/>
+          <a:p>
+            <a:pPr algn="ctr" indent="0" marL="0">
+              <a:buNone/>
+            </a:pPr>
+            <a:r>
+              <a:rPr lang="en-US" sz="1200" dirty="0">
+                <a:solidFill>
+                  <a:schemeClr val="accent4"/>
+                </a:solidFill>
+              </a:rPr>
+              <a:t>explode() al comer, y hojas, nieve o brasas de ambiente.</a:t>
+            </a:r>
+            <a:endParaRPr lang="en-US" sz="1200" dirty="0"/>
+          </a:p>
+        </p:txBody>
+      </p:sp>
+      <p:sp>
+        <p:nvSpPr>
+          <p:cNvPr id="8" name="Tarjeta 2"/>
+          <p:cNvSpPr/>
+          <p:nvPr/>
+        </p:nvSpPr>
+        <p:spPr>
+          <a:xfrm>
+            <a:off x="2606040" y="1600200"/>
+            <a:ext cx="1874520" cy="2286000"/>
+          </a:xfrm>
+          <a:prstGeom prst="roundRect">
+            <a:avLst>
+              <a:gd name="adj" fmla="val 5854"/>
+            </a:avLst>
+          </a:prstGeom>
+          <a:solidFill>
+            <a:schemeClr val="bg2"/>
+          </a:solidFill>
+          <a:ln/>
+        </p:spPr>
+      </p:sp>
+      <p:sp>
+        <p:nvSpPr>
+          <p:cNvPr id="9" name="Circulo 2"/>
+          <p:cNvSpPr/>
+          <p:nvPr/>
+        </p:nvSpPr>
+        <p:spPr>
+          <a:xfrm>
+            <a:off x="3246120" y="1828800"/>
+            <a:ext cx="594360" cy="594360"/>
+          </a:xfrm>
+          <a:prstGeom prst="ellipse">
+            <a:avLst/>
+          </a:prstGeom>
+          <a:solidFill>
+            <a:schemeClr val="accent2"/>
+          </a:solidFill>
+          <a:ln/>
+        </p:spPr>
+      </p:sp>
+      <p:pic>
+        <p:nvPicPr>
+          <p:cNvPr id="10" name="Icono 2" descr="preencoded.png">    </p:cNvPr>
+          <p:cNvPicPr>
+            <a:picLocks noChangeAspect="1"/>
+          </p:cNvPicPr>
+          <p:nvPr/>
+        </p:nvPicPr>
+        <p:blipFill>
+          <a:blip r:embed="rId2"/>
+          <a:stretch>
+            <a:fillRect/>
+          </a:stretch>
+        </p:blipFill>
+        <p:spPr>
+          <a:xfrm>
+            <a:off x="3396996" y="1979676"/>
+            <a:ext cx="292608" cy="292608"/>
+          </a:xfrm>
+          <a:prstGeom prst="rect">
+            <a:avLst/>
+          </a:prstGeom>
+        </p:spPr>
+      </p:pic>
+      <p:sp>
+        <p:nvSpPr>
+          <p:cNvPr id="11" name="Titulo 2"/>
+          <p:cNvSpPr txBox="1"/>
+          <p:nvPr/>
+        </p:nvSpPr>
+        <p:spPr>
+          <a:xfrm>
+            <a:off x="2697480" y="2606040"/>
+            <a:ext cx="1691640" cy="320040"/>
+          </a:xfrm>
+          <a:prstGeom prst="rect">
+            <a:avLst/>
+          </a:prstGeom>
+          <a:noFill/>
+          <a:ln/>
+        </p:spPr>
+        <p:txBody>
+          <a:bodyPr wrap="square" lIns="0" tIns="0" rIns="0" bIns="0" rtlCol="0" anchor="ctr"/>
+          <a:lstStyle/>
+          <a:p>
+            <a:pPr algn="ctr" indent="0" marL="0">
+              <a:buNone/>
+            </a:pPr>
+            <a:r>
+              <a:rPr lang="en-US" sz="1500" b="1" dirty="0">
+                <a:solidFill>
+                  <a:schemeClr val="tx2"/>
+                </a:solidFill>
+                <a:latin typeface="Segoe UI Semibold" pitchFamily="34" charset="0"/>
+                <a:ea typeface="Segoe UI Semibold" pitchFamily="34" charset="-122"/>
+                <a:cs typeface="Segoe UI Semibold" pitchFamily="34" charset="-120"/>
+              </a:rPr>
+              <a:t>Texto flotante</a:t>
+            </a:r>
+            <a:endParaRPr lang="en-US" sz="1500" dirty="0"/>
+          </a:p>
+        </p:txBody>
+      </p:sp>
+      <p:sp>
+        <p:nvSpPr>
+          <p:cNvPr id="12" name="Texto 2"/>
+          <p:cNvSpPr txBox="1"/>
+          <p:nvPr/>
+        </p:nvSpPr>
+        <p:spPr>
+          <a:xfrm>
+            <a:off x="2743200" y="2971800"/>
+            <a:ext cx="1600200" cy="777240"/>
+          </a:xfrm>
+          <a:prstGeom prst="rect">
+            <a:avLst/>
+          </a:prstGeom>
+          <a:noFill/>
+          <a:ln/>
+        </p:spPr>
+        <p:txBody>
+          <a:bodyPr wrap="square" lIns="0" tIns="0" rIns="0" bIns="0" rtlCol="0" anchor="t"/>
+          <a:lstStyle/>
+          <a:p>
+            <a:pPr algn="ctr" indent="0" marL="0">
+              <a:buNone/>
+            </a:pPr>
+            <a:r>
+              <a:rPr lang="en-US" sz="1200" dirty="0">
+                <a:solidFill>
+                  <a:schemeClr val="accent4"/>
+                </a:solidFill>
+              </a:rPr>
+              <a:t>«+10» que sube y se desvanece.</a:t>
+            </a:r>
+            <a:endParaRPr lang="en-US" sz="1200" dirty="0"/>
+          </a:p>
+        </p:txBody>
+      </p:sp>
+      <p:sp>
+        <p:nvSpPr>
+          <p:cNvPr id="13" name="Tarjeta 3"/>
+          <p:cNvSpPr/>
+          <p:nvPr/>
+        </p:nvSpPr>
+        <p:spPr>
+          <a:xfrm>
+            <a:off x="4663440" y="1600200"/>
+            <a:ext cx="1874520" cy="2286000"/>
+          </a:xfrm>
+          <a:prstGeom prst="roundRect">
+            <a:avLst>
+              <a:gd name="adj" fmla="val 5854"/>
+            </a:avLst>
+          </a:prstGeom>
+          <a:solidFill>
+            <a:schemeClr val="bg2"/>
+          </a:solidFill>
+          <a:ln/>
+        </p:spPr>
+      </p:sp>
+      <p:sp>
+        <p:nvSpPr>
+          <p:cNvPr id="14" name="Circulo 3"/>
+          <p:cNvSpPr/>
+          <p:nvPr/>
+        </p:nvSpPr>
+        <p:spPr>
+          <a:xfrm>
+            <a:off x="5303520" y="1828800"/>
+            <a:ext cx="594360" cy="594360"/>
+          </a:xfrm>
+          <a:prstGeom prst="ellipse">
+            <a:avLst/>
+          </a:prstGeom>
+          <a:solidFill>
+            <a:schemeClr val="accent2"/>
+          </a:solidFill>
+          <a:ln/>
+        </p:spPr>
+      </p:sp>
+      <p:pic>
+        <p:nvPicPr>
+          <p:cNvPr id="15" name="Icono 3" descr="preencoded.png">    </p:cNvPr>
+          <p:cNvPicPr>
+            <a:picLocks noChangeAspect="1"/>
+          </p:cNvPicPr>
+          <p:nvPr/>
+        </p:nvPicPr>
+        <p:blipFill>
+          <a:blip r:embed="rId3"/>
+          <a:stretch>
+            <a:fillRect/>
+          </a:stretch>
+        </p:blipFill>
+        <p:spPr>
+          <a:xfrm>
+            <a:off x="5454396" y="1979676"/>
+            <a:ext cx="292608" cy="292608"/>
+          </a:xfrm>
+          <a:prstGeom prst="rect">
+            <a:avLst/>
+          </a:prstGeom>
+        </p:spPr>
+      </p:pic>
+      <p:sp>
+        <p:nvSpPr>
+          <p:cNvPr id="16" name="Titulo 3"/>
+          <p:cNvSpPr txBox="1"/>
+          <p:nvPr/>
+        </p:nvSpPr>
+        <p:spPr>
+          <a:xfrm>
+            <a:off x="4754880" y="2606040"/>
+            <a:ext cx="1691640" cy="320040"/>
+          </a:xfrm>
+          <a:prstGeom prst="rect">
+            <a:avLst/>
+          </a:prstGeom>
+          <a:noFill/>
+          <a:ln/>
+        </p:spPr>
+        <p:txBody>
+          <a:bodyPr wrap="square" lIns="0" tIns="0" rIns="0" bIns="0" rtlCol="0" anchor="ctr"/>
+          <a:lstStyle/>
+          <a:p>
+            <a:pPr algn="ctr" indent="0" marL="0">
+              <a:buNone/>
+            </a:pPr>
+            <a:r>
+              <a:rPr lang="en-US" sz="1500" b="1" dirty="0">
+                <a:solidFill>
+                  <a:schemeClr val="tx2"/>
+                </a:solidFill>
+                <a:latin typeface="Segoe UI Semibold" pitchFamily="34" charset="0"/>
+                <a:ea typeface="Segoe UI Semibold" pitchFamily="34" charset="-122"/>
+                <a:cs typeface="Segoe UI Semibold" pitchFamily="34" charset="-120"/>
+              </a:rPr>
+              <a:t>Tweens</a:t>
+            </a:r>
+            <a:endParaRPr lang="en-US" sz="1500" dirty="0"/>
+          </a:p>
+        </p:txBody>
+      </p:sp>
+      <p:sp>
+        <p:nvSpPr>
+          <p:cNvPr id="17" name="Texto 3"/>
+          <p:cNvSpPr txBox="1"/>
+          <p:nvPr/>
+        </p:nvSpPr>
+        <p:spPr>
+          <a:xfrm>
+            <a:off x="4800600" y="2971800"/>
+            <a:ext cx="1600200" cy="777240"/>
+          </a:xfrm>
+          <a:prstGeom prst="rect">
+            <a:avLst/>
+          </a:prstGeom>
+          <a:noFill/>
+          <a:ln/>
+        </p:spPr>
+        <p:txBody>
+          <a:bodyPr wrap="square" lIns="0" tIns="0" rIns="0" bIns="0" rtlCol="0" anchor="t"/>
+          <a:lstStyle/>
+          <a:p>
+            <a:pPr algn="ctr" indent="0" marL="0">
+              <a:buNone/>
+            </a:pPr>
+            <a:r>
+              <a:rPr lang="en-US" sz="1200" dirty="0">
+                <a:solidFill>
+                  <a:schemeClr val="accent4"/>
+                </a:solidFill>
+              </a:rPr>
+              <a:t>Latido de la manzana, giro de la estrella y aviso de nivel.</a:t>
+            </a:r>
+            <a:endParaRPr lang="en-US" sz="1200" dirty="0"/>
+          </a:p>
+        </p:txBody>
+      </p:sp>
+      <p:sp>
+        <p:nvSpPr>
+          <p:cNvPr id="18" name="Tarjeta 4"/>
+          <p:cNvSpPr/>
+          <p:nvPr/>
+        </p:nvSpPr>
+        <p:spPr>
+          <a:xfrm>
+            <a:off x="6720840" y="1600200"/>
+            <a:ext cx="1874520" cy="2286000"/>
+          </a:xfrm>
+          <a:prstGeom prst="roundRect">
+            <a:avLst>
+              <a:gd name="adj" fmla="val 5854"/>
+            </a:avLst>
+          </a:prstGeom>
+          <a:solidFill>
+            <a:schemeClr val="bg2"/>
+          </a:solidFill>
+          <a:ln/>
+        </p:spPr>
+      </p:sp>
+      <p:sp>
+        <p:nvSpPr>
+          <p:cNvPr id="19" name="Circulo 4"/>
+          <p:cNvSpPr/>
+          <p:nvPr/>
+        </p:nvSpPr>
+        <p:spPr>
+          <a:xfrm>
+            <a:off x="7360920" y="1828800"/>
+            <a:ext cx="594360" cy="594360"/>
+          </a:xfrm>
+          <a:prstGeom prst="ellipse">
+            <a:avLst/>
+          </a:prstGeom>
+          <a:solidFill>
+            <a:schemeClr val="accent2"/>
+          </a:solidFill>
+          <a:ln/>
+        </p:spPr>
+      </p:sp>
+      <p:pic>
+        <p:nvPicPr>
+          <p:cNvPr id="20" name="Icono 4" descr="preencoded.png">    </p:cNvPr>
+          <p:cNvPicPr>
+            <a:picLocks noChangeAspect="1"/>
+          </p:cNvPicPr>
+          <p:nvPr/>
+        </p:nvPicPr>
+        <p:blipFill>
+          <a:blip r:embed="rId4"/>
+          <a:stretch>
+            <a:fillRect/>
+          </a:stretch>
+        </p:blipFill>
+        <p:spPr>
+          <a:xfrm>
+            <a:off x="7511796" y="1979676"/>
+            <a:ext cx="292608" cy="292608"/>
+          </a:xfrm>
+          <a:prstGeom prst="rect">
+            <a:avLst/>
+          </a:prstGeom>
+        </p:spPr>
+      </p:pic>
+      <p:sp>
+        <p:nvSpPr>
+          <p:cNvPr id="21" name="Titulo 4"/>
+          <p:cNvSpPr txBox="1"/>
+          <p:nvPr/>
+        </p:nvSpPr>
+        <p:spPr>
+          <a:xfrm>
+            <a:off x="6812280" y="2606040"/>
+            <a:ext cx="1691640" cy="320040"/>
+          </a:xfrm>
+          <a:prstGeom prst="rect">
+            <a:avLst/>
+          </a:prstGeom>
+          <a:noFill/>
+          <a:ln/>
+        </p:spPr>
+        <p:txBody>
+          <a:bodyPr wrap="square" lIns="0" tIns="0" rIns="0" bIns="0" rtlCol="0" anchor="ctr"/>
+          <a:lstStyle/>
+          <a:p>
+            <a:pPr algn="ctr" indent="0" marL="0">
+              <a:buNone/>
+            </a:pPr>
+            <a:r>
+              <a:rPr lang="en-US" sz="1500" b="1" dirty="0">
+                <a:solidFill>
+                  <a:schemeClr val="tx2"/>
+                </a:solidFill>
+                <a:latin typeface="Segoe UI Semibold" pitchFamily="34" charset="0"/>
+                <a:ea typeface="Segoe UI Semibold" pitchFamily="34" charset="-122"/>
+                <a:cs typeface="Segoe UI Semibold" pitchFamily="34" charset="-120"/>
+              </a:rPr>
+              <a:t>Sonidos</a:t>
+            </a:r>
+            <a:endParaRPr lang="en-US" sz="1500" dirty="0"/>
+          </a:p>
+        </p:txBody>
+      </p:sp>
+      <p:sp>
+        <p:nvSpPr>
+          <p:cNvPr id="22" name="Texto 4"/>
+          <p:cNvSpPr txBox="1"/>
+          <p:nvPr/>
+        </p:nvSpPr>
+        <p:spPr>
+          <a:xfrm>
+            <a:off x="6858000" y="2971800"/>
+            <a:ext cx="1600200" cy="777240"/>
+          </a:xfrm>
+          <a:prstGeom prst="rect">
+            <a:avLst/>
+          </a:prstGeom>
+          <a:noFill/>
+          <a:ln/>
+        </p:spPr>
+        <p:txBody>
+          <a:bodyPr wrap="square" lIns="0" tIns="0" rIns="0" bIns="0" rtlCol="0" anchor="t"/>
+          <a:lstStyle/>
+          <a:p>
+            <a:pPr algn="ctr" indent="0" marL="0">
+              <a:buNone/>
+            </a:pPr>
+            <a:r>
+              <a:rPr lang="en-US" sz="1200" dirty="0">
+                <a:solidFill>
+                  <a:schemeClr val="accent4"/>
+                </a:solidFill>
+              </a:rPr>
+              <a:t>Tonos distintos al comer, tomar poderes y perder.</a:t>
+            </a:r>
+            <a:endParaRPr lang="en-US" sz="1200" dirty="0"/>
+          </a:p>
+        </p:txBody>
+      </p:sp>
+      <p:sp>
+        <p:nvSpPr>
+          <p:cNvPr id="25" name="Slide Number Placeholder 0"/>
+          <p:cNvSpPr>
+            <a:spLocks noGrp="1"/>
+          </p:cNvSpPr>
+          <p:nvPr>
+            <p:ph type="sldNum" sz="quarter" idx="4294967295"/>
+          </p:nvPr>
+        </p:nvSpPr>
+        <p:spPr>
+          <a:xfrm>
+            <a:off x="8321040" y="4754880"/>
+            <a:ext cx="457200" cy="228600"/>
+          </a:xfrm>
+          <a:prstGeom prst="rect">
+            <a:avLst/>
+          </a:prstGeom>
+          <a:extLst>
+            <a:ext uri="{C572A759-6A51-4108-AA02-DFA0A04FC94B}">
+              <ma14:wrappingTextBoxFlag xmlns:ma14="http://schemas.microsoft.com/office/mac/drawingml/2011/main" val="0"/>
+            </a:ext>
+          </a:extLst>
+        </p:spPr>
+        <p:txBody>
+          <a:bodyPr/>
+          <a:lstStyle>
+            <a:lvl1pPr>
+              <a:defRPr sz="900">
+                <a:solidFill>
+                  <a:schemeClr val="accent3"/>
+                </a:solidFill>
+              </a:defRPr>
+            </a:lvl1pPr>
+          </a:lstStyle>
+          <a:p>
+            <a:pPr algn="r"/>
+            <a:fld id="{F7021451-1387-4CA6-816F-3879F97B5CBC}" type="slidenum">
+              <a:rPr b="0" lang="en-US"/>
+              <a:t>11</a:t>
+            </a:fld>
+            <a:endParaRPr lang="en-US"/>
+          </a:p>
+        </p:txBody>
+      </p:sp>
+    </p:spTree>
+  </p:cSld>
+  <p:clrMapOvr>
+    <a:masterClrMapping/>
+  </p:clrMapOvr>
+</p:sld>
+</file>
+
+<file path=ppt/slides/slide12.xml><?xml version="1.0" encoding="utf-8"?>
+<p:sld xmlns:a="http://schemas.openxmlformats.org/drawingml/2006/main" xmlns:r="http://schemas.openxmlformats.org/officeDocument/2006/relationships" xmlns:p="http://schemas.openxmlformats.org/presentationml/2006/main">
+  <p:cSld name="Slide 12">
+    <p:spTree>
+      <p:nvGrpSpPr>
+        <p:cNvPr id="1" name=""/>
+        <p:cNvGrpSpPr/>
+        <p:nvPr/>
+      </p:nvGrpSpPr>
+      <p:grpSpPr>
+        <a:xfrm>
+          <a:off x="0" y="0"/>
+          <a:ext cx="0" cy="0"/>
+          <a:chOff x="0" y="0"/>
+          <a:chExt cx="0" cy="0"/>
+        </a:xfrm>
+      </p:grpSpPr>
+      <p:sp>
+        <p:nvSpPr>
+          <p:cNvPr id="2" name="Text 0"/>
+          <p:cNvSpPr/>
+          <p:nvPr>
+            <p:ph idx="100" type="title" hasCustomPrompt="1"/>
+          </p:nvPr>
+        </p:nvSpPr>
+        <p:spPr>
+          <a:xfrm>
+            <a:off x="548640" y="411480"/>
+            <a:ext cx="8046720" cy="685800"/>
+          </a:xfrm>
+          <a:prstGeom prst="rect">
+            <a:avLst/>
+          </a:prstGeom>
+          <a:noFill/>
+          <a:ln/>
+        </p:spPr>
+        <p:txBody>
+          <a:bodyPr wrap="square" lIns="0" tIns="0" rIns="0" bIns="0" rtlCol="0" anchor="ctr"/>
+          <a:lstStyle/>
+          <a:p>
+            <a:pPr algn="ctr" indent="0" marL="0">
+              <a:buNone/>
+            </a:pPr>
+            <a:r>
+              <a:rPr lang="en-US" sz="3200" b="1" dirty="0">
+                <a:solidFill>
+                  <a:schemeClr val="tx1"/>
+                </a:solidFill>
+                <a:latin typeface="Segoe UI Semibold" pitchFamily="34" charset="0"/>
+                <a:ea typeface="Segoe UI Semibold" pitchFamily="34" charset="-122"/>
+                <a:cs typeface="Segoe UI Semibold" pitchFamily="34" charset="-120"/>
+              </a:rPr>
+              <a:t>Fin de la Partida</a:t>
+            </a:r>
+            <a:endParaRPr lang="en-US" sz="3200" dirty="0"/>
+          </a:p>
+        </p:txBody>
+      </p:sp>
+      <p:sp>
+        <p:nvSpPr>
+          <p:cNvPr id="3" name="Linea"/>
+          <p:cNvSpPr/>
+          <p:nvPr/>
+        </p:nvSpPr>
+        <p:spPr>
+          <a:xfrm>
+            <a:off x="1828800" y="2011680"/>
+            <a:ext cx="5486400" cy="0"/>
+          </a:xfrm>
+          <a:prstGeom prst="line">
+            <a:avLst/>
+          </a:prstGeom>
+          <a:noFill/>
+          <a:ln w="38100">
+            <a:solidFill>
+              <a:schemeClr val="accent5"/>
+            </a:solidFill>
+            <a:prstDash val="solid"/>
+          </a:ln>
+        </p:spPr>
+      </p:sp>
+      <p:sp>
+        <p:nvSpPr>
+          <p:cNvPr id="4" name="Circulo 1"/>
+          <p:cNvSpPr/>
+          <p:nvPr/>
+        </p:nvSpPr>
+        <p:spPr>
+          <a:xfrm>
+            <a:off x="1527048" y="1709928"/>
+            <a:ext cx="603504" cy="603504"/>
+          </a:xfrm>
+          <a:prstGeom prst="ellipse">
+            <a:avLst/>
+          </a:prstGeom>
+          <a:solidFill>
+            <a:schemeClr val="bg2"/>
+          </a:solidFill>
+          <a:ln w="31750">
+            <a:solidFill>
+              <a:schemeClr val="accent1"/>
+            </a:solidFill>
+            <a:prstDash val="solid"/>
+          </a:ln>
+        </p:spPr>
+      </p:sp>
+      <p:pic>
+        <p:nvPicPr>
+          <p:cNvPr id="5" name="Icono 1" descr="preencoded.png">    </p:cNvPr>
+          <p:cNvPicPr>
+            <a:picLocks noChangeAspect="1"/>
+          </p:cNvPicPr>
+          <p:nvPr/>
+        </p:nvPicPr>
+        <p:blipFill>
+          <a:blip r:embed="rId1"/>
+          <a:stretch>
+            <a:fillRect/>
+          </a:stretch>
+        </p:blipFill>
+        <p:spPr>
+          <a:xfrm>
+            <a:off x="1682496" y="1865376"/>
+            <a:ext cx="292608" cy="292608"/>
+          </a:xfrm>
+          <a:prstGeom prst="rect">
+            <a:avLst/>
+          </a:prstGeom>
+        </p:spPr>
+      </p:pic>
+      <p:sp>
+        <p:nvSpPr>
+          <p:cNvPr id="6" name="Paso 1"/>
+          <p:cNvSpPr txBox="1"/>
+          <p:nvPr/>
+        </p:nvSpPr>
+        <p:spPr>
+          <a:xfrm>
+            <a:off x="685800" y="2514600"/>
+            <a:ext cx="2286000" cy="365760"/>
+          </a:xfrm>
+          <a:prstGeom prst="rect">
+            <a:avLst/>
+          </a:prstGeom>
+          <a:noFill/>
+          <a:ln/>
+        </p:spPr>
+        <p:txBody>
+          <a:bodyPr wrap="square" lIns="0" tIns="0" rIns="0" bIns="0" rtlCol="0" anchor="ctr"/>
+          <a:lstStyle/>
+          <a:p>
+            <a:pPr algn="ctr" indent="0" marL="0">
+              <a:buNone/>
+            </a:pPr>
+            <a:r>
+              <a:rPr lang="en-US" sz="1800" b="1" dirty="0">
+                <a:solidFill>
+                  <a:schemeClr val="tx2"/>
+                </a:solidFill>
+                <a:latin typeface="Segoe UI Semibold" pitchFamily="34" charset="0"/>
+                <a:ea typeface="Segoe UI Semibold" pitchFamily="34" charset="-122"/>
+                <a:cs typeface="Segoe UI Semibold" pitchFamily="34" charset="-120"/>
+              </a:rPr>
+              <a:t>1. Choque</a:t>
+            </a:r>
+            <a:endParaRPr lang="en-US" sz="1800" dirty="0"/>
+          </a:p>
+        </p:txBody>
+      </p:sp>
+      <p:sp>
+        <p:nvSpPr>
+          <p:cNvPr id="7" name="Detalle 1"/>
+          <p:cNvSpPr txBox="1"/>
+          <p:nvPr/>
+        </p:nvSpPr>
+        <p:spPr>
+          <a:xfrm>
+            <a:off x="685800" y="2880360"/>
+            <a:ext cx="2286000" cy="640080"/>
+          </a:xfrm>
+          <a:prstGeom prst="rect">
+            <a:avLst/>
+          </a:prstGeom>
+          <a:noFill/>
+          <a:ln/>
+        </p:spPr>
+        <p:txBody>
+          <a:bodyPr wrap="square" lIns="0" tIns="0" rIns="0" bIns="0" rtlCol="0" anchor="t"/>
+          <a:lstStyle/>
+          <a:p>
+            <a:pPr algn="ctr" indent="0" marL="0">
+              <a:buNone/>
+            </a:pPr>
+            <a:r>
+              <a:rPr lang="en-US" sz="1200" dirty="0">
+                <a:solidFill>
+                  <a:schemeClr val="accent3"/>
+                </a:solidFill>
+              </a:rPr>
+              <a:t>Pared o propio cuerpo, salvo que tengas escudo. La cámara tiembla.</a:t>
+            </a:r>
+            <a:endParaRPr lang="en-US" sz="1200" dirty="0"/>
+          </a:p>
+        </p:txBody>
+      </p:sp>
+      <p:sp>
+        <p:nvSpPr>
+          <p:cNvPr id="8" name="Circulo 2"/>
+          <p:cNvSpPr/>
+          <p:nvPr/>
+        </p:nvSpPr>
+        <p:spPr>
+          <a:xfrm>
+            <a:off x="4270248" y="1709928"/>
+            <a:ext cx="603504" cy="603504"/>
+          </a:xfrm>
+          <a:prstGeom prst="ellipse">
+            <a:avLst/>
+          </a:prstGeom>
+          <a:solidFill>
+            <a:schemeClr val="bg2"/>
+          </a:solidFill>
+          <a:ln w="31750">
+            <a:solidFill>
+              <a:schemeClr val="accent1"/>
+            </a:solidFill>
+            <a:prstDash val="solid"/>
+          </a:ln>
+        </p:spPr>
+      </p:sp>
+      <p:pic>
+        <p:nvPicPr>
+          <p:cNvPr id="9" name="Icono 2" descr="preencoded.png">    </p:cNvPr>
+          <p:cNvPicPr>
+            <a:picLocks noChangeAspect="1"/>
+          </p:cNvPicPr>
+          <p:nvPr/>
+        </p:nvPicPr>
+        <p:blipFill>
+          <a:blip r:embed="rId2"/>
+          <a:stretch>
+            <a:fillRect/>
+          </a:stretch>
+        </p:blipFill>
+        <p:spPr>
+          <a:xfrm>
+            <a:off x="4425696" y="1865376"/>
+            <a:ext cx="292608" cy="292608"/>
+          </a:xfrm>
+          <a:prstGeom prst="rect">
+            <a:avLst/>
+          </a:prstGeom>
+        </p:spPr>
+      </p:pic>
+      <p:sp>
+        <p:nvSpPr>
+          <p:cNvPr id="10" name="Paso 2"/>
+          <p:cNvSpPr txBox="1"/>
+          <p:nvPr/>
+        </p:nvSpPr>
+        <p:spPr>
+          <a:xfrm>
+            <a:off x="3429000" y="2514600"/>
+            <a:ext cx="2286000" cy="365760"/>
+          </a:xfrm>
+          <a:prstGeom prst="rect">
+            <a:avLst/>
+          </a:prstGeom>
+          <a:noFill/>
+          <a:ln/>
+        </p:spPr>
+        <p:txBody>
+          <a:bodyPr wrap="square" lIns="0" tIns="0" rIns="0" bIns="0" rtlCol="0" anchor="ctr"/>
+          <a:lstStyle/>
+          <a:p>
+            <a:pPr algn="ctr" indent="0" marL="0">
+              <a:buNone/>
+            </a:pPr>
+            <a:r>
+              <a:rPr lang="en-US" sz="1800" b="1" dirty="0">
+                <a:solidFill>
+                  <a:schemeClr val="tx2"/>
+                </a:solidFill>
+                <a:latin typeface="Segoe UI Semibold" pitchFamily="34" charset="0"/>
+                <a:ea typeface="Segoe UI Semibold" pitchFamily="34" charset="-122"/>
+                <a:cs typeface="Segoe UI Semibold" pitchFamily="34" charset="-120"/>
+              </a:rPr>
+              <a:t>2. Récord</a:t>
+            </a:r>
+            <a:endParaRPr lang="en-US" sz="1800" dirty="0"/>
+          </a:p>
+        </p:txBody>
+      </p:sp>
+      <p:sp>
+        <p:nvSpPr>
+          <p:cNvPr id="11" name="Detalle 2"/>
+          <p:cNvSpPr txBox="1"/>
+          <p:nvPr/>
+        </p:nvSpPr>
+        <p:spPr>
+          <a:xfrm>
+            <a:off x="3429000" y="2880360"/>
+            <a:ext cx="2286000" cy="640080"/>
+          </a:xfrm>
+          <a:prstGeom prst="rect">
+            <a:avLst/>
+          </a:prstGeom>
+          <a:noFill/>
+          <a:ln/>
+        </p:spPr>
+        <p:txBody>
+          <a:bodyPr wrap="square" lIns="0" tIns="0" rIns="0" bIns="0" rtlCol="0" anchor="t"/>
+          <a:lstStyle/>
+          <a:p>
+            <a:pPr algn="ctr" indent="0" marL="0">
+              <a:buNone/>
+            </a:pPr>
+            <a:r>
+              <a:rPr lang="en-US" sz="1200" dirty="0">
+                <a:solidFill>
+                  <a:schemeClr val="accent3"/>
+                </a:solidFill>
+              </a:rPr>
+              <a:t>Si superas la mejor marca aparece «¡Nuevo récord!» y se guarda.</a:t>
+            </a:r>
+            <a:endParaRPr lang="en-US" sz="1200" dirty="0"/>
+          </a:p>
+        </p:txBody>
+      </p:sp>
+      <p:sp>
+        <p:nvSpPr>
+          <p:cNvPr id="12" name="Circulo 3"/>
+          <p:cNvSpPr/>
+          <p:nvPr/>
+        </p:nvSpPr>
+        <p:spPr>
+          <a:xfrm>
+            <a:off x="7013448" y="1709928"/>
+            <a:ext cx="603504" cy="603504"/>
+          </a:xfrm>
+          <a:prstGeom prst="ellipse">
+            <a:avLst/>
+          </a:prstGeom>
+          <a:solidFill>
+            <a:schemeClr val="accent1"/>
+          </a:solidFill>
+          <a:ln w="31750">
+            <a:solidFill>
+              <a:schemeClr val="accent1"/>
+            </a:solidFill>
+            <a:prstDash val="solid"/>
+          </a:ln>
+        </p:spPr>
+      </p:sp>
+      <p:pic>
+        <p:nvPicPr>
+          <p:cNvPr id="13" name="Icono 3" descr="preencoded.png">    </p:cNvPr>
+          <p:cNvPicPr>
+            <a:picLocks noChangeAspect="1"/>
+          </p:cNvPicPr>
+          <p:nvPr/>
+        </p:nvPicPr>
+        <p:blipFill>
+          <a:blip r:embed="rId3"/>
+          <a:stretch>
+            <a:fillRect/>
+          </a:stretch>
+        </p:blipFill>
+        <p:spPr>
+          <a:xfrm>
+            <a:off x="7168896" y="1865376"/>
+            <a:ext cx="292608" cy="292608"/>
+          </a:xfrm>
+          <a:prstGeom prst="rect">
+            <a:avLst/>
+          </a:prstGeom>
+        </p:spPr>
+      </p:pic>
+      <p:sp>
+        <p:nvSpPr>
+          <p:cNvPr id="14" name="Paso 3"/>
+          <p:cNvSpPr txBox="1"/>
+          <p:nvPr/>
+        </p:nvSpPr>
+        <p:spPr>
+          <a:xfrm>
+            <a:off x="6172200" y="2514600"/>
+            <a:ext cx="2286000" cy="365760"/>
+          </a:xfrm>
+          <a:prstGeom prst="rect">
+            <a:avLst/>
+          </a:prstGeom>
+          <a:noFill/>
+          <a:ln/>
+        </p:spPr>
+        <p:txBody>
+          <a:bodyPr wrap="square" lIns="0" tIns="0" rIns="0" bIns="0" rtlCol="0" anchor="ctr"/>
+          <a:lstStyle/>
+          <a:p>
+            <a:pPr algn="ctr" indent="0" marL="0">
+              <a:buNone/>
+            </a:pPr>
+            <a:r>
+              <a:rPr lang="en-US" sz="1800" b="1" dirty="0">
+                <a:solidFill>
+                  <a:schemeClr val="tx2"/>
+                </a:solidFill>
+                <a:latin typeface="Segoe UI Semibold" pitchFamily="34" charset="0"/>
+                <a:ea typeface="Segoe UI Semibold" pitchFamily="34" charset="-122"/>
+                <a:cs typeface="Segoe UI Semibold" pitchFamily="34" charset="-120"/>
+              </a:rPr>
+              <a:t>3. Reinicio</a:t>
+            </a:r>
+            <a:endParaRPr lang="en-US" sz="1800" dirty="0"/>
+          </a:p>
+        </p:txBody>
+      </p:sp>
+      <p:sp>
+        <p:nvSpPr>
+          <p:cNvPr id="15" name="Detalle 3"/>
+          <p:cNvSpPr txBox="1"/>
+          <p:nvPr/>
+        </p:nvSpPr>
+        <p:spPr>
+          <a:xfrm>
+            <a:off x="6172200" y="2880360"/>
+            <a:ext cx="2286000" cy="640080"/>
+          </a:xfrm>
+          <a:prstGeom prst="rect">
+            <a:avLst/>
+          </a:prstGeom>
+          <a:noFill/>
+          <a:ln/>
+        </p:spPr>
+        <p:txBody>
+          <a:bodyPr wrap="square" lIns="0" tIns="0" rIns="0" bIns="0" rtlCol="0" anchor="t"/>
+          <a:lstStyle/>
+          <a:p>
+            <a:pPr algn="ctr" indent="0" marL="0">
+              <a:buNone/>
+            </a:pPr>
+            <a:r>
+              <a:rPr lang="en-US" sz="1200" dirty="0">
+                <a:solidFill>
+                  <a:schemeClr val="accent3"/>
+                </a:solidFill>
+              </a:rPr>
+              <a:t>Espacio o tocar para reintentar; M vuelve al menú.</a:t>
+            </a:r>
+            <a:endParaRPr lang="en-US" sz="1200" dirty="0"/>
+          </a:p>
+        </p:txBody>
+      </p:sp>
+      <p:sp>
+        <p:nvSpPr>
+          <p:cNvPr id="25" name="Slide Number Placeholder 0"/>
+          <p:cNvSpPr>
+            <a:spLocks noGrp="1"/>
+          </p:cNvSpPr>
+          <p:nvPr>
+            <p:ph type="sldNum" sz="quarter" idx="4294967295"/>
+          </p:nvPr>
+        </p:nvSpPr>
+        <p:spPr>
+          <a:xfrm>
+            <a:off x="8321040" y="4754880"/>
+            <a:ext cx="457200" cy="228600"/>
+          </a:xfrm>
+          <a:prstGeom prst="rect">
+            <a:avLst/>
+          </a:prstGeom>
+          <a:extLst>
+            <a:ext uri="{C572A759-6A51-4108-AA02-DFA0A04FC94B}">
+              <ma14:wrappingTextBoxFlag xmlns:ma14="http://schemas.microsoft.com/office/mac/drawingml/2011/main" val="0"/>
+            </a:ext>
+          </a:extLst>
+        </p:spPr>
+        <p:txBody>
+          <a:bodyPr/>
+          <a:lstStyle>
+            <a:lvl1pPr>
+              <a:defRPr sz="900">
+                <a:solidFill>
+                  <a:schemeClr val="accent3"/>
+                </a:solidFill>
+              </a:defRPr>
+            </a:lvl1pPr>
+          </a:lstStyle>
+          <a:p>
+            <a:pPr algn="r"/>
+            <a:fld id="{F7021451-1387-4CA6-816F-3879F97B5CBC}" type="slidenum">
+              <a:rPr b="0" lang="en-US"/>
+              <a:t>12</a:t>
+            </a:fld>
+            <a:endParaRPr lang="en-US"/>
+          </a:p>
+        </p:txBody>
+      </p:sp>
+    </p:spTree>
+  </p:cSld>
+  <p:clrMapOvr>
+    <a:masterClrMapping/>
+  </p:clrMapOvr>
+</p:sld>
+</file>
+
+<file path=ppt/slides/slide13.xml><?xml version="1.0" encoding="utf-8"?>
+<p:sld xmlns:a="http://schemas.openxmlformats.org/drawingml/2006/main" xmlns:r="http://schemas.openxmlformats.org/officeDocument/2006/relationships" xmlns:p="http://schemas.openxmlformats.org/presentationml/2006/main">
+  <p:cSld name="Slide 13">
+    <p:spTree>
+      <p:nvGrpSpPr>
+        <p:cNvPr id="1" name=""/>
+        <p:cNvGrpSpPr/>
+        <p:nvPr/>
+      </p:nvGrpSpPr>
+      <p:grpSpPr>
+        <a:xfrm>
+          <a:off x="0" y="0"/>
+          <a:ext cx="0" cy="0"/>
+          <a:chOff x="0" y="0"/>
+          <a:chExt cx="0" cy="0"/>
+        </a:xfrm>
+      </p:grpSpPr>
+      <p:sp>
+        <p:nvSpPr>
+          <p:cNvPr id="2" name="Text 0"/>
+          <p:cNvSpPr/>
+          <p:nvPr>
+            <p:ph idx="100" type="title" hasCustomPrompt="1"/>
+          </p:nvPr>
+        </p:nvSpPr>
+        <p:spPr>
+          <a:xfrm>
+            <a:off x="548640" y="411480"/>
+            <a:ext cx="8046720" cy="685800"/>
+          </a:xfrm>
+          <a:prstGeom prst="rect">
+            <a:avLst/>
+          </a:prstGeom>
+          <a:noFill/>
+          <a:ln/>
+        </p:spPr>
+        <p:txBody>
+          <a:bodyPr wrap="square" lIns="0" tIns="0" rIns="0" bIns="0" rtlCol="0" anchor="ctr"/>
+          <a:lstStyle/>
+          <a:p>
+            <a:pPr algn="ctr" indent="0" marL="0">
+              <a:buNone/>
+            </a:pPr>
+            <a:r>
+              <a:rPr lang="en-US" sz="3200" b="1" dirty="0">
+                <a:solidFill>
+                  <a:schemeClr val="bg1"/>
+                </a:solidFill>
+                <a:latin typeface="Segoe UI Semibold" pitchFamily="34" charset="0"/>
+                <a:ea typeface="Segoe UI Semibold" pitchFamily="34" charset="-122"/>
+                <a:cs typeface="Segoe UI Semibold" pitchFamily="34" charset="-120"/>
+              </a:rPr>
+              <a:t>Arquitectura del Código</a:t>
+            </a:r>
+            <a:endParaRPr lang="en-US" sz="3200" dirty="0"/>
+          </a:p>
+        </p:txBody>
+      </p:sp>
+      <p:sp>
+        <p:nvSpPr>
+          <p:cNvPr id="3" name="Fila 1"/>
+          <p:cNvSpPr/>
+          <p:nvPr/>
+        </p:nvSpPr>
+        <p:spPr>
+          <a:xfrm>
+            <a:off x="1097280" y="1325880"/>
+            <a:ext cx="6949440" cy="475488"/>
+          </a:xfrm>
+          <a:prstGeom prst="roundRect">
+            <a:avLst>
+              <a:gd name="adj" fmla="val 15385"/>
+            </a:avLst>
+          </a:prstGeom>
+          <a:solidFill>
+            <a:schemeClr val="accent6"/>
+          </a:solidFill>
+          <a:ln/>
+        </p:spPr>
+      </p:sp>
+      <p:sp>
+        <p:nvSpPr>
+          <p:cNvPr id="4" name="Archivo 1"/>
+          <p:cNvSpPr txBox="1"/>
+          <p:nvPr/>
+        </p:nvSpPr>
+        <p:spPr>
+          <a:xfrm>
+            <a:off x="1371600" y="1325880"/>
+            <a:ext cx="1737360" cy="475488"/>
+          </a:xfrm>
+          <a:prstGeom prst="rect">
+            <a:avLst/>
+          </a:prstGeom>
+          <a:noFill/>
+          <a:ln/>
+        </p:spPr>
+        <p:txBody>
+          <a:bodyPr wrap="square" lIns="0" tIns="0" rIns="0" bIns="0" rtlCol="0" anchor="ctr"/>
+          <a:lstStyle/>
+          <a:p>
+            <a:pPr indent="0" marL="0">
+              <a:buNone/>
+            </a:pPr>
+            <a:r>
+              <a:rPr lang="en-US" sz="1400" dirty="0">
+                <a:solidFill>
+                  <a:srgbClr val="86EFAC"/>
+                </a:solidFill>
+                <a:latin typeface="Consolas" pitchFamily="34" charset="0"/>
+                <a:ea typeface="Consolas" pitchFamily="34" charset="-122"/>
+                <a:cs typeface="Consolas" pitchFamily="34" charset="-120"/>
+              </a:rPr>
+              <a:t>index.html</a:t>
+            </a:r>
+            <a:endParaRPr lang="en-US" sz="1400" dirty="0"/>
+          </a:p>
+        </p:txBody>
+      </p:sp>
+      <p:sp>
+        <p:nvSpPr>
+          <p:cNvPr id="5" name="Descripcion 1"/>
+          <p:cNvSpPr txBox="1"/>
+          <p:nvPr/>
+        </p:nvSpPr>
+        <p:spPr>
+          <a:xfrm>
+            <a:off x="3154680" y="1325880"/>
+            <a:ext cx="4754880" cy="475488"/>
+          </a:xfrm>
+          <a:prstGeom prst="rect">
+            <a:avLst/>
+          </a:prstGeom>
+          <a:noFill/>
+          <a:ln/>
+        </p:spPr>
+        <p:txBody>
+          <a:bodyPr wrap="square" lIns="0" tIns="0" rIns="0" bIns="0" rtlCol="0" anchor="ctr"/>
+          <a:lstStyle/>
+          <a:p>
+            <a:pPr indent="0" marL="0">
+              <a:buNone/>
+            </a:pPr>
+            <a:r>
+              <a:rPr lang="en-US" sz="1300" dirty="0">
+                <a:solidFill>
+                  <a:srgbClr val="CBD5E1"/>
+                </a:solidFill>
+              </a:rPr>
+              <a:t>Carga Phaser desde CDN y ajusta el lienzo a la pantalla.</a:t>
+            </a:r>
+            <a:endParaRPr lang="en-US" sz="1300" dirty="0"/>
+          </a:p>
+        </p:txBody>
+      </p:sp>
+      <p:sp>
+        <p:nvSpPr>
+          <p:cNvPr id="6" name="Fila 2"/>
+          <p:cNvSpPr/>
+          <p:nvPr/>
+        </p:nvSpPr>
+        <p:spPr>
+          <a:xfrm>
+            <a:off x="1097280" y="1929384"/>
+            <a:ext cx="6949440" cy="475488"/>
+          </a:xfrm>
+          <a:prstGeom prst="roundRect">
+            <a:avLst>
+              <a:gd name="adj" fmla="val 15385"/>
+            </a:avLst>
+          </a:prstGeom>
+          <a:solidFill>
+            <a:schemeClr val="accent6"/>
+          </a:solidFill>
+          <a:ln/>
+        </p:spPr>
+      </p:sp>
+      <p:sp>
+        <p:nvSpPr>
+          <p:cNvPr id="7" name="Archivo 2"/>
+          <p:cNvSpPr txBox="1"/>
+          <p:nvPr/>
+        </p:nvSpPr>
+        <p:spPr>
+          <a:xfrm>
+            <a:off x="1371600" y="1929384"/>
+            <a:ext cx="1737360" cy="475488"/>
+          </a:xfrm>
+          <a:prstGeom prst="rect">
+            <a:avLst/>
+          </a:prstGeom>
+          <a:noFill/>
+          <a:ln/>
+        </p:spPr>
+        <p:txBody>
+          <a:bodyPr wrap="square" lIns="0" tIns="0" rIns="0" bIns="0" rtlCol="0" anchor="ctr"/>
+          <a:lstStyle/>
+          <a:p>
+            <a:pPr indent="0" marL="0">
+              <a:buNone/>
+            </a:pPr>
+            <a:r>
+              <a:rPr lang="en-US" sz="1400" dirty="0">
+                <a:solidFill>
+                  <a:srgbClr val="86EFAC"/>
+                </a:solidFill>
+                <a:latin typeface="Consolas" pitchFamily="34" charset="0"/>
+                <a:ea typeface="Consolas" pitchFamily="34" charset="-122"/>
+                <a:cs typeface="Consolas" pitchFamily="34" charset="-120"/>
+              </a:rPr>
+              <a:t>draw*()</a:t>
+            </a:r>
+            <a:endParaRPr lang="en-US" sz="1400" dirty="0"/>
+          </a:p>
+        </p:txBody>
+      </p:sp>
+      <p:sp>
+        <p:nvSpPr>
+          <p:cNvPr id="8" name="Descripcion 2"/>
+          <p:cNvSpPr txBox="1"/>
+          <p:nvPr/>
+        </p:nvSpPr>
+        <p:spPr>
+          <a:xfrm>
+            <a:off x="3154680" y="1929384"/>
+            <a:ext cx="4754880" cy="475488"/>
+          </a:xfrm>
+          <a:prstGeom prst="rect">
+            <a:avLst/>
+          </a:prstGeom>
+          <a:noFill/>
+          <a:ln/>
+        </p:spPr>
+        <p:txBody>
+          <a:bodyPr wrap="square" lIns="0" tIns="0" rIns="0" bIns="0" rtlCol="0" anchor="ctr"/>
+          <a:lstStyle/>
+          <a:p>
+            <a:pPr indent="0" marL="0">
+              <a:buNone/>
+            </a:pPr>
+            <a:r>
+              <a:rPr lang="en-US" sz="1300" dirty="0">
+                <a:solidFill>
+                  <a:srgbClr val="CBD5E1"/>
+                </a:solidFill>
+              </a:rPr>
+              <a:t>Dibujo con relieve de la serpiente y los objetos.</a:t>
+            </a:r>
+            <a:endParaRPr lang="en-US" sz="1300" dirty="0"/>
+          </a:p>
+        </p:txBody>
+      </p:sp>
+      <p:sp>
+        <p:nvSpPr>
+          <p:cNvPr id="9" name="Fila 3"/>
+          <p:cNvSpPr/>
+          <p:nvPr/>
+        </p:nvSpPr>
+        <p:spPr>
+          <a:xfrm>
+            <a:off x="1097280" y="2532888"/>
+            <a:ext cx="6949440" cy="475488"/>
+          </a:xfrm>
+          <a:prstGeom prst="roundRect">
+            <a:avLst>
+              <a:gd name="adj" fmla="val 15385"/>
+            </a:avLst>
+          </a:prstGeom>
+          <a:solidFill>
+            <a:schemeClr val="accent6"/>
+          </a:solidFill>
+          <a:ln/>
+        </p:spPr>
+      </p:sp>
+      <p:sp>
+        <p:nvSpPr>
+          <p:cNvPr id="10" name="Archivo 3"/>
+          <p:cNvSpPr txBox="1"/>
+          <p:nvPr/>
+        </p:nvSpPr>
+        <p:spPr>
+          <a:xfrm>
+            <a:off x="1371600" y="2532888"/>
+            <a:ext cx="1737360" cy="475488"/>
+          </a:xfrm>
+          <a:prstGeom prst="rect">
+            <a:avLst/>
+          </a:prstGeom>
+          <a:noFill/>
+          <a:ln/>
+        </p:spPr>
+        <p:txBody>
+          <a:bodyPr wrap="square" lIns="0" tIns="0" rIns="0" bIns="0" rtlCol="0" anchor="ctr"/>
+          <a:lstStyle/>
+          <a:p>
+            <a:pPr indent="0" marL="0">
+              <a:buNone/>
+            </a:pPr>
+            <a:r>
+              <a:rPr lang="en-US" sz="1400" dirty="0">
+                <a:solidFill>
+                  <a:srgbClr val="86EFAC"/>
+                </a:solidFill>
+                <a:latin typeface="Consolas" pitchFamily="34" charset="0"/>
+                <a:ea typeface="Consolas" pitchFamily="34" charset="-122"/>
+                <a:cs typeface="Consolas" pitchFamily="34" charset="-120"/>
+              </a:rPr>
+              <a:t>SCENARIOS</a:t>
+            </a:r>
+            <a:endParaRPr lang="en-US" sz="1400" dirty="0"/>
+          </a:p>
+        </p:txBody>
+      </p:sp>
+      <p:sp>
+        <p:nvSpPr>
+          <p:cNvPr id="11" name="Descripcion 3"/>
+          <p:cNvSpPr txBox="1"/>
+          <p:nvPr/>
+        </p:nvSpPr>
+        <p:spPr>
+          <a:xfrm>
+            <a:off x="3154680" y="2532888"/>
+            <a:ext cx="4754880" cy="475488"/>
+          </a:xfrm>
+          <a:prstGeom prst="rect">
+            <a:avLst/>
+          </a:prstGeom>
+          <a:noFill/>
+          <a:ln/>
+        </p:spPr>
+        <p:txBody>
+          <a:bodyPr wrap="square" lIns="0" tIns="0" rIns="0" bIns="0" rtlCol="0" anchor="ctr"/>
+          <a:lstStyle/>
+          <a:p>
+            <a:pPr indent="0" marL="0">
+              <a:buNone/>
+            </a:pPr>
+            <a:r>
+              <a:rPr lang="en-US" sz="1300" dirty="0">
+                <a:solidFill>
+                  <a:srgbClr val="CBD5E1"/>
+                </a:solidFill>
+              </a:rPr>
+              <a:t>Los cinco escenarios y sus partículas de ambiente.</a:t>
+            </a:r>
+            <a:endParaRPr lang="en-US" sz="1300" dirty="0"/>
+          </a:p>
+        </p:txBody>
+      </p:sp>
+      <p:sp>
+        <p:nvSpPr>
+          <p:cNvPr id="12" name="Fila 4"/>
+          <p:cNvSpPr/>
+          <p:nvPr/>
+        </p:nvSpPr>
+        <p:spPr>
+          <a:xfrm>
+            <a:off x="1097280" y="3136392"/>
+            <a:ext cx="6949440" cy="475488"/>
+          </a:xfrm>
+          <a:prstGeom prst="roundRect">
+            <a:avLst>
+              <a:gd name="adj" fmla="val 15385"/>
+            </a:avLst>
+          </a:prstGeom>
+          <a:solidFill>
+            <a:schemeClr val="accent6"/>
+          </a:solidFill>
+          <a:ln/>
+        </p:spPr>
+      </p:sp>
+      <p:sp>
+        <p:nvSpPr>
+          <p:cNvPr id="13" name="Archivo 4"/>
+          <p:cNvSpPr txBox="1"/>
+          <p:nvPr/>
+        </p:nvSpPr>
+        <p:spPr>
+          <a:xfrm>
+            <a:off x="1371600" y="3136392"/>
+            <a:ext cx="1737360" cy="475488"/>
+          </a:xfrm>
+          <a:prstGeom prst="rect">
+            <a:avLst/>
+          </a:prstGeom>
+          <a:noFill/>
+          <a:ln/>
+        </p:spPr>
+        <p:txBody>
+          <a:bodyPr wrap="square" lIns="0" tIns="0" rIns="0" bIns="0" rtlCol="0" anchor="ctr"/>
+          <a:lstStyle/>
+          <a:p>
+            <a:pPr indent="0" marL="0">
+              <a:buNone/>
+            </a:pPr>
+            <a:r>
+              <a:rPr lang="en-US" sz="1400" dirty="0">
+                <a:solidFill>
+                  <a:srgbClr val="86EFAC"/>
+                </a:solidFill>
+                <a:latin typeface="Consolas" pitchFamily="34" charset="0"/>
+                <a:ea typeface="Consolas" pitchFamily="34" charset="-122"/>
+                <a:cs typeface="Consolas" pitchFamily="34" charset="-120"/>
+              </a:rPr>
+              <a:t>MenuScene</a:t>
+            </a:r>
+            <a:endParaRPr lang="en-US" sz="1400" dirty="0"/>
+          </a:p>
+        </p:txBody>
+      </p:sp>
+      <p:sp>
+        <p:nvSpPr>
+          <p:cNvPr id="14" name="Descripcion 4"/>
+          <p:cNvSpPr txBox="1"/>
+          <p:nvPr/>
+        </p:nvSpPr>
+        <p:spPr>
+          <a:xfrm>
+            <a:off x="3154680" y="3136392"/>
+            <a:ext cx="4754880" cy="475488"/>
+          </a:xfrm>
+          <a:prstGeom prst="rect">
+            <a:avLst/>
+          </a:prstGeom>
+          <a:noFill/>
+          <a:ln/>
+        </p:spPr>
+        <p:txBody>
+          <a:bodyPr wrap="square" lIns="0" tIns="0" rIns="0" bIns="0" rtlCol="0" anchor="ctr"/>
+          <a:lstStyle/>
+          <a:p>
+            <a:pPr indent="0" marL="0">
+              <a:buNone/>
+            </a:pPr>
+            <a:r>
+              <a:rPr lang="en-US" sz="1300" dirty="0">
+                <a:solidFill>
+                  <a:srgbClr val="CBD5E1"/>
+                </a:solidFill>
+              </a:rPr>
+              <a:t>Pantalla de título con instrucciones y récord.</a:t>
+            </a:r>
+            <a:endParaRPr lang="en-US" sz="1300" dirty="0"/>
+          </a:p>
+        </p:txBody>
+      </p:sp>
+      <p:sp>
+        <p:nvSpPr>
+          <p:cNvPr id="15" name="Fila 5"/>
+          <p:cNvSpPr/>
+          <p:nvPr/>
+        </p:nvSpPr>
+        <p:spPr>
+          <a:xfrm>
+            <a:off x="1097280" y="3739896"/>
+            <a:ext cx="6949440" cy="475488"/>
+          </a:xfrm>
+          <a:prstGeom prst="roundRect">
+            <a:avLst>
+              <a:gd name="adj" fmla="val 15385"/>
+            </a:avLst>
+          </a:prstGeom>
+          <a:solidFill>
+            <a:schemeClr val="accent6"/>
+          </a:solidFill>
+          <a:ln/>
+        </p:spPr>
+      </p:sp>
+      <p:sp>
+        <p:nvSpPr>
+          <p:cNvPr id="16" name="Archivo 5"/>
+          <p:cNvSpPr txBox="1"/>
+          <p:nvPr/>
+        </p:nvSpPr>
+        <p:spPr>
+          <a:xfrm>
+            <a:off x="1371600" y="3739896"/>
+            <a:ext cx="1737360" cy="475488"/>
+          </a:xfrm>
+          <a:prstGeom prst="rect">
+            <a:avLst/>
+          </a:prstGeom>
+          <a:noFill/>
+          <a:ln/>
+        </p:spPr>
+        <p:txBody>
+          <a:bodyPr wrap="square" lIns="0" tIns="0" rIns="0" bIns="0" rtlCol="0" anchor="ctr"/>
+          <a:lstStyle/>
+          <a:p>
+            <a:pPr indent="0" marL="0">
+              <a:buNone/>
+            </a:pPr>
+            <a:r>
+              <a:rPr lang="en-US" sz="1400" dirty="0">
+                <a:solidFill>
+                  <a:srgbClr val="86EFAC"/>
+                </a:solidFill>
+                <a:latin typeface="Consolas" pitchFamily="34" charset="0"/>
+                <a:ea typeface="Consolas" pitchFamily="34" charset="-122"/>
+                <a:cs typeface="Consolas" pitchFamily="34" charset="-120"/>
+              </a:rPr>
+              <a:t>SnakeScene</a:t>
+            </a:r>
+            <a:endParaRPr lang="en-US" sz="1400" dirty="0"/>
+          </a:p>
+        </p:txBody>
+      </p:sp>
+      <p:sp>
+        <p:nvSpPr>
+          <p:cNvPr id="17" name="Descripcion 5"/>
+          <p:cNvSpPr txBox="1"/>
+          <p:nvPr/>
+        </p:nvSpPr>
+        <p:spPr>
+          <a:xfrm>
+            <a:off x="3154680" y="3739896"/>
+            <a:ext cx="4754880" cy="475488"/>
+          </a:xfrm>
+          <a:prstGeom prst="rect">
+            <a:avLst/>
+          </a:prstGeom>
+          <a:noFill/>
+          <a:ln/>
+        </p:spPr>
+        <p:txBody>
+          <a:bodyPr wrap="square" lIns="0" tIns="0" rIns="0" bIns="0" rtlCol="0" anchor="ctr"/>
+          <a:lstStyle/>
+          <a:p>
+            <a:pPr indent="0" marL="0">
+              <a:buNone/>
+            </a:pPr>
+            <a:r>
+              <a:rPr lang="en-US" sz="1300" dirty="0">
+                <a:solidFill>
+                  <a:srgbClr val="CBD5E1"/>
+                </a:solidFill>
+              </a:rPr>
+              <a:t>Bucle, comida, poderes, niveles, pausa y Game Over.</a:t>
+            </a:r>
+            <a:endParaRPr lang="en-US" sz="1300" dirty="0"/>
+          </a:p>
+        </p:txBody>
+      </p:sp>
+      <p:sp>
+        <p:nvSpPr>
+          <p:cNvPr id="25" name="Slide Number Placeholder 0"/>
+          <p:cNvSpPr>
+            <a:spLocks noGrp="1"/>
+          </p:cNvSpPr>
+          <p:nvPr>
+            <p:ph type="sldNum" sz="quarter" idx="4294967295"/>
+          </p:nvPr>
+        </p:nvSpPr>
+        <p:spPr>
+          <a:xfrm>
+            <a:off x="8321040" y="4754880"/>
+            <a:ext cx="457200" cy="228600"/>
+          </a:xfrm>
+          <a:prstGeom prst="rect">
+            <a:avLst/>
+          </a:prstGeom>
+          <a:extLst>
+            <a:ext uri="{C572A759-6A51-4108-AA02-DFA0A04FC94B}">
+              <ma14:wrappingTextBoxFlag xmlns:ma14="http://schemas.microsoft.com/office/mac/drawingml/2011/main" val="0"/>
+            </a:ext>
+          </a:extLst>
+        </p:spPr>
+        <p:txBody>
+          <a:bodyPr/>
+          <a:lstStyle>
+            <a:lvl1pPr>
+              <a:defRPr sz="900">
+                <a:solidFill>
+                  <a:schemeClr val="accent3"/>
+                </a:solidFill>
+              </a:defRPr>
+            </a:lvl1pPr>
+          </a:lstStyle>
+          <a:p>
+            <a:pPr algn="r"/>
+            <a:fld id="{F7021451-1387-4CA6-816F-3879F97B5CBC}" type="slidenum">
+              <a:rPr b="0" lang="en-US"/>
+              <a:t>13</a:t>
+            </a:fld>
+            <a:endParaRPr lang="en-US"/>
           </a:p>
         </p:txBody>
       </p:sp>
@@ -2472,7 +5140,7 @@
         <p:spPr>
           <a:xfrm>
             <a:off x="822960" y="2971800"/>
-            <a:ext cx="2103120" cy="731520"/>
+            <a:ext cx="2103120" cy="777240"/>
           </a:xfrm>
           <a:prstGeom prst="rect">
             <a:avLst/>
@@ -2493,7 +5161,7 @@
                   <a:schemeClr val="accent4"/>
                 </a:solidFill>
               </a:rPr>
-              <a:t>Cada manzana suma 10 puntos y alarga la serpiente un segmento.</a:t>
+              <a:t>Cada manzana suma 10 puntos, alarga la serpiente y la acelera.</a:t>
             </a:r>
             <a:endParaRPr lang="en-US" sz="1300" dirty="0"/>
           </a:p>
@@ -2578,7 +5246,7 @@
                 <a:ea typeface="Segoe UI Semibold" pitchFamily="34" charset="-122"/>
                 <a:cs typeface="Segoe UI Semibold" pitchFamily="34" charset="-120"/>
               </a:rPr>
-              <a:t>Cuadrícula</a:t>
+              <a:t>Poderes</a:t>
             </a:r>
             <a:endParaRPr lang="en-US" sz="1700" dirty="0"/>
           </a:p>
@@ -2593,7 +5261,7 @@
         <p:spPr>
           <a:xfrm>
             <a:off x="3566160" y="2971800"/>
-            <a:ext cx="2103120" cy="731520"/>
+            <a:ext cx="2103120" cy="777240"/>
           </a:xfrm>
           <a:prstGeom prst="rect">
             <a:avLst/>
@@ -2614,7 +5282,7 @@
                   <a:schemeClr val="accent4"/>
                 </a:solidFill>
               </a:rPr>
-              <a:t>Movimiento por celdas de 20 px en un tablero de 40 × 30.</a:t>
+              <a:t>Objetos que ralentizan, duplican puntos, protegen o cortan la cola.</a:t>
             </a:r>
             <a:endParaRPr lang="en-US" sz="1300" dirty="0"/>
           </a:p>
@@ -2699,7 +5367,7 @@
                 <a:ea typeface="Segoe UI Semibold" pitchFamily="34" charset="-122"/>
                 <a:cs typeface="Segoe UI Semibold" pitchFamily="34" charset="-120"/>
               </a:rPr>
-              <a:t>Dificultad Creciente</a:t>
+              <a:t>Escenarios</a:t>
             </a:r>
             <a:endParaRPr lang="en-US" sz="1700" dirty="0"/>
           </a:p>
@@ -2714,7 +5382,7 @@
         <p:spPr>
           <a:xfrm>
             <a:off x="6309360" y="2971800"/>
-            <a:ext cx="2103120" cy="731520"/>
+            <a:ext cx="2103120" cy="777240"/>
           </a:xfrm>
           <a:prstGeom prst="rect">
             <a:avLst/>
@@ -2735,7 +5403,7 @@
                   <a:schemeClr val="accent4"/>
                 </a:solidFill>
               </a:rPr>
-              <a:t>La serpiente acelera con cada manzana que come.</a:t>
+              <a:t>Cada 100 puntos el mundo cambia: bosque, desierto, nieve, volcán y noche.</a:t>
             </a:r>
             <a:endParaRPr lang="en-US" sz="1300" dirty="0"/>
           </a:p>
@@ -2967,7 +5635,7 @@
                   <a:schemeClr val="accent4"/>
                 </a:solidFill>
               </a:rPr>
-              <a:t>Motor de juego: escenas, gráficos, teclado y cámara.</a:t>
+              <a:t>Motor cargado desde CDN: escenas, gráficos, partículas y tweens.</a:t>
             </a:r>
             <a:endParaRPr lang="en-US" sz="1300" dirty="0"/>
           </a:p>
@@ -3088,7 +5756,7 @@
                   <a:schemeClr val="accent4"/>
                 </a:solidFill>
               </a:rPr>
-              <a:t>Lógica del juego escrita con clases ES6, sin frameworks.</a:t>
+              <a:t>Todo el juego en clases ES6, sin imágenes ni frameworks.</a:t>
             </a:r>
             <a:endParaRPr lang="en-US" sz="1300" dirty="0"/>
           </a:p>
@@ -3173,7 +5841,7 @@
                 <a:ea typeface="Segoe UI Semibold" pitchFamily="34" charset="-122"/>
                 <a:cs typeface="Segoe UI Semibold" pitchFamily="34" charset="-120"/>
               </a:rPr>
-              <a:t>HTML5 + CDN</a:t>
+              <a:t>WebAudio</a:t>
             </a:r>
             <a:endParaRPr lang="en-US" sz="1800" dirty="0"/>
           </a:p>
@@ -3209,7 +5877,7 @@
                   <a:schemeClr val="accent4"/>
                 </a:solidFill>
               </a:rPr>
-              <a:t>index.html carga Phaser desde jsDelivr y aloja el lienzo.</a:t>
+              <a:t>Sonidos generados con osciladores, sin archivos de audio.</a:t>
             </a:r>
             <a:endParaRPr lang="en-US" sz="1300" dirty="0"/>
           </a:p>
@@ -3441,7 +6109,7 @@
                 <a:ea typeface="Segoe UI Semibold" pitchFamily="34" charset="-122"/>
                 <a:cs typeface="Segoe UI Semibold" pitchFamily="34" charset="-120"/>
               </a:rPr>
-              <a:t>Ciclo de una Partida</a:t>
+              <a:t>Flujo del Juego</a:t>
             </a:r>
             <a:endParaRPr lang="en-US" sz="3200" dirty="0"/>
           </a:p>
@@ -3547,7 +6215,7 @@
                 <a:ea typeface="Consolas" pitchFamily="34" charset="-122"/>
                 <a:cs typeface="Consolas" pitchFamily="34" charset="-120"/>
               </a:rPr>
-              <a:t>create()</a:t>
+              <a:t>MenuScene</a:t>
             </a:r>
             <a:endParaRPr lang="en-US" sz="1500" dirty="0"/>
           </a:p>
@@ -3583,7 +6251,7 @@
                   <a:schemeClr val="accent3"/>
                 </a:solidFill>
               </a:rPr>
-              <a:t>Prepara serpiente, tablero y comida.</a:t>
+              <a:t>Título e instrucciones.</a:t>
             </a:r>
             <a:endParaRPr lang="en-US" sz="1200" dirty="0"/>
           </a:p>
@@ -3662,11 +6330,11 @@
                 <a:solidFill>
                   <a:schemeClr val="tx2"/>
                 </a:solidFill>
-                <a:latin typeface="Segoe UI Semibold" pitchFamily="34" charset="0"/>
-                <a:ea typeface="Segoe UI Semibold" pitchFamily="34" charset="-122"/>
-                <a:cs typeface="Segoe UI Semibold" pitchFamily="34" charset="-120"/>
-              </a:rPr>
-              <a:t>Entrada</a:t>
+                <a:latin typeface="Consolas" pitchFamily="34" charset="0"/>
+                <a:ea typeface="Consolas" pitchFamily="34" charset="-122"/>
+                <a:cs typeface="Consolas" pitchFamily="34" charset="-120"/>
+              </a:rPr>
+              <a:t>create()</a:t>
             </a:r>
             <a:endParaRPr lang="en-US" sz="1500" dirty="0"/>
           </a:p>
@@ -3702,7 +6370,7 @@
                   <a:schemeClr val="accent3"/>
                 </a:solidFill>
               </a:rPr>
-              <a:t>Lee flechas o WASD.</a:t>
+              <a:t>Prepara la partida.</a:t>
             </a:r>
             <a:endParaRPr lang="en-US" sz="1200" dirty="0"/>
           </a:p>
@@ -3904,7 +6572,7 @@
                 <a:ea typeface="Segoe UI Semibold" pitchFamily="34" charset="-122"/>
                 <a:cs typeface="Segoe UI Semibold" pitchFamily="34" charset="-120"/>
               </a:rPr>
-              <a:t>Comer</a:t>
+              <a:t>Nivel</a:t>
             </a:r>
             <a:endParaRPr lang="en-US" sz="1500" dirty="0"/>
           </a:p>
@@ -3940,7 +6608,7 @@
                   <a:schemeClr val="accent3"/>
                 </a:solidFill>
               </a:rPr>
-              <a:t>Crece y acelera.</a:t>
+              <a:t>Cambia el escenario.</a:t>
             </a:r>
             <a:endParaRPr lang="en-US" sz="1200" dirty="0"/>
           </a:p>
@@ -4059,7 +6727,7 @@
                   <a:schemeClr val="accent3"/>
                 </a:solidFill>
               </a:rPr>
-              <a:t>Choque y récord.</a:t>
+              <a:t>Reintentar o menú.</a:t>
             </a:r>
             <a:endParaRPr lang="en-US" sz="1200" dirty="0"/>
           </a:p>
@@ -4143,8 +6811,8 @@
         </p:nvSpPr>
         <p:spPr>
           <a:xfrm>
-            <a:off x="548640" y="1143000"/>
-            <a:ext cx="5486400" cy="685800"/>
+            <a:off x="548640" y="914400"/>
+            <a:ext cx="4206240" cy="685800"/>
           </a:xfrm>
           <a:prstGeom prst="rect">
             <a:avLst/>
@@ -4160,7 +6828,7 @@
               <a:buNone/>
             </a:pPr>
             <a:r>
-              <a:rPr lang="en-US" sz="3200" b="1" dirty="0">
+              <a:rPr lang="en-US" sz="3000" b="1" dirty="0">
                 <a:solidFill>
                   <a:schemeClr val="tx1"/>
                 </a:solidFill>
@@ -4170,7 +6838,7 @@
               </a:rPr>
               <a:t>Estructura del Tablero</a:t>
             </a:r>
-            <a:endParaRPr lang="en-US" sz="3200" dirty="0"/>
+            <a:endParaRPr lang="en-US" sz="3000" dirty="0"/>
           </a:p>
         </p:txBody>
       </p:sp>
@@ -4190,7 +6858,7 @@
         </p:blipFill>
         <p:spPr>
           <a:xfrm>
-            <a:off x="548640" y="2139696"/>
+            <a:off x="548640" y="1920240"/>
             <a:ext cx="237744" cy="237744"/>
           </a:xfrm>
           <a:prstGeom prst="rect">
@@ -4206,8 +6874,8 @@
         </p:nvSpPr>
         <p:spPr>
           <a:xfrm>
-            <a:off x="960120" y="2103120"/>
-            <a:ext cx="4754880" cy="310896"/>
+            <a:off x="960120" y="1874520"/>
+            <a:ext cx="3840480" cy="329184"/>
           </a:xfrm>
           <a:prstGeom prst="rect">
             <a:avLst/>
@@ -4272,7 +6940,7 @@
         </p:blipFill>
         <p:spPr>
           <a:xfrm>
-            <a:off x="548640" y="2615184"/>
+            <a:off x="548640" y="2468880"/>
             <a:ext cx="237744" cy="237744"/>
           </a:xfrm>
           <a:prstGeom prst="rect">
@@ -4288,8 +6956,8 @@
         </p:nvSpPr>
         <p:spPr>
           <a:xfrm>
-            <a:off x="960120" y="2578608"/>
-            <a:ext cx="4754880" cy="310896"/>
+            <a:off x="960120" y="2423160"/>
+            <a:ext cx="3840480" cy="329184"/>
           </a:xfrm>
           <a:prstGeom prst="rect">
             <a:avLst/>
@@ -4321,7 +6989,7 @@
                   <a:schemeClr val="tx2"/>
                 </a:solidFill>
               </a:rPr>
-              <a:t>40 columnas × 30 filas</a:t>
+              <a:t>40 × 30</a:t>
             </a:r>
             <a:pPr indent="0" marL="0">
               <a:buNone/>
@@ -4354,7 +7022,7 @@
         </p:blipFill>
         <p:spPr>
           <a:xfrm>
-            <a:off x="548640" y="3090672"/>
+            <a:off x="548640" y="3017520"/>
             <a:ext cx="237744" cy="237744"/>
           </a:xfrm>
           <a:prstGeom prst="rect">
@@ -4370,8 +7038,8 @@
         </p:nvSpPr>
         <p:spPr>
           <a:xfrm>
-            <a:off x="960120" y="3054096"/>
-            <a:ext cx="4754880" cy="310896"/>
+            <a:off x="960120" y="2971800"/>
+            <a:ext cx="3840480" cy="329184"/>
           </a:xfrm>
           <a:prstGeom prst="rect">
             <a:avLst/>
@@ -4452,8 +7120,8 @@
         </p:nvSpPr>
         <p:spPr>
           <a:xfrm>
-            <a:off x="960120" y="3529584"/>
-            <a:ext cx="4754880" cy="310896"/>
+            <a:off x="960120" y="3520440"/>
+            <a:ext cx="3840480" cy="329184"/>
           </a:xfrm>
           <a:prstGeom prst="rect">
             <a:avLst/>
@@ -4474,7 +7142,7 @@
                   <a:schemeClr val="tx2"/>
                 </a:solidFill>
               </a:rPr>
-              <a:t>Dibujo con </a:t>
+              <a:t>Fondo dibujado </a:t>
             </a:r>
             <a:pPr indent="0" marL="0">
               <a:buNone/>
@@ -4485,7 +7153,7 @@
                   <a:schemeClr val="tx2"/>
                 </a:solidFill>
               </a:rPr>
-              <a:t>add.grid() y Graphics</a:t>
+              <a:t>una sola vez</a:t>
             </a:r>
             <a:pPr indent="0" marL="0">
               <a:buNone/>
@@ -4496,738 +7164,46 @@
                   <a:schemeClr val="tx2"/>
                 </a:solidFill>
               </a:rPr>
-              <a:t>.</a:t>
+              <a:t> con generateTexture().</a:t>
             </a:r>
             <a:endParaRPr lang="en-US" sz="1500" dirty="0"/>
           </a:p>
         </p:txBody>
       </p:sp>
-      <p:sp>
-        <p:nvSpPr>
-          <p:cNvPr id="11" name="Tablero"/>
-          <p:cNvSpPr/>
-          <p:nvPr/>
-        </p:nvSpPr>
-        <p:spPr>
-          <a:xfrm>
-            <a:off x="5879592" y="941832"/>
-            <a:ext cx="2779776" cy="2231136"/>
-          </a:xfrm>
-          <a:prstGeom prst="roundRect">
-            <a:avLst>
-              <a:gd name="adj" fmla="val 3279"/>
-            </a:avLst>
-          </a:prstGeom>
-          <a:solidFill>
-            <a:srgbClr val="1B1B1B"/>
-          </a:solidFill>
-          <a:ln w="25400">
-            <a:solidFill>
-              <a:srgbClr val="CBD5E1"/>
-            </a:solidFill>
-            <a:prstDash val="solid"/>
-          </a:ln>
-        </p:spPr>
-      </p:sp>
-      <p:sp>
-        <p:nvSpPr>
-          <p:cNvPr id="12" name="Grid v1"/>
-          <p:cNvSpPr/>
-          <p:nvPr/>
-        </p:nvSpPr>
-        <p:spPr>
-          <a:xfrm>
-            <a:off x="6172200" y="1051560"/>
-            <a:ext cx="0" cy="2011680"/>
-          </a:xfrm>
-          <a:prstGeom prst="line">
-            <a:avLst/>
-          </a:prstGeom>
-          <a:noFill/>
-          <a:ln w="6350">
-            <a:solidFill>
-              <a:srgbClr val="333333"/>
-            </a:solidFill>
-            <a:prstDash val="solid"/>
-          </a:ln>
-        </p:spPr>
-      </p:sp>
-      <p:sp>
-        <p:nvSpPr>
-          <p:cNvPr id="13" name="Grid v2"/>
-          <p:cNvSpPr/>
-          <p:nvPr/>
-        </p:nvSpPr>
-        <p:spPr>
-          <a:xfrm>
-            <a:off x="6355080" y="1051560"/>
-            <a:ext cx="0" cy="2011680"/>
-          </a:xfrm>
-          <a:prstGeom prst="line">
-            <a:avLst/>
-          </a:prstGeom>
-          <a:noFill/>
-          <a:ln w="6350">
-            <a:solidFill>
-              <a:srgbClr val="333333"/>
-            </a:solidFill>
-            <a:prstDash val="solid"/>
-          </a:ln>
-        </p:spPr>
-      </p:sp>
-      <p:sp>
-        <p:nvSpPr>
-          <p:cNvPr id="14" name="Grid v3"/>
-          <p:cNvSpPr/>
-          <p:nvPr/>
-        </p:nvSpPr>
-        <p:spPr>
-          <a:xfrm>
-            <a:off x="6537960" y="1051560"/>
-            <a:ext cx="0" cy="2011680"/>
-          </a:xfrm>
-          <a:prstGeom prst="line">
-            <a:avLst/>
-          </a:prstGeom>
-          <a:noFill/>
-          <a:ln w="6350">
-            <a:solidFill>
-              <a:srgbClr val="333333"/>
-            </a:solidFill>
-            <a:prstDash val="solid"/>
-          </a:ln>
-        </p:spPr>
-      </p:sp>
-      <p:sp>
-        <p:nvSpPr>
-          <p:cNvPr id="15" name="Grid v4"/>
-          <p:cNvSpPr/>
-          <p:nvPr/>
-        </p:nvSpPr>
-        <p:spPr>
-          <a:xfrm>
-            <a:off x="6720840" y="1051560"/>
-            <a:ext cx="0" cy="2011680"/>
-          </a:xfrm>
-          <a:prstGeom prst="line">
-            <a:avLst/>
-          </a:prstGeom>
-          <a:noFill/>
-          <a:ln w="6350">
-            <a:solidFill>
-              <a:srgbClr val="333333"/>
-            </a:solidFill>
-            <a:prstDash val="solid"/>
-          </a:ln>
-        </p:spPr>
-      </p:sp>
-      <p:sp>
-        <p:nvSpPr>
-          <p:cNvPr id="16" name="Grid v5"/>
-          <p:cNvSpPr/>
-          <p:nvPr/>
-        </p:nvSpPr>
-        <p:spPr>
-          <a:xfrm>
-            <a:off x="6903720" y="1051560"/>
-            <a:ext cx="0" cy="2011680"/>
-          </a:xfrm>
-          <a:prstGeom prst="line">
-            <a:avLst/>
-          </a:prstGeom>
-          <a:noFill/>
-          <a:ln w="6350">
-            <a:solidFill>
-              <a:srgbClr val="333333"/>
-            </a:solidFill>
-            <a:prstDash val="solid"/>
-          </a:ln>
-        </p:spPr>
-      </p:sp>
-      <p:sp>
-        <p:nvSpPr>
-          <p:cNvPr id="17" name="Grid v6"/>
-          <p:cNvSpPr/>
-          <p:nvPr/>
-        </p:nvSpPr>
-        <p:spPr>
-          <a:xfrm>
-            <a:off x="7086600" y="1051560"/>
-            <a:ext cx="0" cy="2011680"/>
-          </a:xfrm>
-          <a:prstGeom prst="line">
-            <a:avLst/>
-          </a:prstGeom>
-          <a:noFill/>
-          <a:ln w="6350">
-            <a:solidFill>
-              <a:srgbClr val="333333"/>
-            </a:solidFill>
-            <a:prstDash val="solid"/>
-          </a:ln>
-        </p:spPr>
-      </p:sp>
-      <p:sp>
-        <p:nvSpPr>
-          <p:cNvPr id="18" name="Grid v7"/>
-          <p:cNvSpPr/>
-          <p:nvPr/>
-        </p:nvSpPr>
-        <p:spPr>
-          <a:xfrm>
-            <a:off x="7269480" y="1051560"/>
-            <a:ext cx="0" cy="2011680"/>
-          </a:xfrm>
-          <a:prstGeom prst="line">
-            <a:avLst/>
-          </a:prstGeom>
-          <a:noFill/>
-          <a:ln w="6350">
-            <a:solidFill>
-              <a:srgbClr val="333333"/>
-            </a:solidFill>
-            <a:prstDash val="solid"/>
-          </a:ln>
-        </p:spPr>
-      </p:sp>
-      <p:sp>
-        <p:nvSpPr>
-          <p:cNvPr id="19" name="Grid v8"/>
-          <p:cNvSpPr/>
-          <p:nvPr/>
-        </p:nvSpPr>
-        <p:spPr>
-          <a:xfrm>
-            <a:off x="7452360" y="1051560"/>
-            <a:ext cx="0" cy="2011680"/>
-          </a:xfrm>
-          <a:prstGeom prst="line">
-            <a:avLst/>
-          </a:prstGeom>
-          <a:noFill/>
-          <a:ln w="6350">
-            <a:solidFill>
-              <a:srgbClr val="333333"/>
-            </a:solidFill>
-            <a:prstDash val="solid"/>
-          </a:ln>
-        </p:spPr>
-      </p:sp>
-      <p:sp>
-        <p:nvSpPr>
-          <p:cNvPr id="20" name="Grid v9"/>
-          <p:cNvSpPr/>
-          <p:nvPr/>
-        </p:nvSpPr>
-        <p:spPr>
-          <a:xfrm>
-            <a:off x="7635240" y="1051560"/>
-            <a:ext cx="0" cy="2011680"/>
-          </a:xfrm>
-          <a:prstGeom prst="line">
-            <a:avLst/>
-          </a:prstGeom>
-          <a:noFill/>
-          <a:ln w="6350">
-            <a:solidFill>
-              <a:srgbClr val="333333"/>
-            </a:solidFill>
-            <a:prstDash val="solid"/>
-          </a:ln>
-        </p:spPr>
-      </p:sp>
-      <p:sp>
-        <p:nvSpPr>
-          <p:cNvPr id="21" name="Grid v10"/>
-          <p:cNvSpPr/>
-          <p:nvPr/>
-        </p:nvSpPr>
-        <p:spPr>
-          <a:xfrm>
-            <a:off x="7818120" y="1051560"/>
-            <a:ext cx="0" cy="2011680"/>
-          </a:xfrm>
-          <a:prstGeom prst="line">
-            <a:avLst/>
-          </a:prstGeom>
-          <a:noFill/>
-          <a:ln w="6350">
-            <a:solidFill>
-              <a:srgbClr val="333333"/>
-            </a:solidFill>
-            <a:prstDash val="solid"/>
-          </a:ln>
-        </p:spPr>
-      </p:sp>
-      <p:sp>
-        <p:nvSpPr>
-          <p:cNvPr id="22" name="Grid v11"/>
-          <p:cNvSpPr/>
-          <p:nvPr/>
-        </p:nvSpPr>
-        <p:spPr>
-          <a:xfrm>
-            <a:off x="8001000" y="1051560"/>
-            <a:ext cx="0" cy="2011680"/>
-          </a:xfrm>
-          <a:prstGeom prst="line">
-            <a:avLst/>
-          </a:prstGeom>
-          <a:noFill/>
-          <a:ln w="6350">
-            <a:solidFill>
-              <a:srgbClr val="333333"/>
-            </a:solidFill>
-            <a:prstDash val="solid"/>
-          </a:ln>
-        </p:spPr>
-      </p:sp>
-      <p:sp>
-        <p:nvSpPr>
-          <p:cNvPr id="23" name="Grid v12"/>
-          <p:cNvSpPr/>
-          <p:nvPr/>
-        </p:nvSpPr>
-        <p:spPr>
-          <a:xfrm>
-            <a:off x="8183880" y="1051560"/>
-            <a:ext cx="0" cy="2011680"/>
-          </a:xfrm>
-          <a:prstGeom prst="line">
-            <a:avLst/>
-          </a:prstGeom>
-          <a:noFill/>
-          <a:ln w="6350">
-            <a:solidFill>
-              <a:srgbClr val="333333"/>
-            </a:solidFill>
-            <a:prstDash val="solid"/>
-          </a:ln>
-        </p:spPr>
-      </p:sp>
-      <p:sp>
-        <p:nvSpPr>
-          <p:cNvPr id="24" name="Grid v13"/>
-          <p:cNvSpPr/>
-          <p:nvPr/>
-        </p:nvSpPr>
-        <p:spPr>
-          <a:xfrm>
-            <a:off x="8366760" y="1051560"/>
-            <a:ext cx="0" cy="2011680"/>
-          </a:xfrm>
-          <a:prstGeom prst="line">
-            <a:avLst/>
-          </a:prstGeom>
-          <a:noFill/>
-          <a:ln w="6350">
-            <a:solidFill>
-              <a:srgbClr val="333333"/>
-            </a:solidFill>
-            <a:prstDash val="solid"/>
-          </a:ln>
-        </p:spPr>
-      </p:sp>
-      <p:sp>
-        <p:nvSpPr>
-          <p:cNvPr id="25" name="Grid h1"/>
-          <p:cNvSpPr/>
-          <p:nvPr/>
-        </p:nvSpPr>
-        <p:spPr>
-          <a:xfrm>
-            <a:off x="5989320" y="1234440"/>
-            <a:ext cx="2560320" cy="0"/>
-          </a:xfrm>
-          <a:prstGeom prst="line">
-            <a:avLst/>
-          </a:prstGeom>
-          <a:noFill/>
-          <a:ln w="6350">
-            <a:solidFill>
-              <a:srgbClr val="333333"/>
-            </a:solidFill>
-            <a:prstDash val="solid"/>
-          </a:ln>
-        </p:spPr>
-      </p:sp>
-      <p:sp>
-        <p:nvSpPr>
-          <p:cNvPr id="26" name="Grid h2"/>
-          <p:cNvSpPr/>
-          <p:nvPr/>
-        </p:nvSpPr>
-        <p:spPr>
-          <a:xfrm>
-            <a:off x="5989320" y="1417320"/>
-            <a:ext cx="2560320" cy="0"/>
-          </a:xfrm>
-          <a:prstGeom prst="line">
-            <a:avLst/>
-          </a:prstGeom>
-          <a:noFill/>
-          <a:ln w="6350">
-            <a:solidFill>
-              <a:srgbClr val="333333"/>
-            </a:solidFill>
-            <a:prstDash val="solid"/>
-          </a:ln>
-        </p:spPr>
-      </p:sp>
-      <p:sp>
-        <p:nvSpPr>
-          <p:cNvPr id="27" name="Grid h3"/>
-          <p:cNvSpPr/>
-          <p:nvPr/>
-        </p:nvSpPr>
-        <p:spPr>
-          <a:xfrm>
-            <a:off x="5989320" y="1600200"/>
-            <a:ext cx="2560320" cy="0"/>
-          </a:xfrm>
-          <a:prstGeom prst="line">
-            <a:avLst/>
-          </a:prstGeom>
-          <a:noFill/>
-          <a:ln w="6350">
-            <a:solidFill>
-              <a:srgbClr val="333333"/>
-            </a:solidFill>
-            <a:prstDash val="solid"/>
-          </a:ln>
-        </p:spPr>
-      </p:sp>
-      <p:sp>
-        <p:nvSpPr>
-          <p:cNvPr id="28" name="Grid h4"/>
-          <p:cNvSpPr/>
-          <p:nvPr/>
-        </p:nvSpPr>
-        <p:spPr>
-          <a:xfrm>
-            <a:off x="5989320" y="1783080"/>
-            <a:ext cx="2560320" cy="0"/>
-          </a:xfrm>
-          <a:prstGeom prst="line">
-            <a:avLst/>
-          </a:prstGeom>
-          <a:noFill/>
-          <a:ln w="6350">
-            <a:solidFill>
-              <a:srgbClr val="333333"/>
-            </a:solidFill>
-            <a:prstDash val="solid"/>
-          </a:ln>
-        </p:spPr>
-      </p:sp>
-      <p:sp>
-        <p:nvSpPr>
-          <p:cNvPr id="29" name="Grid h5"/>
-          <p:cNvSpPr/>
-          <p:nvPr/>
-        </p:nvSpPr>
-        <p:spPr>
-          <a:xfrm>
-            <a:off x="5989320" y="1965960"/>
-            <a:ext cx="2560320" cy="0"/>
-          </a:xfrm>
-          <a:prstGeom prst="line">
-            <a:avLst/>
-          </a:prstGeom>
-          <a:noFill/>
-          <a:ln w="6350">
-            <a:solidFill>
-              <a:srgbClr val="333333"/>
-            </a:solidFill>
-            <a:prstDash val="solid"/>
-          </a:ln>
-        </p:spPr>
-      </p:sp>
-      <p:sp>
-        <p:nvSpPr>
-          <p:cNvPr id="30" name="Grid h6"/>
-          <p:cNvSpPr/>
-          <p:nvPr/>
-        </p:nvSpPr>
-        <p:spPr>
-          <a:xfrm>
-            <a:off x="5989320" y="2148840"/>
-            <a:ext cx="2560320" cy="0"/>
-          </a:xfrm>
-          <a:prstGeom prst="line">
-            <a:avLst/>
-          </a:prstGeom>
-          <a:noFill/>
-          <a:ln w="6350">
-            <a:solidFill>
-              <a:srgbClr val="333333"/>
-            </a:solidFill>
-            <a:prstDash val="solid"/>
-          </a:ln>
-        </p:spPr>
-      </p:sp>
-      <p:sp>
-        <p:nvSpPr>
-          <p:cNvPr id="31" name="Grid h7"/>
-          <p:cNvSpPr/>
-          <p:nvPr/>
-        </p:nvSpPr>
-        <p:spPr>
-          <a:xfrm>
-            <a:off x="5989320" y="2331720"/>
-            <a:ext cx="2560320" cy="0"/>
-          </a:xfrm>
-          <a:prstGeom prst="line">
-            <a:avLst/>
-          </a:prstGeom>
-          <a:noFill/>
-          <a:ln w="6350">
-            <a:solidFill>
-              <a:srgbClr val="333333"/>
-            </a:solidFill>
-            <a:prstDash val="solid"/>
-          </a:ln>
-        </p:spPr>
-      </p:sp>
-      <p:sp>
-        <p:nvSpPr>
-          <p:cNvPr id="32" name="Grid h8"/>
-          <p:cNvSpPr/>
-          <p:nvPr/>
-        </p:nvSpPr>
-        <p:spPr>
-          <a:xfrm>
-            <a:off x="5989320" y="2514600"/>
-            <a:ext cx="2560320" cy="0"/>
-          </a:xfrm>
-          <a:prstGeom prst="line">
-            <a:avLst/>
-          </a:prstGeom>
-          <a:noFill/>
-          <a:ln w="6350">
-            <a:solidFill>
-              <a:srgbClr val="333333"/>
-            </a:solidFill>
-            <a:prstDash val="solid"/>
-          </a:ln>
-        </p:spPr>
-      </p:sp>
-      <p:sp>
-        <p:nvSpPr>
-          <p:cNvPr id="33" name="Grid h9"/>
-          <p:cNvSpPr/>
-          <p:nvPr/>
-        </p:nvSpPr>
-        <p:spPr>
-          <a:xfrm>
-            <a:off x="5989320" y="2697480"/>
-            <a:ext cx="2560320" cy="0"/>
-          </a:xfrm>
-          <a:prstGeom prst="line">
-            <a:avLst/>
-          </a:prstGeom>
-          <a:noFill/>
-          <a:ln w="6350">
-            <a:solidFill>
-              <a:srgbClr val="333333"/>
-            </a:solidFill>
-            <a:prstDash val="solid"/>
-          </a:ln>
-        </p:spPr>
-      </p:sp>
-      <p:sp>
-        <p:nvSpPr>
-          <p:cNvPr id="34" name="Grid h10"/>
-          <p:cNvSpPr/>
-          <p:nvPr/>
-        </p:nvSpPr>
-        <p:spPr>
-          <a:xfrm>
-            <a:off x="5989320" y="2880360"/>
-            <a:ext cx="2560320" cy="0"/>
-          </a:xfrm>
-          <a:prstGeom prst="line">
-            <a:avLst/>
-          </a:prstGeom>
-          <a:noFill/>
-          <a:ln w="6350">
-            <a:solidFill>
-              <a:srgbClr val="333333"/>
-            </a:solidFill>
-            <a:prstDash val="solid"/>
-          </a:ln>
-        </p:spPr>
-      </p:sp>
-      <p:sp>
-        <p:nvSpPr>
-          <p:cNvPr id="35" name="Segmento 1"/>
-          <p:cNvSpPr/>
-          <p:nvPr/>
-        </p:nvSpPr>
-        <p:spPr>
-          <a:xfrm>
-            <a:off x="7466076" y="1979676"/>
-            <a:ext cx="155448" cy="155448"/>
-          </a:xfrm>
-          <a:prstGeom prst="rect">
-            <a:avLst/>
-          </a:prstGeom>
-          <a:solidFill>
-            <a:srgbClr val="7BED9F"/>
-          </a:solidFill>
-          <a:ln/>
-        </p:spPr>
-      </p:sp>
-      <p:sp>
-        <p:nvSpPr>
-          <p:cNvPr id="36" name="Segmento 2"/>
-          <p:cNvSpPr/>
-          <p:nvPr/>
-        </p:nvSpPr>
-        <p:spPr>
-          <a:xfrm>
-            <a:off x="7283196" y="1979676"/>
-            <a:ext cx="155448" cy="155448"/>
-          </a:xfrm>
-          <a:prstGeom prst="rect">
-            <a:avLst/>
-          </a:prstGeom>
-          <a:solidFill>
-            <a:srgbClr val="2ECC71"/>
-          </a:solidFill>
-          <a:ln/>
-        </p:spPr>
-      </p:sp>
-      <p:sp>
-        <p:nvSpPr>
-          <p:cNvPr id="37" name="Segmento 3"/>
-          <p:cNvSpPr/>
-          <p:nvPr/>
-        </p:nvSpPr>
-        <p:spPr>
-          <a:xfrm>
-            <a:off x="7100316" y="1979676"/>
-            <a:ext cx="155448" cy="155448"/>
-          </a:xfrm>
-          <a:prstGeom prst="rect">
-            <a:avLst/>
-          </a:prstGeom>
-          <a:solidFill>
-            <a:srgbClr val="2ECC71"/>
-          </a:solidFill>
-          <a:ln/>
-        </p:spPr>
-      </p:sp>
-      <p:sp>
-        <p:nvSpPr>
-          <p:cNvPr id="38" name="Segmento 4"/>
-          <p:cNvSpPr/>
-          <p:nvPr/>
-        </p:nvSpPr>
-        <p:spPr>
-          <a:xfrm>
-            <a:off x="6917436" y="1979676"/>
-            <a:ext cx="155448" cy="155448"/>
-          </a:xfrm>
-          <a:prstGeom prst="rect">
-            <a:avLst/>
-          </a:prstGeom>
-          <a:solidFill>
-            <a:srgbClr val="2ECC71"/>
-          </a:solidFill>
-          <a:ln/>
-        </p:spPr>
-      </p:sp>
-      <p:sp>
-        <p:nvSpPr>
-          <p:cNvPr id="39" name="Segmento 5"/>
-          <p:cNvSpPr/>
-          <p:nvPr/>
-        </p:nvSpPr>
-        <p:spPr>
-          <a:xfrm>
-            <a:off x="6917436" y="2162556"/>
-            <a:ext cx="155448" cy="155448"/>
-          </a:xfrm>
-          <a:prstGeom prst="rect">
-            <a:avLst/>
-          </a:prstGeom>
-          <a:solidFill>
-            <a:srgbClr val="2ECC71"/>
-          </a:solidFill>
-          <a:ln/>
-        </p:spPr>
-      </p:sp>
-      <p:sp>
-        <p:nvSpPr>
-          <p:cNvPr id="40" name="Segmento 6"/>
-          <p:cNvSpPr/>
-          <p:nvPr/>
-        </p:nvSpPr>
-        <p:spPr>
-          <a:xfrm>
-            <a:off x="6917436" y="2345436"/>
-            <a:ext cx="155448" cy="155448"/>
-          </a:xfrm>
-          <a:prstGeom prst="rect">
-            <a:avLst/>
-          </a:prstGeom>
-          <a:solidFill>
-            <a:srgbClr val="2ECC71"/>
-          </a:solidFill>
-          <a:ln/>
-        </p:spPr>
-      </p:sp>
-      <p:sp>
-        <p:nvSpPr>
-          <p:cNvPr id="41" name="Segmento 7"/>
-          <p:cNvSpPr/>
-          <p:nvPr/>
-        </p:nvSpPr>
-        <p:spPr>
-          <a:xfrm>
-            <a:off x="6734556" y="2345436"/>
-            <a:ext cx="155448" cy="155448"/>
-          </a:xfrm>
-          <a:prstGeom prst="rect">
-            <a:avLst/>
-          </a:prstGeom>
-          <a:solidFill>
-            <a:srgbClr val="2ECC71"/>
-          </a:solidFill>
-          <a:ln/>
-        </p:spPr>
-      </p:sp>
-      <p:sp>
-        <p:nvSpPr>
-          <p:cNvPr id="42" name="Comida"/>
-          <p:cNvSpPr/>
-          <p:nvPr/>
-        </p:nvSpPr>
-        <p:spPr>
-          <a:xfrm>
-            <a:off x="8028432" y="1627632"/>
-            <a:ext cx="128016" cy="128016"/>
-          </a:xfrm>
-          <a:prstGeom prst="rect">
-            <a:avLst/>
-          </a:prstGeom>
-          <a:solidFill>
-            <a:srgbClr val="E74C3C"/>
-          </a:solidFill>
-          <a:ln/>
-        </p:spPr>
-      </p:sp>
-      <p:sp>
-        <p:nvSpPr>
-          <p:cNvPr id="43" name="Marcador"/>
-          <p:cNvSpPr txBox="1"/>
-          <p:nvPr/>
-        </p:nvSpPr>
-        <p:spPr>
-          <a:xfrm>
-            <a:off x="6035040" y="1069848"/>
-            <a:ext cx="1280160" cy="182880"/>
+      <p:pic>
+        <p:nvPicPr>
+          <p:cNvPr id="11" name="Captura bosque" descr="Captura del juego en el escenario Bosque">    </p:cNvPr>
+          <p:cNvPicPr>
+            <a:picLocks noChangeAspect="1"/>
+          </p:cNvPicPr>
+          <p:nvPr/>
+        </p:nvPicPr>
+        <p:blipFill>
+          <a:blip r:embed="rId5"/>
+          <a:stretch>
+            <a:fillRect/>
+          </a:stretch>
+        </p:blipFill>
+        <p:spPr>
+          <a:xfrm>
+            <a:off x="5029200" y="1051560"/>
+            <a:ext cx="3566160" cy="2674620"/>
+          </a:xfrm>
+          <a:prstGeom prst="rect">
+            <a:avLst/>
+          </a:prstGeom>
+        </p:spPr>
+      </p:pic>
+      <p:sp>
+        <p:nvSpPr>
+          <p:cNvPr id="12" name="Pie captura"/>
+          <p:cNvSpPr txBox="1"/>
+          <p:nvPr/>
+        </p:nvSpPr>
+        <p:spPr>
+          <a:xfrm>
+            <a:off x="5029200" y="3840480"/>
+            <a:ext cx="3566160" cy="274320"/>
           </a:xfrm>
           <a:prstGeom prst="rect">
             <a:avLst/>
@@ -5239,45 +7215,6 @@
           <a:bodyPr wrap="square" lIns="0" tIns="0" rIns="0" bIns="0" rtlCol="0" anchor="ctr"/>
           <a:lstStyle/>
           <a:p>
-            <a:pPr indent="0" marL="0">
-              <a:buNone/>
-            </a:pPr>
-            <a:r>
-              <a:rPr lang="en-US" sz="800" dirty="0">
-                <a:solidFill>
-                  <a:srgbClr val="FFFFFF"/>
-                </a:solidFill>
-                <a:latin typeface="Consolas" pitchFamily="34" charset="0"/>
-                <a:ea typeface="Consolas" pitchFamily="34" charset="-122"/>
-                <a:cs typeface="Consolas" pitchFamily="34" charset="-120"/>
-              </a:rPr>
-              <a:t>Puntos: 70</a:t>
-            </a:r>
-            <a:endParaRPr lang="en-US" sz="800" dirty="0"/>
-          </a:p>
-        </p:txBody>
-      </p:sp>
-      <p:sp>
-        <p:nvSpPr>
-          <p:cNvPr id="44" name="Pie tablero"/>
-          <p:cNvSpPr txBox="1"/>
-          <p:nvPr/>
-        </p:nvSpPr>
-        <p:spPr>
-          <a:xfrm>
-            <a:off x="5879592" y="3264408"/>
-            <a:ext cx="2779776" cy="274320"/>
-          </a:xfrm>
-          <a:prstGeom prst="rect">
-            <a:avLst/>
-          </a:prstGeom>
-          <a:noFill/>
-          <a:ln/>
-        </p:spPr>
-        <p:txBody>
-          <a:bodyPr wrap="square" lIns="0" tIns="0" rIns="0" bIns="0" rtlCol="0" anchor="ctr"/>
-          <a:lstStyle/>
-          <a:p>
             <a:pPr algn="ctr" indent="0" marL="0">
               <a:buNone/>
             </a:pPr>
@@ -5287,7 +7224,7 @@
                   <a:schemeClr val="accent3"/>
                 </a:solidFill>
               </a:rPr>
-              <a:t>Vista simplificada del tablero</a:t>
+              <a:t>Captura real del juego (escenario Bosque)</a:t>
             </a:r>
             <a:endParaRPr lang="en-US" sz="1100" dirty="0"/>
           </a:p>
@@ -5386,7 +7323,7 @@
           <a:bodyPr wrap="square" lIns="0" tIns="0" rIns="0" bIns="0" rtlCol="0" anchor="ctr"/>
           <a:lstStyle/>
           <a:p>
-            <a:pPr algn="ctr" indent="0" marL="0">
+            <a:pPr algn="l" indent="0" marL="0">
               <a:buNone/>
             </a:pPr>
             <a:r>
@@ -5398,7 +7335,7 @@
                 <a:ea typeface="Segoe UI Semibold" pitchFamily="34" charset="-122"/>
                 <a:cs typeface="Segoe UI Semibold" pitchFamily="34" charset="-120"/>
               </a:rPr>
-              <a:t>Bucle de Tiempo Fijo</a:t>
+              <a:t>Efecto de Relieve 3D</a:t>
             </a:r>
             <a:endParaRPr lang="en-US" sz="3200" dirty="0"/>
           </a:p>
@@ -5406,60 +7343,124 @@
       </p:sp>
       <p:sp>
         <p:nvSpPr>
-          <p:cNvPr id="3" name="Tarjeta 1"/>
+          <p:cNvPr id="3" name="Capa sombra"/>
           <p:cNvSpPr/>
           <p:nvPr/>
         </p:nvSpPr>
         <p:spPr>
           <a:xfrm>
-            <a:off x="914400" y="1691640"/>
-            <a:ext cx="2286000" cy="2240280"/>
+            <a:off x="1325880" y="2011680"/>
+            <a:ext cx="1828800" cy="1691640"/>
           </a:xfrm>
           <a:prstGeom prst="roundRect">
             <a:avLst>
-              <a:gd name="adj" fmla="val 4898"/>
+              <a:gd name="adj" fmla="val 16216"/>
             </a:avLst>
           </a:prstGeom>
           <a:solidFill>
-            <a:schemeClr val="bg2"/>
+            <a:srgbClr val="000000">
+              <a:alpha val="30000"/>
+            </a:srgbClr>
           </a:solidFill>
           <a:ln/>
         </p:spPr>
       </p:sp>
-      <p:pic>
-        <p:nvPicPr>
-          <p:cNvPr id="4" name="Icono 1" descr="preencoded.png">    </p:cNvPr>
-          <p:cNvPicPr>
-            <a:picLocks noChangeAspect="1"/>
-          </p:cNvPicPr>
-          <p:nvPr/>
-        </p:nvPicPr>
-        <p:blipFill>
-          <a:blip r:embed="rId1"/>
-          <a:stretch>
-            <a:fillRect/>
-          </a:stretch>
-        </p:blipFill>
-        <p:spPr>
-          <a:xfrm>
-            <a:off x="1856232" y="1965960"/>
-            <a:ext cx="402336" cy="402336"/>
-          </a:xfrm>
-          <a:prstGeom prst="rect">
-            <a:avLst/>
-          </a:prstGeom>
-        </p:spPr>
-      </p:pic>
-      <p:sp>
-        <p:nvSpPr>
-          <p:cNvPr id="5" name="Titulo tarjeta 1"/>
-          <p:cNvSpPr txBox="1"/>
-          <p:nvPr/>
-        </p:nvSpPr>
-        <p:spPr>
-          <a:xfrm>
-            <a:off x="1051560" y="2560320"/>
-            <a:ext cx="2011680" cy="365760"/>
+      <p:sp>
+        <p:nvSpPr>
+          <p:cNvPr id="4" name="Capa lado oscuro"/>
+          <p:cNvSpPr/>
+          <p:nvPr/>
+        </p:nvSpPr>
+        <p:spPr>
+          <a:xfrm>
+            <a:off x="1097280" y="1691640"/>
+            <a:ext cx="1828800" cy="1828800"/>
+          </a:xfrm>
+          <a:prstGeom prst="roundRect">
+            <a:avLst>
+              <a:gd name="adj" fmla="val 15000"/>
+            </a:avLst>
+          </a:prstGeom>
+          <a:solidFill>
+            <a:srgbClr val="1E8449"/>
+          </a:solidFill>
+          <a:ln/>
+        </p:spPr>
+      </p:sp>
+      <p:sp>
+        <p:nvSpPr>
+          <p:cNvPr id="5" name="Capa cara superior"/>
+          <p:cNvSpPr/>
+          <p:nvPr/>
+        </p:nvSpPr>
+        <p:spPr>
+          <a:xfrm>
+            <a:off x="1097280" y="1691640"/>
+            <a:ext cx="1828800" cy="1463040"/>
+          </a:xfrm>
+          <a:prstGeom prst="roundRect">
+            <a:avLst>
+              <a:gd name="adj" fmla="val 18750"/>
+            </a:avLst>
+          </a:prstGeom>
+          <a:solidFill>
+            <a:srgbClr val="2ECC71"/>
+          </a:solidFill>
+          <a:ln/>
+        </p:spPr>
+      </p:sp>
+      <p:sp>
+        <p:nvSpPr>
+          <p:cNvPr id="6" name="Capa brillo"/>
+          <p:cNvSpPr/>
+          <p:nvPr/>
+        </p:nvSpPr>
+        <p:spPr>
+          <a:xfrm>
+            <a:off x="1371600" y="1874520"/>
+            <a:ext cx="1097280" cy="365760"/>
+          </a:xfrm>
+          <a:prstGeom prst="roundRect">
+            <a:avLst>
+              <a:gd name="adj" fmla="val 37500"/>
+            </a:avLst>
+          </a:prstGeom>
+          <a:solidFill>
+            <a:srgbClr val="A9F0C3"/>
+          </a:solidFill>
+          <a:ln/>
+        </p:spPr>
+      </p:sp>
+      <p:sp>
+        <p:nvSpPr>
+          <p:cNvPr id="7" name="Num 1"/>
+          <p:cNvSpPr/>
+          <p:nvPr/>
+        </p:nvSpPr>
+        <p:spPr>
+          <a:xfrm>
+            <a:off x="4206240" y="1417320"/>
+            <a:ext cx="384048" cy="384048"/>
+          </a:xfrm>
+          <a:prstGeom prst="ellipse">
+            <a:avLst/>
+          </a:prstGeom>
+          <a:solidFill>
+            <a:schemeClr val="accent1"/>
+          </a:solidFill>
+          <a:ln/>
+        </p:spPr>
+      </p:sp>
+      <p:sp>
+        <p:nvSpPr>
+          <p:cNvPr id="8" name="Num texto 1"/>
+          <p:cNvSpPr txBox="1"/>
+          <p:nvPr/>
+        </p:nvSpPr>
+        <p:spPr>
+          <a:xfrm>
+            <a:off x="4206240" y="1417320"/>
+            <a:ext cx="384048" cy="384048"/>
           </a:xfrm>
           <a:prstGeom prst="rect">
             <a:avLst/>
@@ -5475,295 +7476,521 @@
               <a:buNone/>
             </a:pPr>
             <a:r>
-              <a:rPr lang="en-US" sz="1600" b="1" dirty="0">
+              <a:rPr lang="en-US" sz="1400" b="1" dirty="0">
+                <a:solidFill>
+                  <a:schemeClr val="bg1"/>
+                </a:solidFill>
+              </a:rPr>
+              <a:t>1</a:t>
+            </a:r>
+            <a:endParaRPr lang="en-US" sz="1400" dirty="0"/>
+          </a:p>
+        </p:txBody>
+      </p:sp>
+      <p:sp>
+        <p:nvSpPr>
+          <p:cNvPr id="9" name="Capa titulo 1"/>
+          <p:cNvSpPr txBox="1"/>
+          <p:nvPr/>
+        </p:nvSpPr>
+        <p:spPr>
+          <a:xfrm>
+            <a:off x="4754880" y="1371600"/>
+            <a:ext cx="3840480" cy="274320"/>
+          </a:xfrm>
+          <a:prstGeom prst="rect">
+            <a:avLst/>
+          </a:prstGeom>
+          <a:noFill/>
+          <a:ln/>
+        </p:spPr>
+        <p:txBody>
+          <a:bodyPr wrap="square" lIns="0" tIns="0" rIns="0" bIns="0" rtlCol="0" anchor="ctr"/>
+          <a:lstStyle/>
+          <a:p>
+            <a:pPr indent="0" marL="0">
+              <a:buNone/>
+            </a:pPr>
+            <a:r>
+              <a:rPr lang="en-US" sz="1500" b="1" dirty="0">
                 <a:solidFill>
                   <a:schemeClr val="tx2"/>
+                </a:solidFill>
+                <a:latin typeface="Segoe UI Semibold" pitchFamily="34" charset="0"/>
+                <a:ea typeface="Segoe UI Semibold" pitchFamily="34" charset="-122"/>
+                <a:cs typeface="Segoe UI Semibold" pitchFamily="34" charset="-120"/>
+              </a:rPr>
+              <a:t>Sombra</a:t>
+            </a:r>
+            <a:endParaRPr lang="en-US" sz="1500" dirty="0"/>
+          </a:p>
+        </p:txBody>
+      </p:sp>
+      <p:sp>
+        <p:nvSpPr>
+          <p:cNvPr id="10" name="Capa texto 1"/>
+          <p:cNvSpPr txBox="1"/>
+          <p:nvPr/>
+        </p:nvSpPr>
+        <p:spPr>
+          <a:xfrm>
+            <a:off x="4754880" y="1645920"/>
+            <a:ext cx="3840480" cy="365760"/>
+          </a:xfrm>
+          <a:prstGeom prst="rect">
+            <a:avLst/>
+          </a:prstGeom>
+          <a:noFill/>
+          <a:ln/>
+        </p:spPr>
+        <p:txBody>
+          <a:bodyPr wrap="square" lIns="0" tIns="0" rIns="0" bIns="0" rtlCol="0" anchor="t"/>
+          <a:lstStyle/>
+          <a:p>
+            <a:pPr indent="0" marL="0">
+              <a:buNone/>
+            </a:pPr>
+            <a:r>
+              <a:rPr lang="en-US" sz="1200" dirty="0">
+                <a:solidFill>
+                  <a:schemeClr val="accent4"/>
+                </a:solidFill>
+              </a:rPr>
+              <a:t>Negro semitransparente, desplazado abajo a la derecha.</a:t>
+            </a:r>
+            <a:endParaRPr lang="en-US" sz="1200" dirty="0"/>
+          </a:p>
+        </p:txBody>
+      </p:sp>
+      <p:sp>
+        <p:nvSpPr>
+          <p:cNvPr id="11" name="Num 2"/>
+          <p:cNvSpPr/>
+          <p:nvPr/>
+        </p:nvSpPr>
+        <p:spPr>
+          <a:xfrm>
+            <a:off x="4206240" y="2103120"/>
+            <a:ext cx="384048" cy="384048"/>
+          </a:xfrm>
+          <a:prstGeom prst="ellipse">
+            <a:avLst/>
+          </a:prstGeom>
+          <a:solidFill>
+            <a:schemeClr val="accent1"/>
+          </a:solidFill>
+          <a:ln/>
+        </p:spPr>
+      </p:sp>
+      <p:sp>
+        <p:nvSpPr>
+          <p:cNvPr id="12" name="Num texto 2"/>
+          <p:cNvSpPr txBox="1"/>
+          <p:nvPr/>
+        </p:nvSpPr>
+        <p:spPr>
+          <a:xfrm>
+            <a:off x="4206240" y="2103120"/>
+            <a:ext cx="384048" cy="384048"/>
+          </a:xfrm>
+          <a:prstGeom prst="rect">
+            <a:avLst/>
+          </a:prstGeom>
+          <a:noFill/>
+          <a:ln/>
+        </p:spPr>
+        <p:txBody>
+          <a:bodyPr wrap="square" lIns="0" tIns="0" rIns="0" bIns="0" rtlCol="0" anchor="ctr"/>
+          <a:lstStyle/>
+          <a:p>
+            <a:pPr algn="ctr" indent="0" marL="0">
+              <a:buNone/>
+            </a:pPr>
+            <a:r>
+              <a:rPr lang="en-US" sz="1400" b="1" dirty="0">
+                <a:solidFill>
+                  <a:schemeClr val="bg1"/>
+                </a:solidFill>
+              </a:rPr>
+              <a:t>2</a:t>
+            </a:r>
+            <a:endParaRPr lang="en-US" sz="1400" dirty="0"/>
+          </a:p>
+        </p:txBody>
+      </p:sp>
+      <p:sp>
+        <p:nvSpPr>
+          <p:cNvPr id="13" name="Capa titulo 2"/>
+          <p:cNvSpPr txBox="1"/>
+          <p:nvPr/>
+        </p:nvSpPr>
+        <p:spPr>
+          <a:xfrm>
+            <a:off x="4754880" y="2057400"/>
+            <a:ext cx="3840480" cy="274320"/>
+          </a:xfrm>
+          <a:prstGeom prst="rect">
+            <a:avLst/>
+          </a:prstGeom>
+          <a:noFill/>
+          <a:ln/>
+        </p:spPr>
+        <p:txBody>
+          <a:bodyPr wrap="square" lIns="0" tIns="0" rIns="0" bIns="0" rtlCol="0" anchor="ctr"/>
+          <a:lstStyle/>
+          <a:p>
+            <a:pPr indent="0" marL="0">
+              <a:buNone/>
+            </a:pPr>
+            <a:r>
+              <a:rPr lang="en-US" sz="1500" b="1" dirty="0">
+                <a:solidFill>
+                  <a:schemeClr val="tx2"/>
+                </a:solidFill>
+                <a:latin typeface="Segoe UI Semibold" pitchFamily="34" charset="0"/>
+                <a:ea typeface="Segoe UI Semibold" pitchFamily="34" charset="-122"/>
+                <a:cs typeface="Segoe UI Semibold" pitchFamily="34" charset="-120"/>
+              </a:rPr>
+              <a:t>Lado oscuro</a:t>
+            </a:r>
+            <a:endParaRPr lang="en-US" sz="1500" dirty="0"/>
+          </a:p>
+        </p:txBody>
+      </p:sp>
+      <p:sp>
+        <p:nvSpPr>
+          <p:cNvPr id="14" name="Capa texto 2"/>
+          <p:cNvSpPr txBox="1"/>
+          <p:nvPr/>
+        </p:nvSpPr>
+        <p:spPr>
+          <a:xfrm>
+            <a:off x="4754880" y="2331720"/>
+            <a:ext cx="3840480" cy="365760"/>
+          </a:xfrm>
+          <a:prstGeom prst="rect">
+            <a:avLst/>
+          </a:prstGeom>
+          <a:noFill/>
+          <a:ln/>
+        </p:spPr>
+        <p:txBody>
+          <a:bodyPr wrap="square" lIns="0" tIns="0" rIns="0" bIns="0" rtlCol="0" anchor="t"/>
+          <a:lstStyle/>
+          <a:p>
+            <a:pPr indent="0" marL="0">
+              <a:buNone/>
+            </a:pPr>
+            <a:r>
+              <a:rPr lang="en-US" sz="1200" dirty="0">
+                <a:solidFill>
+                  <a:schemeClr val="accent4"/>
+                </a:solidFill>
+              </a:rPr>
+              <a:t>El color base oscurecido un 40 % da el grosor del bloque.</a:t>
+            </a:r>
+            <a:endParaRPr lang="en-US" sz="1200" dirty="0"/>
+          </a:p>
+        </p:txBody>
+      </p:sp>
+      <p:sp>
+        <p:nvSpPr>
+          <p:cNvPr id="15" name="Num 3"/>
+          <p:cNvSpPr/>
+          <p:nvPr/>
+        </p:nvSpPr>
+        <p:spPr>
+          <a:xfrm>
+            <a:off x="4206240" y="2788920"/>
+            <a:ext cx="384048" cy="384048"/>
+          </a:xfrm>
+          <a:prstGeom prst="ellipse">
+            <a:avLst/>
+          </a:prstGeom>
+          <a:solidFill>
+            <a:schemeClr val="accent1"/>
+          </a:solidFill>
+          <a:ln/>
+        </p:spPr>
+      </p:sp>
+      <p:sp>
+        <p:nvSpPr>
+          <p:cNvPr id="16" name="Num texto 3"/>
+          <p:cNvSpPr txBox="1"/>
+          <p:nvPr/>
+        </p:nvSpPr>
+        <p:spPr>
+          <a:xfrm>
+            <a:off x="4206240" y="2788920"/>
+            <a:ext cx="384048" cy="384048"/>
+          </a:xfrm>
+          <a:prstGeom prst="rect">
+            <a:avLst/>
+          </a:prstGeom>
+          <a:noFill/>
+          <a:ln/>
+        </p:spPr>
+        <p:txBody>
+          <a:bodyPr wrap="square" lIns="0" tIns="0" rIns="0" bIns="0" rtlCol="0" anchor="ctr"/>
+          <a:lstStyle/>
+          <a:p>
+            <a:pPr algn="ctr" indent="0" marL="0">
+              <a:buNone/>
+            </a:pPr>
+            <a:r>
+              <a:rPr lang="en-US" sz="1400" b="1" dirty="0">
+                <a:solidFill>
+                  <a:schemeClr val="bg1"/>
+                </a:solidFill>
+              </a:rPr>
+              <a:t>3</a:t>
+            </a:r>
+            <a:endParaRPr lang="en-US" sz="1400" dirty="0"/>
+          </a:p>
+        </p:txBody>
+      </p:sp>
+      <p:sp>
+        <p:nvSpPr>
+          <p:cNvPr id="17" name="Capa titulo 3"/>
+          <p:cNvSpPr txBox="1"/>
+          <p:nvPr/>
+        </p:nvSpPr>
+        <p:spPr>
+          <a:xfrm>
+            <a:off x="4754880" y="2743200"/>
+            <a:ext cx="3840480" cy="274320"/>
+          </a:xfrm>
+          <a:prstGeom prst="rect">
+            <a:avLst/>
+          </a:prstGeom>
+          <a:noFill/>
+          <a:ln/>
+        </p:spPr>
+        <p:txBody>
+          <a:bodyPr wrap="square" lIns="0" tIns="0" rIns="0" bIns="0" rtlCol="0" anchor="ctr"/>
+          <a:lstStyle/>
+          <a:p>
+            <a:pPr indent="0" marL="0">
+              <a:buNone/>
+            </a:pPr>
+            <a:r>
+              <a:rPr lang="en-US" sz="1500" b="1" dirty="0">
+                <a:solidFill>
+                  <a:schemeClr val="tx2"/>
+                </a:solidFill>
+                <a:latin typeface="Segoe UI Semibold" pitchFamily="34" charset="0"/>
+                <a:ea typeface="Segoe UI Semibold" pitchFamily="34" charset="-122"/>
+                <a:cs typeface="Segoe UI Semibold" pitchFamily="34" charset="-120"/>
+              </a:rPr>
+              <a:t>Cara superior</a:t>
+            </a:r>
+            <a:endParaRPr lang="en-US" sz="1500" dirty="0"/>
+          </a:p>
+        </p:txBody>
+      </p:sp>
+      <p:sp>
+        <p:nvSpPr>
+          <p:cNvPr id="18" name="Capa texto 3"/>
+          <p:cNvSpPr txBox="1"/>
+          <p:nvPr/>
+        </p:nvSpPr>
+        <p:spPr>
+          <a:xfrm>
+            <a:off x="4754880" y="3017520"/>
+            <a:ext cx="3840480" cy="365760"/>
+          </a:xfrm>
+          <a:prstGeom prst="rect">
+            <a:avLst/>
+          </a:prstGeom>
+          <a:noFill/>
+          <a:ln/>
+        </p:spPr>
+        <p:txBody>
+          <a:bodyPr wrap="square" lIns="0" tIns="0" rIns="0" bIns="0" rtlCol="0" anchor="t"/>
+          <a:lstStyle/>
+          <a:p>
+            <a:pPr indent="0" marL="0">
+              <a:buNone/>
+            </a:pPr>
+            <a:r>
+              <a:rPr lang="en-US" sz="1200" dirty="0">
+                <a:solidFill>
+                  <a:schemeClr val="accent4"/>
+                </a:solidFill>
+              </a:rPr>
+              <a:t>El color normal, encima del lado oscuro.</a:t>
+            </a:r>
+            <a:endParaRPr lang="en-US" sz="1200" dirty="0"/>
+          </a:p>
+        </p:txBody>
+      </p:sp>
+      <p:sp>
+        <p:nvSpPr>
+          <p:cNvPr id="19" name="Num 4"/>
+          <p:cNvSpPr/>
+          <p:nvPr/>
+        </p:nvSpPr>
+        <p:spPr>
+          <a:xfrm>
+            <a:off x="4206240" y="3474720"/>
+            <a:ext cx="384048" cy="384048"/>
+          </a:xfrm>
+          <a:prstGeom prst="ellipse">
+            <a:avLst/>
+          </a:prstGeom>
+          <a:solidFill>
+            <a:schemeClr val="accent1"/>
+          </a:solidFill>
+          <a:ln/>
+        </p:spPr>
+      </p:sp>
+      <p:sp>
+        <p:nvSpPr>
+          <p:cNvPr id="20" name="Num texto 4"/>
+          <p:cNvSpPr txBox="1"/>
+          <p:nvPr/>
+        </p:nvSpPr>
+        <p:spPr>
+          <a:xfrm>
+            <a:off x="4206240" y="3474720"/>
+            <a:ext cx="384048" cy="384048"/>
+          </a:xfrm>
+          <a:prstGeom prst="rect">
+            <a:avLst/>
+          </a:prstGeom>
+          <a:noFill/>
+          <a:ln/>
+        </p:spPr>
+        <p:txBody>
+          <a:bodyPr wrap="square" lIns="0" tIns="0" rIns="0" bIns="0" rtlCol="0" anchor="ctr"/>
+          <a:lstStyle/>
+          <a:p>
+            <a:pPr algn="ctr" indent="0" marL="0">
+              <a:buNone/>
+            </a:pPr>
+            <a:r>
+              <a:rPr lang="en-US" sz="1400" b="1" dirty="0">
+                <a:solidFill>
+                  <a:schemeClr val="bg1"/>
+                </a:solidFill>
+              </a:rPr>
+              <a:t>4</a:t>
+            </a:r>
+            <a:endParaRPr lang="en-US" sz="1400" dirty="0"/>
+          </a:p>
+        </p:txBody>
+      </p:sp>
+      <p:sp>
+        <p:nvSpPr>
+          <p:cNvPr id="21" name="Capa titulo 4"/>
+          <p:cNvSpPr txBox="1"/>
+          <p:nvPr/>
+        </p:nvSpPr>
+        <p:spPr>
+          <a:xfrm>
+            <a:off x="4754880" y="3429000"/>
+            <a:ext cx="3840480" cy="274320"/>
+          </a:xfrm>
+          <a:prstGeom prst="rect">
+            <a:avLst/>
+          </a:prstGeom>
+          <a:noFill/>
+          <a:ln/>
+        </p:spPr>
+        <p:txBody>
+          <a:bodyPr wrap="square" lIns="0" tIns="0" rIns="0" bIns="0" rtlCol="0" anchor="ctr"/>
+          <a:lstStyle/>
+          <a:p>
+            <a:pPr indent="0" marL="0">
+              <a:buNone/>
+            </a:pPr>
+            <a:r>
+              <a:rPr lang="en-US" sz="1500" b="1" dirty="0">
+                <a:solidFill>
+                  <a:schemeClr val="tx2"/>
+                </a:solidFill>
+                <a:latin typeface="Segoe UI Semibold" pitchFamily="34" charset="0"/>
+                <a:ea typeface="Segoe UI Semibold" pitchFamily="34" charset="-122"/>
+                <a:cs typeface="Segoe UI Semibold" pitchFamily="34" charset="-120"/>
+              </a:rPr>
+              <a:t>Brillo</a:t>
+            </a:r>
+            <a:endParaRPr lang="en-US" sz="1500" dirty="0"/>
+          </a:p>
+        </p:txBody>
+      </p:sp>
+      <p:sp>
+        <p:nvSpPr>
+          <p:cNvPr id="22" name="Capa texto 4"/>
+          <p:cNvSpPr txBox="1"/>
+          <p:nvPr/>
+        </p:nvSpPr>
+        <p:spPr>
+          <a:xfrm>
+            <a:off x="4754880" y="3703320"/>
+            <a:ext cx="3840480" cy="365760"/>
+          </a:xfrm>
+          <a:prstGeom prst="rect">
+            <a:avLst/>
+          </a:prstGeom>
+          <a:noFill/>
+          <a:ln/>
+        </p:spPr>
+        <p:txBody>
+          <a:bodyPr wrap="square" lIns="0" tIns="0" rIns="0" bIns="0" rtlCol="0" anchor="t"/>
+          <a:lstStyle/>
+          <a:p>
+            <a:pPr indent="0" marL="0">
+              <a:buNone/>
+            </a:pPr>
+            <a:r>
+              <a:rPr lang="en-US" sz="1200" dirty="0">
+                <a:solidFill>
+                  <a:schemeClr val="accent4"/>
+                </a:solidFill>
+              </a:rPr>
+              <a:t>Franja clara arriba que simula la luz.</a:t>
+            </a:r>
+            <a:endParaRPr lang="en-US" sz="1200" dirty="0"/>
+          </a:p>
+        </p:txBody>
+      </p:sp>
+      <p:sp>
+        <p:nvSpPr>
+          <p:cNvPr id="23" name="Pie relieve"/>
+          <p:cNvSpPr txBox="1"/>
+          <p:nvPr/>
+        </p:nvSpPr>
+        <p:spPr>
+          <a:xfrm>
+            <a:off x="548640" y="4069080"/>
+            <a:ext cx="3474720" cy="274320"/>
+          </a:xfrm>
+          <a:prstGeom prst="rect">
+            <a:avLst/>
+          </a:prstGeom>
+          <a:noFill/>
+          <a:ln/>
+        </p:spPr>
+        <p:txBody>
+          <a:bodyPr wrap="square" lIns="0" tIns="0" rIns="0" bIns="0" rtlCol="0" anchor="ctr"/>
+          <a:lstStyle/>
+          <a:p>
+            <a:pPr algn="ctr" indent="0" marL="0">
+              <a:buNone/>
+            </a:pPr>
+            <a:r>
+              <a:rPr lang="en-US" sz="1100" dirty="0">
+                <a:solidFill>
+                  <a:schemeClr val="accent3"/>
                 </a:solidFill>
                 <a:latin typeface="Consolas" pitchFamily="34" charset="0"/>
                 <a:ea typeface="Consolas" pitchFamily="34" charset="-122"/>
                 <a:cs typeface="Consolas" pitchFamily="34" charset="-120"/>
               </a:rPr>
-              <a:t>update(delta)</a:t>
-            </a:r>
-            <a:endParaRPr lang="en-US" sz="1600" dirty="0"/>
-          </a:p>
-        </p:txBody>
-      </p:sp>
-      <p:sp>
-        <p:nvSpPr>
-          <p:cNvPr id="6" name="Texto tarjeta 1"/>
-          <p:cNvSpPr txBox="1"/>
-          <p:nvPr/>
-        </p:nvSpPr>
-        <p:spPr>
-          <a:xfrm>
-            <a:off x="1097280" y="2971800"/>
-            <a:ext cx="1920240" cy="777240"/>
-          </a:xfrm>
-          <a:prstGeom prst="rect">
-            <a:avLst/>
-          </a:prstGeom>
-          <a:noFill/>
-          <a:ln/>
-        </p:spPr>
-        <p:txBody>
-          <a:bodyPr wrap="square" lIns="0" tIns="0" rIns="0" bIns="0" rtlCol="0" anchor="t"/>
-          <a:lstStyle/>
-          <a:p>
-            <a:pPr algn="ctr" indent="0" marL="0">
-              <a:buNone/>
-            </a:pPr>
-            <a:r>
-              <a:rPr lang="en-US" sz="1200" dirty="0">
-                <a:solidFill>
-                  <a:schemeClr val="accent4"/>
-                </a:solidFill>
-              </a:rPr>
-              <a:t>Acumula el tiempo y ejecuta un paso cada vez que se cumple el intervalo.</a:t>
-            </a:r>
-            <a:endParaRPr lang="en-US" sz="1200" dirty="0"/>
-          </a:p>
-        </p:txBody>
-      </p:sp>
-      <p:sp>
-        <p:nvSpPr>
-          <p:cNvPr id="7" name="Tarjeta 2"/>
-          <p:cNvSpPr/>
-          <p:nvPr/>
-        </p:nvSpPr>
-        <p:spPr>
-          <a:xfrm>
-            <a:off x="3429000" y="1691640"/>
-            <a:ext cx="2286000" cy="2240280"/>
-          </a:xfrm>
-          <a:prstGeom prst="roundRect">
-            <a:avLst>
-              <a:gd name="adj" fmla="val 4898"/>
-            </a:avLst>
-          </a:prstGeom>
-          <a:solidFill>
-            <a:schemeClr val="bg2"/>
-          </a:solidFill>
-          <a:ln/>
-        </p:spPr>
-      </p:sp>
-      <p:pic>
-        <p:nvPicPr>
-          <p:cNvPr id="8" name="Icono 2" descr="preencoded.png">    </p:cNvPr>
-          <p:cNvPicPr>
-            <a:picLocks noChangeAspect="1"/>
-          </p:cNvPicPr>
-          <p:nvPr/>
-        </p:nvPicPr>
-        <p:blipFill>
-          <a:blip r:embed="rId2"/>
-          <a:stretch>
-            <a:fillRect/>
-          </a:stretch>
-        </p:blipFill>
-        <p:spPr>
-          <a:xfrm>
-            <a:off x="4370832" y="1965960"/>
-            <a:ext cx="402336" cy="402336"/>
-          </a:xfrm>
-          <a:prstGeom prst="rect">
-            <a:avLst/>
-          </a:prstGeom>
-        </p:spPr>
-      </p:pic>
-      <p:sp>
-        <p:nvSpPr>
-          <p:cNvPr id="9" name="Titulo tarjeta 2"/>
-          <p:cNvSpPr txBox="1"/>
-          <p:nvPr/>
-        </p:nvSpPr>
-        <p:spPr>
-          <a:xfrm>
-            <a:off x="3566160" y="2560320"/>
-            <a:ext cx="2011680" cy="365760"/>
-          </a:xfrm>
-          <a:prstGeom prst="rect">
-            <a:avLst/>
-          </a:prstGeom>
-          <a:noFill/>
-          <a:ln/>
-        </p:spPr>
-        <p:txBody>
-          <a:bodyPr wrap="square" lIns="0" tIns="0" rIns="0" bIns="0" rtlCol="0" anchor="ctr"/>
-          <a:lstStyle/>
-          <a:p>
-            <a:pPr algn="ctr" indent="0" marL="0">
-              <a:buNone/>
-            </a:pPr>
-            <a:r>
-              <a:rPr lang="en-US" sz="1600" b="1" dirty="0">
-                <a:solidFill>
-                  <a:schemeClr val="tx2"/>
-                </a:solidFill>
-                <a:latin typeface="Segoe UI Semibold" pitchFamily="34" charset="0"/>
-                <a:ea typeface="Segoe UI Semibold" pitchFamily="34" charset="-122"/>
-                <a:cs typeface="Segoe UI Semibold" pitchFamily="34" charset="-120"/>
-              </a:rPr>
-              <a:t>Velocidad Progresiva</a:t>
-            </a:r>
-            <a:endParaRPr lang="en-US" sz="1600" dirty="0"/>
-          </a:p>
-        </p:txBody>
-      </p:sp>
-      <p:sp>
-        <p:nvSpPr>
-          <p:cNvPr id="10" name="Texto tarjeta 2"/>
-          <p:cNvSpPr txBox="1"/>
-          <p:nvPr/>
-        </p:nvSpPr>
-        <p:spPr>
-          <a:xfrm>
-            <a:off x="3611880" y="2971800"/>
-            <a:ext cx="1920240" cy="777240"/>
-          </a:xfrm>
-          <a:prstGeom prst="rect">
-            <a:avLst/>
-          </a:prstGeom>
-          <a:noFill/>
-          <a:ln/>
-        </p:spPr>
-        <p:txBody>
-          <a:bodyPr wrap="square" lIns="0" tIns="0" rIns="0" bIns="0" rtlCol="0" anchor="t"/>
-          <a:lstStyle/>
-          <a:p>
-            <a:pPr algn="ctr" indent="0" marL="0">
-              <a:buNone/>
-            </a:pPr>
-            <a:r>
-              <a:rPr lang="en-US" sz="1200" dirty="0">
-                <a:solidFill>
-                  <a:schemeClr val="accent4"/>
-                </a:solidFill>
-              </a:rPr>
-              <a:t>Empieza en 120 ms por paso y baja 3 ms por manzana, hasta 60 ms.</a:t>
-            </a:r>
-            <a:endParaRPr lang="en-US" sz="1200" dirty="0"/>
-          </a:p>
-        </p:txBody>
-      </p:sp>
-      <p:sp>
-        <p:nvSpPr>
-          <p:cNvPr id="11" name="Tarjeta 3"/>
-          <p:cNvSpPr/>
-          <p:nvPr/>
-        </p:nvSpPr>
-        <p:spPr>
-          <a:xfrm>
-            <a:off x="5943600" y="1691640"/>
-            <a:ext cx="2286000" cy="2240280"/>
-          </a:xfrm>
-          <a:prstGeom prst="roundRect">
-            <a:avLst>
-              <a:gd name="adj" fmla="val 4898"/>
-            </a:avLst>
-          </a:prstGeom>
-          <a:solidFill>
-            <a:schemeClr val="bg2"/>
-          </a:solidFill>
-          <a:ln/>
-        </p:spPr>
-      </p:sp>
-      <p:pic>
-        <p:nvPicPr>
-          <p:cNvPr id="12" name="Icono 3" descr="preencoded.png">    </p:cNvPr>
-          <p:cNvPicPr>
-            <a:picLocks noChangeAspect="1"/>
-          </p:cNvPicPr>
-          <p:nvPr/>
-        </p:nvPicPr>
-        <p:blipFill>
-          <a:blip r:embed="rId3"/>
-          <a:stretch>
-            <a:fillRect/>
-          </a:stretch>
-        </p:blipFill>
-        <p:spPr>
-          <a:xfrm>
-            <a:off x="6885432" y="1965960"/>
-            <a:ext cx="402336" cy="402336"/>
-          </a:xfrm>
-          <a:prstGeom prst="rect">
-            <a:avLst/>
-          </a:prstGeom>
-        </p:spPr>
-      </p:pic>
-      <p:sp>
-        <p:nvSpPr>
-          <p:cNvPr id="13" name="Titulo tarjeta 3"/>
-          <p:cNvSpPr txBox="1"/>
-          <p:nvPr/>
-        </p:nvSpPr>
-        <p:spPr>
-          <a:xfrm>
-            <a:off x="6080760" y="2560320"/>
-            <a:ext cx="2011680" cy="365760"/>
-          </a:xfrm>
-          <a:prstGeom prst="rect">
-            <a:avLst/>
-          </a:prstGeom>
-          <a:noFill/>
-          <a:ln/>
-        </p:spPr>
-        <p:txBody>
-          <a:bodyPr wrap="square" lIns="0" tIns="0" rIns="0" bIns="0" rtlCol="0" anchor="ctr"/>
-          <a:lstStyle/>
-          <a:p>
-            <a:pPr algn="ctr" indent="0" marL="0">
-              <a:buNone/>
-            </a:pPr>
-            <a:r>
-              <a:rPr lang="en-US" sz="1600" b="1" dirty="0">
-                <a:solidFill>
-                  <a:schemeClr val="tx2"/>
-                </a:solidFill>
-                <a:latin typeface="Consolas" pitchFamily="34" charset="0"/>
-                <a:ea typeface="Consolas" pitchFamily="34" charset="-122"/>
-                <a:cs typeface="Consolas" pitchFamily="34" charset="-120"/>
-              </a:rPr>
-              <a:t>gfx.clear()</a:t>
-            </a:r>
-            <a:endParaRPr lang="en-US" sz="1600" dirty="0"/>
-          </a:p>
-        </p:txBody>
-      </p:sp>
-      <p:sp>
-        <p:nvSpPr>
-          <p:cNvPr id="14" name="Texto tarjeta 3"/>
-          <p:cNvSpPr txBox="1"/>
-          <p:nvPr/>
-        </p:nvSpPr>
-        <p:spPr>
-          <a:xfrm>
-            <a:off x="6126480" y="2971800"/>
-            <a:ext cx="1920240" cy="777240"/>
-          </a:xfrm>
-          <a:prstGeom prst="rect">
-            <a:avLst/>
-          </a:prstGeom>
-          <a:noFill/>
-          <a:ln/>
-        </p:spPr>
-        <p:txBody>
-          <a:bodyPr wrap="square" lIns="0" tIns="0" rIns="0" bIns="0" rtlCol="0" anchor="t"/>
-          <a:lstStyle/>
-          <a:p>
-            <a:pPr algn="ctr" indent="0" marL="0">
-              <a:buNone/>
-            </a:pPr>
-            <a:r>
-              <a:rPr lang="en-US" sz="1200" dirty="0">
-                <a:solidFill>
-                  <a:schemeClr val="accent4"/>
-                </a:solidFill>
-              </a:rPr>
-              <a:t>Borra y redibuja la serpiente y la comida en cada paso.</a:t>
-            </a:r>
-            <a:endParaRPr lang="en-US" sz="1200" dirty="0"/>
+              <a:t>drawSegment(): cuatro capas por bloque</a:t>
+            </a:r>
+            <a:endParaRPr lang="en-US" sz="1100" dirty="0"/>
           </a:p>
         </p:txBody>
       </p:sp>
@@ -5860,7 +8087,7 @@
           <a:bodyPr wrap="square" lIns="0" tIns="0" rIns="0" bIns="0" rtlCol="0" anchor="ctr"/>
           <a:lstStyle/>
           <a:p>
-            <a:pPr algn="l" indent="0" marL="0">
+            <a:pPr algn="ctr" indent="0" marL="0">
               <a:buNone/>
             </a:pPr>
             <a:r>
@@ -5872,7 +8099,7 @@
                 <a:ea typeface="Segoe UI Semibold" pitchFamily="34" charset="-122"/>
                 <a:cs typeface="Segoe UI Semibold" pitchFamily="34" charset="-120"/>
               </a:rPr>
-              <a:t>Controles y Movimiento</a:t>
+              <a:t>Cinco Escenarios</a:t>
             </a:r>
             <a:endParaRPr lang="en-US" sz="3200" dirty="0"/>
           </a:p>
@@ -5880,7 +8107,7 @@
       </p:sp>
       <p:pic>
         <p:nvPicPr>
-          <p:cNvPr id="3" name="Icono 1" descr="preencoded.png">    </p:cNvPr>
+          <p:cNvPr id="3" name="Captura Bosque" descr="Escenario Bosque">    </p:cNvPr>
           <p:cNvPicPr>
             <a:picLocks noChangeAspect="1"/>
           </p:cNvPicPr>
@@ -5894,8 +8121,8 @@
         </p:blipFill>
         <p:spPr>
           <a:xfrm>
-            <a:off x="548640" y="1627632"/>
-            <a:ext cx="274320" cy="274320"/>
+            <a:off x="548640" y="1463040"/>
+            <a:ext cx="1554480" cy="1165860"/>
           </a:xfrm>
           <a:prstGeom prst="rect">
             <a:avLst/>
@@ -5904,14 +8131,14 @@
       </p:pic>
       <p:sp>
         <p:nvSpPr>
-          <p:cNvPr id="4" name="Titulo 1"/>
-          <p:cNvSpPr txBox="1"/>
-          <p:nvPr/>
-        </p:nvSpPr>
-        <p:spPr>
-          <a:xfrm>
-            <a:off x="960120" y="1600200"/>
-            <a:ext cx="3200400" cy="329184"/>
+          <p:cNvPr id="4" name="Nombre 1"/>
+          <p:cNvSpPr txBox="1"/>
+          <p:nvPr/>
+        </p:nvSpPr>
+        <p:spPr>
+          <a:xfrm>
+            <a:off x="548640" y="2697480"/>
+            <a:ext cx="1554480" cy="292608"/>
           </a:xfrm>
           <a:prstGeom prst="rect">
             <a:avLst/>
@@ -5923,11 +8150,11 @@
           <a:bodyPr wrap="square" lIns="0" tIns="0" rIns="0" bIns="0" rtlCol="0" anchor="ctr"/>
           <a:lstStyle/>
           <a:p>
-            <a:pPr indent="0" marL="0">
-              <a:buNone/>
-            </a:pPr>
-            <a:r>
-              <a:rPr lang="en-US" sz="1800" b="1" dirty="0">
+            <a:pPr algn="ctr" indent="0" marL="0">
+              <a:buNone/>
+            </a:pPr>
+            <a:r>
+              <a:rPr lang="en-US" sz="1400" b="1" dirty="0">
                 <a:solidFill>
                   <a:schemeClr val="tx2"/>
                 </a:solidFill>
@@ -5935,51 +8162,51 @@
                 <a:ea typeface="Segoe UI Semibold" pitchFamily="34" charset="-122"/>
                 <a:cs typeface="Segoe UI Semibold" pitchFamily="34" charset="-120"/>
               </a:rPr>
-              <a:t>Flechas y WASD</a:t>
-            </a:r>
-            <a:endParaRPr lang="en-US" sz="1800" dirty="0"/>
-          </a:p>
-        </p:txBody>
-      </p:sp>
-      <p:sp>
-        <p:nvSpPr>
-          <p:cNvPr id="5" name="Texto 1"/>
-          <p:cNvSpPr txBox="1"/>
-          <p:nvPr/>
-        </p:nvSpPr>
-        <p:spPr>
-          <a:xfrm>
-            <a:off x="548640" y="2057400"/>
-            <a:ext cx="3749040" cy="548640"/>
-          </a:xfrm>
-          <a:prstGeom prst="rect">
-            <a:avLst/>
-          </a:prstGeom>
-          <a:noFill/>
-          <a:ln/>
-        </p:spPr>
-        <p:txBody>
-          <a:bodyPr wrap="square" lIns="0" tIns="0" rIns="0" bIns="0" rtlCol="0" anchor="t"/>
-          <a:lstStyle/>
-          <a:p>
-            <a:pPr indent="0" marL="0">
-              <a:buNone/>
-            </a:pPr>
-            <a:r>
-              <a:rPr lang="en-US" sz="1400" dirty="0">
-                <a:solidFill>
-                  <a:schemeClr val="accent4"/>
-                </a:solidFill>
-              </a:rPr>
-              <a:t>Las dos distribuciones se mapean a las mismas cuatro direcciones.</a:t>
+              <a:t>1. Bosque</a:t>
             </a:r>
             <a:endParaRPr lang="en-US" sz="1400" dirty="0"/>
+          </a:p>
+        </p:txBody>
+      </p:sp>
+      <p:sp>
+        <p:nvSpPr>
+          <p:cNvPr id="5" name="Ambiente 1"/>
+          <p:cNvSpPr txBox="1"/>
+          <p:nvPr/>
+        </p:nvSpPr>
+        <p:spPr>
+          <a:xfrm>
+            <a:off x="548640" y="2971800"/>
+            <a:ext cx="1554480" cy="274320"/>
+          </a:xfrm>
+          <a:prstGeom prst="rect">
+            <a:avLst/>
+          </a:prstGeom>
+          <a:noFill/>
+          <a:ln/>
+        </p:spPr>
+        <p:txBody>
+          <a:bodyPr wrap="square" lIns="0" tIns="0" rIns="0" bIns="0" rtlCol="0" anchor="ctr"/>
+          <a:lstStyle/>
+          <a:p>
+            <a:pPr algn="ctr" indent="0" marL="0">
+              <a:buNone/>
+            </a:pPr>
+            <a:r>
+              <a:rPr lang="en-US" sz="1100" dirty="0">
+                <a:solidFill>
+                  <a:schemeClr val="accent3"/>
+                </a:solidFill>
+              </a:rPr>
+              <a:t>Hojas que caen</a:t>
+            </a:r>
+            <a:endParaRPr lang="en-US" sz="1100" dirty="0"/>
           </a:p>
         </p:txBody>
       </p:sp>
       <p:pic>
         <p:nvPicPr>
-          <p:cNvPr id="6" name="Icono 2" descr="preencoded.png">    </p:cNvPr>
+          <p:cNvPr id="6" name="Captura Desierto" descr="Escenario Desierto">    </p:cNvPr>
           <p:cNvPicPr>
             <a:picLocks noChangeAspect="1"/>
           </p:cNvPicPr>
@@ -5993,8 +8220,8 @@
         </p:blipFill>
         <p:spPr>
           <a:xfrm>
-            <a:off x="4663440" y="1627632"/>
-            <a:ext cx="274320" cy="274320"/>
+            <a:off x="2167128" y="1463040"/>
+            <a:ext cx="1554480" cy="1165860"/>
           </a:xfrm>
           <a:prstGeom prst="rect">
             <a:avLst/>
@@ -6003,14 +8230,14 @@
       </p:pic>
       <p:sp>
         <p:nvSpPr>
-          <p:cNvPr id="7" name="Titulo 2"/>
-          <p:cNvSpPr txBox="1"/>
-          <p:nvPr/>
-        </p:nvSpPr>
-        <p:spPr>
-          <a:xfrm>
-            <a:off x="5074920" y="1600200"/>
-            <a:ext cx="3200400" cy="329184"/>
+          <p:cNvPr id="7" name="Nombre 2"/>
+          <p:cNvSpPr txBox="1"/>
+          <p:nvPr/>
+        </p:nvSpPr>
+        <p:spPr>
+          <a:xfrm>
+            <a:off x="2167128" y="2697480"/>
+            <a:ext cx="1554480" cy="292608"/>
           </a:xfrm>
           <a:prstGeom prst="rect">
             <a:avLst/>
@@ -6022,11 +8249,11 @@
           <a:bodyPr wrap="square" lIns="0" tIns="0" rIns="0" bIns="0" rtlCol="0" anchor="ctr"/>
           <a:lstStyle/>
           <a:p>
-            <a:pPr indent="0" marL="0">
-              <a:buNone/>
-            </a:pPr>
-            <a:r>
-              <a:rPr lang="en-US" sz="1800" b="1" dirty="0">
+            <a:pPr algn="ctr" indent="0" marL="0">
+              <a:buNone/>
+            </a:pPr>
+            <a:r>
+              <a:rPr lang="en-US" sz="1400" b="1" dirty="0">
                 <a:solidFill>
                   <a:schemeClr val="tx2"/>
                 </a:solidFill>
@@ -6034,51 +8261,51 @@
                 <a:ea typeface="Segoe UI Semibold" pitchFamily="34" charset="-122"/>
                 <a:cs typeface="Segoe UI Semibold" pitchFamily="34" charset="-120"/>
               </a:rPr>
-              <a:t>Cola de Giros</a:t>
-            </a:r>
-            <a:endParaRPr lang="en-US" sz="1800" dirty="0"/>
-          </a:p>
-        </p:txBody>
-      </p:sp>
-      <p:sp>
-        <p:nvSpPr>
-          <p:cNvPr id="8" name="Texto 2"/>
-          <p:cNvSpPr txBox="1"/>
-          <p:nvPr/>
-        </p:nvSpPr>
-        <p:spPr>
-          <a:xfrm>
-            <a:off x="4663440" y="2057400"/>
-            <a:ext cx="3749040" cy="548640"/>
-          </a:xfrm>
-          <a:prstGeom prst="rect">
-            <a:avLst/>
-          </a:prstGeom>
-          <a:noFill/>
-          <a:ln/>
-        </p:spPr>
-        <p:txBody>
-          <a:bodyPr wrap="square" lIns="0" tIns="0" rIns="0" bIns="0" rtlCol="0" anchor="t"/>
-          <a:lstStyle/>
-          <a:p>
-            <a:pPr indent="0" marL="0">
-              <a:buNone/>
-            </a:pPr>
-            <a:r>
-              <a:rPr lang="en-US" sz="1400" dirty="0">
-                <a:solidFill>
-                  <a:schemeClr val="accent4"/>
-                </a:solidFill>
-              </a:rPr>
-              <a:t>Guarda hasta 2 giros pendientes para responder a pulsaciones rápidas.</a:t>
+              <a:t>2. Desierto</a:t>
             </a:r>
             <a:endParaRPr lang="en-US" sz="1400" dirty="0"/>
+          </a:p>
+        </p:txBody>
+      </p:sp>
+      <p:sp>
+        <p:nvSpPr>
+          <p:cNvPr id="8" name="Ambiente 2"/>
+          <p:cNvSpPr txBox="1"/>
+          <p:nvPr/>
+        </p:nvSpPr>
+        <p:spPr>
+          <a:xfrm>
+            <a:off x="2167128" y="2971800"/>
+            <a:ext cx="1554480" cy="274320"/>
+          </a:xfrm>
+          <a:prstGeom prst="rect">
+            <a:avLst/>
+          </a:prstGeom>
+          <a:noFill/>
+          <a:ln/>
+        </p:spPr>
+        <p:txBody>
+          <a:bodyPr wrap="square" lIns="0" tIns="0" rIns="0" bIns="0" rtlCol="0" anchor="ctr"/>
+          <a:lstStyle/>
+          <a:p>
+            <a:pPr algn="ctr" indent="0" marL="0">
+              <a:buNone/>
+            </a:pPr>
+            <a:r>
+              <a:rPr lang="en-US" sz="1100" dirty="0">
+                <a:solidFill>
+                  <a:schemeClr val="accent3"/>
+                </a:solidFill>
+              </a:rPr>
+              <a:t>Arena con viento</a:t>
+            </a:r>
+            <a:endParaRPr lang="en-US" sz="1100" dirty="0"/>
           </a:p>
         </p:txBody>
       </p:sp>
       <p:pic>
         <p:nvPicPr>
-          <p:cNvPr id="9" name="Icono 3" descr="preencoded.png">    </p:cNvPr>
+          <p:cNvPr id="9" name="Captura Nieve" descr="Escenario Nieve">    </p:cNvPr>
           <p:cNvPicPr>
             <a:picLocks noChangeAspect="1"/>
           </p:cNvPicPr>
@@ -6092,8 +8319,8 @@
         </p:blipFill>
         <p:spPr>
           <a:xfrm>
-            <a:off x="548640" y="3227832"/>
-            <a:ext cx="274320" cy="274320"/>
+            <a:off x="3785616" y="1463040"/>
+            <a:ext cx="1554480" cy="1165860"/>
           </a:xfrm>
           <a:prstGeom prst="rect">
             <a:avLst/>
@@ -6102,14 +8329,14 @@
       </p:pic>
       <p:sp>
         <p:nvSpPr>
-          <p:cNvPr id="10" name="Titulo 3"/>
-          <p:cNvSpPr txBox="1"/>
-          <p:nvPr/>
-        </p:nvSpPr>
-        <p:spPr>
-          <a:xfrm>
-            <a:off x="960120" y="3200400"/>
-            <a:ext cx="3200400" cy="329184"/>
+          <p:cNvPr id="10" name="Nombre 3"/>
+          <p:cNvSpPr txBox="1"/>
+          <p:nvPr/>
+        </p:nvSpPr>
+        <p:spPr>
+          <a:xfrm>
+            <a:off x="3785616" y="2697480"/>
+            <a:ext cx="1554480" cy="292608"/>
           </a:xfrm>
           <a:prstGeom prst="rect">
             <a:avLst/>
@@ -6121,11 +8348,11 @@
           <a:bodyPr wrap="square" lIns="0" tIns="0" rIns="0" bIns="0" rtlCol="0" anchor="ctr"/>
           <a:lstStyle/>
           <a:p>
-            <a:pPr indent="0" marL="0">
-              <a:buNone/>
-            </a:pPr>
-            <a:r>
-              <a:rPr lang="en-US" sz="1800" b="1" dirty="0">
+            <a:pPr algn="ctr" indent="0" marL="0">
+              <a:buNone/>
+            </a:pPr>
+            <a:r>
+              <a:rPr lang="en-US" sz="1400" b="1" dirty="0">
                 <a:solidFill>
                   <a:schemeClr val="tx2"/>
                 </a:solidFill>
@@ -6133,51 +8360,51 @@
                 <a:ea typeface="Segoe UI Semibold" pitchFamily="34" charset="-122"/>
                 <a:cs typeface="Segoe UI Semibold" pitchFamily="34" charset="-120"/>
               </a:rPr>
-              <a:t>Sin Media Vuelta</a:t>
-            </a:r>
-            <a:endParaRPr lang="en-US" sz="1800" dirty="0"/>
-          </a:p>
-        </p:txBody>
-      </p:sp>
-      <p:sp>
-        <p:nvSpPr>
-          <p:cNvPr id="11" name="Texto 3"/>
-          <p:cNvSpPr txBox="1"/>
-          <p:nvPr/>
-        </p:nvSpPr>
-        <p:spPr>
-          <a:xfrm>
-            <a:off x="548640" y="3657600"/>
-            <a:ext cx="3749040" cy="548640"/>
-          </a:xfrm>
-          <a:prstGeom prst="rect">
-            <a:avLst/>
-          </a:prstGeom>
-          <a:noFill/>
-          <a:ln/>
-        </p:spPr>
-        <p:txBody>
-          <a:bodyPr wrap="square" lIns="0" tIns="0" rIns="0" bIns="0" rtlCol="0" anchor="t"/>
-          <a:lstStyle/>
-          <a:p>
-            <a:pPr indent="0" marL="0">
-              <a:buNone/>
-            </a:pPr>
-            <a:r>
-              <a:rPr lang="en-US" sz="1400" dirty="0">
-                <a:solidFill>
-                  <a:schemeClr val="accent4"/>
-                </a:solidFill>
-              </a:rPr>
-              <a:t>Se ignora la dirección opuesta para no chocar consigo misma.</a:t>
+              <a:t>3. Nieve</a:t>
             </a:r>
             <a:endParaRPr lang="en-US" sz="1400" dirty="0"/>
+          </a:p>
+        </p:txBody>
+      </p:sp>
+      <p:sp>
+        <p:nvSpPr>
+          <p:cNvPr id="11" name="Ambiente 3"/>
+          <p:cNvSpPr txBox="1"/>
+          <p:nvPr/>
+        </p:nvSpPr>
+        <p:spPr>
+          <a:xfrm>
+            <a:off x="3785616" y="2971800"/>
+            <a:ext cx="1554480" cy="274320"/>
+          </a:xfrm>
+          <a:prstGeom prst="rect">
+            <a:avLst/>
+          </a:prstGeom>
+          <a:noFill/>
+          <a:ln/>
+        </p:spPr>
+        <p:txBody>
+          <a:bodyPr wrap="square" lIns="0" tIns="0" rIns="0" bIns="0" rtlCol="0" anchor="ctr"/>
+          <a:lstStyle/>
+          <a:p>
+            <a:pPr algn="ctr" indent="0" marL="0">
+              <a:buNone/>
+            </a:pPr>
+            <a:r>
+              <a:rPr lang="en-US" sz="1100" dirty="0">
+                <a:solidFill>
+                  <a:schemeClr val="accent3"/>
+                </a:solidFill>
+              </a:rPr>
+              <a:t>Copos de nieve</a:t>
+            </a:r>
+            <a:endParaRPr lang="en-US" sz="1100" dirty="0"/>
           </a:p>
         </p:txBody>
       </p:sp>
       <p:pic>
         <p:nvPicPr>
-          <p:cNvPr id="12" name="Icono 4" descr="preencoded.png">    </p:cNvPr>
+          <p:cNvPr id="12" name="Captura Volcán" descr="Escenario Volcán">    </p:cNvPr>
           <p:cNvPicPr>
             <a:picLocks noChangeAspect="1"/>
           </p:cNvPicPr>
@@ -6191,8 +8418,8 @@
         </p:blipFill>
         <p:spPr>
           <a:xfrm>
-            <a:off x="4663440" y="3227832"/>
-            <a:ext cx="274320" cy="274320"/>
+            <a:off x="5404104" y="1463040"/>
+            <a:ext cx="1554480" cy="1165860"/>
           </a:xfrm>
           <a:prstGeom prst="rect">
             <a:avLst/>
@@ -6201,14 +8428,14 @@
       </p:pic>
       <p:sp>
         <p:nvSpPr>
-          <p:cNvPr id="13" name="Titulo 4"/>
-          <p:cNvSpPr txBox="1"/>
-          <p:nvPr/>
-        </p:nvSpPr>
-        <p:spPr>
-          <a:xfrm>
-            <a:off x="5074920" y="3200400"/>
-            <a:ext cx="3200400" cy="329184"/>
+          <p:cNvPr id="13" name="Nombre 4"/>
+          <p:cNvSpPr txBox="1"/>
+          <p:nvPr/>
+        </p:nvSpPr>
+        <p:spPr>
+          <a:xfrm>
+            <a:off x="5404104" y="2697480"/>
+            <a:ext cx="1554480" cy="292608"/>
           </a:xfrm>
           <a:prstGeom prst="rect">
             <a:avLst/>
@@ -6220,105 +8447,227 @@
           <a:bodyPr wrap="square" lIns="0" tIns="0" rIns="0" bIns="0" rtlCol="0" anchor="ctr"/>
           <a:lstStyle/>
           <a:p>
-            <a:pPr indent="0" marL="0">
-              <a:buNone/>
-            </a:pPr>
-            <a:r>
-              <a:rPr lang="en-US" sz="1800" b="1" dirty="0">
+            <a:pPr algn="ctr" indent="0" marL="0">
+              <a:buNone/>
+            </a:pPr>
+            <a:r>
+              <a:rPr lang="en-US" sz="1400" b="1" dirty="0">
                 <a:solidFill>
                   <a:schemeClr val="tx2"/>
                 </a:solidFill>
-                <a:latin typeface="Consolas" pitchFamily="34" charset="0"/>
-                <a:ea typeface="Consolas" pitchFamily="34" charset="-122"/>
-                <a:cs typeface="Consolas" pitchFamily="34" charset="-120"/>
-              </a:rPr>
-              <a:t>addCapture()</a:t>
-            </a:r>
-            <a:endParaRPr lang="en-US" sz="1800" dirty="0"/>
-          </a:p>
-        </p:txBody>
-      </p:sp>
-      <p:sp>
-        <p:nvSpPr>
-          <p:cNvPr id="14" name="Texto 4"/>
-          <p:cNvSpPr txBox="1"/>
-          <p:nvPr/>
-        </p:nvSpPr>
-        <p:spPr>
-          <a:xfrm>
-            <a:off x="4663440" y="3657600"/>
-            <a:ext cx="3749040" cy="548640"/>
-          </a:xfrm>
-          <a:prstGeom prst="rect">
-            <a:avLst/>
-          </a:prstGeom>
-          <a:noFill/>
-          <a:ln/>
-        </p:spPr>
-        <p:txBody>
-          <a:bodyPr wrap="square" lIns="0" tIns="0" rIns="0" bIns="0" rtlCol="0" anchor="t"/>
-          <a:lstStyle/>
-          <a:p>
-            <a:pPr indent="0" marL="0">
-              <a:buNone/>
-            </a:pPr>
-            <a:r>
-              <a:rPr lang="en-US" sz="1400" dirty="0">
+                <a:latin typeface="Segoe UI Semibold" pitchFamily="34" charset="0"/>
+                <a:ea typeface="Segoe UI Semibold" pitchFamily="34" charset="-122"/>
+                <a:cs typeface="Segoe UI Semibold" pitchFamily="34" charset="-120"/>
+              </a:rPr>
+              <a:t>4. Volcán</a:t>
+            </a:r>
+            <a:endParaRPr lang="en-US" sz="1400" dirty="0"/>
+          </a:p>
+        </p:txBody>
+      </p:sp>
+      <p:sp>
+        <p:nvSpPr>
+          <p:cNvPr id="14" name="Ambiente 4"/>
+          <p:cNvSpPr txBox="1"/>
+          <p:nvPr/>
+        </p:nvSpPr>
+        <p:spPr>
+          <a:xfrm>
+            <a:off x="5404104" y="2971800"/>
+            <a:ext cx="1554480" cy="274320"/>
+          </a:xfrm>
+          <a:prstGeom prst="rect">
+            <a:avLst/>
+          </a:prstGeom>
+          <a:noFill/>
+          <a:ln/>
+        </p:spPr>
+        <p:txBody>
+          <a:bodyPr wrap="square" lIns="0" tIns="0" rIns="0" bIns="0" rtlCol="0" anchor="ctr"/>
+          <a:lstStyle/>
+          <a:p>
+            <a:pPr algn="ctr" indent="0" marL="0">
+              <a:buNone/>
+            </a:pPr>
+            <a:r>
+              <a:rPr lang="en-US" sz="1100" dirty="0">
+                <a:solidFill>
+                  <a:schemeClr val="accent3"/>
+                </a:solidFill>
+              </a:rPr>
+              <a:t>Brasas que suben</a:t>
+            </a:r>
+            <a:endParaRPr lang="en-US" sz="1100" dirty="0"/>
+          </a:p>
+        </p:txBody>
+      </p:sp>
+      <p:pic>
+        <p:nvPicPr>
+          <p:cNvPr id="15" name="Captura Noche" descr="Escenario Noche">    </p:cNvPr>
+          <p:cNvPicPr>
+            <a:picLocks noChangeAspect="1"/>
+          </p:cNvPicPr>
+          <p:nvPr/>
+        </p:nvPicPr>
+        <p:blipFill>
+          <a:blip r:embed="rId5"/>
+          <a:stretch>
+            <a:fillRect/>
+          </a:stretch>
+        </p:blipFill>
+        <p:spPr>
+          <a:xfrm>
+            <a:off x="7022592" y="1463040"/>
+            <a:ext cx="1554480" cy="1165860"/>
+          </a:xfrm>
+          <a:prstGeom prst="rect">
+            <a:avLst/>
+          </a:prstGeom>
+        </p:spPr>
+      </p:pic>
+      <p:sp>
+        <p:nvSpPr>
+          <p:cNvPr id="16" name="Nombre 5"/>
+          <p:cNvSpPr txBox="1"/>
+          <p:nvPr/>
+        </p:nvSpPr>
+        <p:spPr>
+          <a:xfrm>
+            <a:off x="7022592" y="2697480"/>
+            <a:ext cx="1554480" cy="292608"/>
+          </a:xfrm>
+          <a:prstGeom prst="rect">
+            <a:avLst/>
+          </a:prstGeom>
+          <a:noFill/>
+          <a:ln/>
+        </p:spPr>
+        <p:txBody>
+          <a:bodyPr wrap="square" lIns="0" tIns="0" rIns="0" bIns="0" rtlCol="0" anchor="ctr"/>
+          <a:lstStyle/>
+          <a:p>
+            <a:pPr algn="ctr" indent="0" marL="0">
+              <a:buNone/>
+            </a:pPr>
+            <a:r>
+              <a:rPr lang="en-US" sz="1400" b="1" dirty="0">
+                <a:solidFill>
+                  <a:schemeClr val="tx2"/>
+                </a:solidFill>
+                <a:latin typeface="Segoe UI Semibold" pitchFamily="34" charset="0"/>
+                <a:ea typeface="Segoe UI Semibold" pitchFamily="34" charset="-122"/>
+                <a:cs typeface="Segoe UI Semibold" pitchFamily="34" charset="-120"/>
+              </a:rPr>
+              <a:t>5. Noche</a:t>
+            </a:r>
+            <a:endParaRPr lang="en-US" sz="1400" dirty="0"/>
+          </a:p>
+        </p:txBody>
+      </p:sp>
+      <p:sp>
+        <p:nvSpPr>
+          <p:cNvPr id="17" name="Ambiente 5"/>
+          <p:cNvSpPr txBox="1"/>
+          <p:nvPr/>
+        </p:nvSpPr>
+        <p:spPr>
+          <a:xfrm>
+            <a:off x="7022592" y="2971800"/>
+            <a:ext cx="1554480" cy="274320"/>
+          </a:xfrm>
+          <a:prstGeom prst="rect">
+            <a:avLst/>
+          </a:prstGeom>
+          <a:noFill/>
+          <a:ln/>
+        </p:spPr>
+        <p:txBody>
+          <a:bodyPr wrap="square" lIns="0" tIns="0" rIns="0" bIns="0" rtlCol="0" anchor="ctr"/>
+          <a:lstStyle/>
+          <a:p>
+            <a:pPr algn="ctr" indent="0" marL="0">
+              <a:buNone/>
+            </a:pPr>
+            <a:r>
+              <a:rPr lang="en-US" sz="1100" dirty="0">
+                <a:solidFill>
+                  <a:schemeClr val="accent3"/>
+                </a:solidFill>
+              </a:rPr>
+              <a:t>Luciérnagas</a:t>
+            </a:r>
+            <a:endParaRPr lang="en-US" sz="1100" dirty="0"/>
+          </a:p>
+        </p:txBody>
+      </p:sp>
+      <p:sp>
+        <p:nvSpPr>
+          <p:cNvPr id="18" name="Nota fondo"/>
+          <p:cNvSpPr/>
+          <p:nvPr/>
+        </p:nvSpPr>
+        <p:spPr>
+          <a:xfrm>
+            <a:off x="1188720" y="3566160"/>
+            <a:ext cx="6766560" cy="548640"/>
+          </a:xfrm>
+          <a:prstGeom prst="roundRect">
+            <a:avLst>
+              <a:gd name="adj" fmla="val 16667"/>
+            </a:avLst>
+          </a:prstGeom>
+          <a:solidFill>
+            <a:schemeClr val="bg2"/>
+          </a:solidFill>
+          <a:ln/>
+        </p:spPr>
+      </p:sp>
+      <p:sp>
+        <p:nvSpPr>
+          <p:cNvPr id="19" name="Nota"/>
+          <p:cNvSpPr txBox="1"/>
+          <p:nvPr/>
+        </p:nvSpPr>
+        <p:spPr>
+          <a:xfrm>
+            <a:off x="1188720" y="3566160"/>
+            <a:ext cx="6766560" cy="548640"/>
+          </a:xfrm>
+          <a:prstGeom prst="rect">
+            <a:avLst/>
+          </a:prstGeom>
+          <a:noFill/>
+          <a:ln/>
+        </p:spPr>
+        <p:txBody>
+          <a:bodyPr wrap="square" lIns="0" tIns="0" rIns="0" bIns="0" rtlCol="0" anchor="ctr"/>
+          <a:lstStyle/>
+          <a:p>
+            <a:pPr algn="ctr" indent="0" marL="0">
+              <a:buNone/>
+            </a:pPr>
+            <a:r>
+              <a:rPr lang="en-US" sz="1300" b="1" dirty="0">
+                <a:solidFill>
+                  <a:schemeClr val="tx2"/>
+                </a:solidFill>
+              </a:rPr>
+              <a:t>Cada 100 puntos: </a:t>
+            </a:r>
+            <a:pPr algn="ctr" indent="0" marL="0">
+              <a:buNone/>
+            </a:pPr>
+            <a:r>
+              <a:rPr lang="en-US" sz="1300" dirty="0">
                 <a:solidFill>
                   <a:schemeClr val="accent4"/>
                 </a:solidFill>
               </a:rPr>
-              <a:t>Evita que las flechas y el espacio desplacen la página.</a:t>
-            </a:r>
-            <a:endParaRPr lang="en-US" sz="1400" dirty="0"/>
-          </a:p>
-        </p:txBody>
-      </p:sp>
-      <p:sp>
-        <p:nvSpPr>
-          <p:cNvPr id="15" name="Separador 1"/>
-          <p:cNvSpPr/>
-          <p:nvPr/>
-        </p:nvSpPr>
-        <p:spPr>
-          <a:xfrm>
-            <a:off x="548640" y="2926080"/>
-            <a:ext cx="3749040" cy="0"/>
-          </a:xfrm>
-          <a:prstGeom prst="line">
-            <a:avLst/>
-          </a:prstGeom>
-          <a:noFill/>
-          <a:ln w="12700">
-            <a:solidFill>
-              <a:schemeClr val="accent5"/>
-            </a:solidFill>
-            <a:prstDash val="solid"/>
-          </a:ln>
-        </p:spPr>
-      </p:sp>
-      <p:sp>
-        <p:nvSpPr>
-          <p:cNvPr id="16" name="Separador 2"/>
-          <p:cNvSpPr/>
-          <p:nvPr/>
-        </p:nvSpPr>
-        <p:spPr>
-          <a:xfrm>
-            <a:off x="4663440" y="2926080"/>
-            <a:ext cx="3931920" cy="0"/>
-          </a:xfrm>
-          <a:prstGeom prst="line">
-            <a:avLst/>
-          </a:prstGeom>
-          <a:noFill/>
-          <a:ln w="12700">
-            <a:solidFill>
-              <a:schemeClr val="accent5"/>
-            </a:solidFill>
-            <a:prstDash val="solid"/>
-          </a:ln>
-        </p:spPr>
+              <a:t>fundido de 1 s, aviso «Nivel N · Escenario» y nuevas partículas.</a:t>
+            </a:r>
+            <a:endParaRPr lang="en-US" sz="1300" dirty="0"/>
+          </a:p>
+        </p:txBody>
       </p:sp>
       <p:sp>
         <p:nvSpPr>
@@ -6413,7 +8762,7 @@
           <a:bodyPr wrap="square" lIns="0" tIns="0" rIns="0" bIns="0" rtlCol="0" anchor="ctr"/>
           <a:lstStyle/>
           <a:p>
-            <a:pPr algn="ctr" indent="0" marL="0">
+            <a:pPr algn="l" indent="0" marL="0">
               <a:buNone/>
             </a:pPr>
             <a:r>
@@ -6425,7 +8774,7 @@
                 <a:ea typeface="Segoe UI Semibold" pitchFamily="34" charset="-122"/>
                 <a:cs typeface="Segoe UI Semibold" pitchFamily="34" charset="-120"/>
               </a:rPr>
-              <a:t>Fin de la Partida</a:t>
+              <a:t>Poderes</a:t>
             </a:r>
             <a:endParaRPr lang="en-US" sz="3200" dirty="0"/>
           </a:p>
@@ -6433,55 +8782,27 @@
       </p:sp>
       <p:sp>
         <p:nvSpPr>
-          <p:cNvPr id="3" name="Linea"/>
+          <p:cNvPr id="3" name="Orbe 1"/>
           <p:cNvSpPr/>
           <p:nvPr/>
         </p:nvSpPr>
         <p:spPr>
           <a:xfrm>
-            <a:off x="1828800" y="2011680"/>
-            <a:ext cx="5486400" cy="0"/>
-          </a:xfrm>
-          <a:prstGeom prst="line">
-            <a:avLst/>
-          </a:prstGeom>
-          <a:noFill/>
-          <a:ln w="38100">
-            <a:solidFill>
-              <a:schemeClr val="accent5"/>
-            </a:solidFill>
-            <a:prstDash val="solid"/>
-          </a:ln>
-        </p:spPr>
-      </p:sp>
-      <p:sp>
-        <p:nvSpPr>
-          <p:cNvPr id="4" name="Circulo 1"/>
-          <p:cNvSpPr/>
-          <p:nvPr/>
-        </p:nvSpPr>
-        <p:spPr>
-          <a:xfrm>
-            <a:off x="1527048" y="1709928"/>
-            <a:ext cx="603504" cy="603504"/>
+            <a:off x="548640" y="1463040"/>
+            <a:ext cx="640080" cy="640080"/>
           </a:xfrm>
           <a:prstGeom prst="ellipse">
             <a:avLst/>
           </a:prstGeom>
           <a:solidFill>
-            <a:schemeClr val="bg2"/>
+            <a:srgbClr val="0984E3"/>
           </a:solidFill>
-          <a:ln w="31750">
-            <a:solidFill>
-              <a:schemeClr val="accent1"/>
-            </a:solidFill>
-            <a:prstDash val="solid"/>
-          </a:ln>
+          <a:ln/>
         </p:spPr>
       </p:sp>
       <p:pic>
         <p:nvPicPr>
-          <p:cNvPr id="5" name="Icono 1" descr="preencoded.png">    </p:cNvPr>
+          <p:cNvPr id="4" name="Icono 1" descr="preencoded.png">    </p:cNvPr>
           <p:cNvPicPr>
             <a:picLocks noChangeAspect="1"/>
           </p:cNvPicPr>
@@ -6495,8 +8816,8 @@
         </p:blipFill>
         <p:spPr>
           <a:xfrm>
-            <a:off x="1682496" y="1865376"/>
-            <a:ext cx="292608" cy="292608"/>
+            <a:off x="713232" y="1627632"/>
+            <a:ext cx="310896" cy="310896"/>
           </a:xfrm>
           <a:prstGeom prst="rect">
             <a:avLst/>
@@ -6505,14 +8826,14 @@
       </p:pic>
       <p:sp>
         <p:nvSpPr>
-          <p:cNvPr id="6" name="Paso 1"/>
-          <p:cNvSpPr txBox="1"/>
-          <p:nvPr/>
-        </p:nvSpPr>
-        <p:spPr>
-          <a:xfrm>
-            <a:off x="685800" y="2514600"/>
-            <a:ext cx="2286000" cy="365760"/>
+          <p:cNvPr id="5" name="Poder 1"/>
+          <p:cNvSpPr txBox="1"/>
+          <p:nvPr/>
+        </p:nvSpPr>
+        <p:spPr>
+          <a:xfrm>
+            <a:off x="1371600" y="1463040"/>
+            <a:ext cx="3017520" cy="310896"/>
           </a:xfrm>
           <a:prstGeom prst="rect">
             <a:avLst/>
@@ -6524,11 +8845,11 @@
           <a:bodyPr wrap="square" lIns="0" tIns="0" rIns="0" bIns="0" rtlCol="0" anchor="ctr"/>
           <a:lstStyle/>
           <a:p>
-            <a:pPr algn="ctr" indent="0" marL="0">
-              <a:buNone/>
-            </a:pPr>
-            <a:r>
-              <a:rPr lang="en-US" sz="1800" b="1" dirty="0">
+            <a:pPr indent="0" marL="0">
+              <a:buNone/>
+            </a:pPr>
+            <a:r>
+              <a:rPr lang="en-US" sz="1700" b="1" dirty="0">
                 <a:solidFill>
                   <a:schemeClr val="tx2"/>
                 </a:solidFill>
@@ -6536,7 +8857,99 @@
                 <a:ea typeface="Segoe UI Semibold" pitchFamily="34" charset="-122"/>
                 <a:cs typeface="Segoe UI Semibold" pitchFamily="34" charset="-120"/>
               </a:rPr>
-              <a:t>1. Choque</a:t>
+              <a:t>Lento</a:t>
+            </a:r>
+            <a:endParaRPr lang="en-US" sz="1700" dirty="0"/>
+          </a:p>
+        </p:txBody>
+      </p:sp>
+      <p:sp>
+        <p:nvSpPr>
+          <p:cNvPr id="6" name="Poder texto 1"/>
+          <p:cNvSpPr txBox="1"/>
+          <p:nvPr/>
+        </p:nvSpPr>
+        <p:spPr>
+          <a:xfrm>
+            <a:off x="1371600" y="1792224"/>
+            <a:ext cx="3017520" cy="548640"/>
+          </a:xfrm>
+          <a:prstGeom prst="rect">
+            <a:avLst/>
+          </a:prstGeom>
+          <a:noFill/>
+          <a:ln/>
+        </p:spPr>
+        <p:txBody>
+          <a:bodyPr wrap="square" lIns="0" tIns="0" rIns="0" bIns="0" rtlCol="0" anchor="t"/>
+          <a:lstStyle/>
+          <a:p>
+            <a:pPr indent="0" marL="0">
+              <a:buNone/>
+            </a:pPr>
+            <a:r>
+              <a:rPr lang="en-US" sz="1300" dirty="0">
+                <a:solidFill>
+                  <a:schemeClr val="accent4"/>
+                </a:solidFill>
+              </a:rPr>
+              <a:t>La serpiente va 1.6 veces más lenta durante 6 s.</a:t>
+            </a:r>
+            <a:endParaRPr lang="en-US" sz="1300" dirty="0"/>
+          </a:p>
+        </p:txBody>
+      </p:sp>
+      <p:sp>
+        <p:nvSpPr>
+          <p:cNvPr id="7" name="Orbe 2"/>
+          <p:cNvSpPr/>
+          <p:nvPr/>
+        </p:nvSpPr>
+        <p:spPr>
+          <a:xfrm>
+            <a:off x="4663440" y="1463040"/>
+            <a:ext cx="640080" cy="640080"/>
+          </a:xfrm>
+          <a:prstGeom prst="ellipse">
+            <a:avLst/>
+          </a:prstGeom>
+          <a:solidFill>
+            <a:srgbClr val="8E44AD"/>
+          </a:solidFill>
+          <a:ln/>
+        </p:spPr>
+      </p:sp>
+      <p:sp>
+        <p:nvSpPr>
+          <p:cNvPr id="8" name="Icono 2"/>
+          <p:cNvSpPr txBox="1"/>
+          <p:nvPr/>
+        </p:nvSpPr>
+        <p:spPr>
+          <a:xfrm>
+            <a:off x="4663440" y="1463040"/>
+            <a:ext cx="640080" cy="640080"/>
+          </a:xfrm>
+          <a:prstGeom prst="rect">
+            <a:avLst/>
+          </a:prstGeom>
+          <a:noFill/>
+          <a:ln/>
+        </p:spPr>
+        <p:txBody>
+          <a:bodyPr wrap="square" lIns="0" tIns="0" rIns="0" bIns="0" rtlCol="0" anchor="ctr"/>
+          <a:lstStyle/>
+          <a:p>
+            <a:pPr algn="ctr" indent="0" marL="0">
+              <a:buNone/>
+            </a:pPr>
+            <a:r>
+              <a:rPr lang="en-US" sz="1800" b="1" dirty="0">
+                <a:solidFill>
+                  <a:schemeClr val="bg1"/>
+                </a:solidFill>
+              </a:rPr>
+              <a:t>x2</a:t>
             </a:r>
             <a:endParaRPr lang="en-US" sz="1800" dirty="0"/>
           </a:p>
@@ -6544,14 +8957,53 @@
       </p:sp>
       <p:sp>
         <p:nvSpPr>
-          <p:cNvPr id="7" name="Detalle 1"/>
-          <p:cNvSpPr txBox="1"/>
-          <p:nvPr/>
-        </p:nvSpPr>
-        <p:spPr>
-          <a:xfrm>
-            <a:off x="685800" y="2880360"/>
-            <a:ext cx="2286000" cy="640080"/>
+          <p:cNvPr id="9" name="Poder 2"/>
+          <p:cNvSpPr txBox="1"/>
+          <p:nvPr/>
+        </p:nvSpPr>
+        <p:spPr>
+          <a:xfrm>
+            <a:off x="5486400" y="1463040"/>
+            <a:ext cx="3017520" cy="310896"/>
+          </a:xfrm>
+          <a:prstGeom prst="rect">
+            <a:avLst/>
+          </a:prstGeom>
+          <a:noFill/>
+          <a:ln/>
+        </p:spPr>
+        <p:txBody>
+          <a:bodyPr wrap="square" lIns="0" tIns="0" rIns="0" bIns="0" rtlCol="0" anchor="ctr"/>
+          <a:lstStyle/>
+          <a:p>
+            <a:pPr indent="0" marL="0">
+              <a:buNone/>
+            </a:pPr>
+            <a:r>
+              <a:rPr lang="en-US" sz="1700" b="1" dirty="0">
+                <a:solidFill>
+                  <a:schemeClr val="tx2"/>
+                </a:solidFill>
+                <a:latin typeface="Segoe UI Semibold" pitchFamily="34" charset="0"/>
+                <a:ea typeface="Segoe UI Semibold" pitchFamily="34" charset="-122"/>
+                <a:cs typeface="Segoe UI Semibold" pitchFamily="34" charset="-120"/>
+              </a:rPr>
+              <a:t>Puntos Dobles</a:t>
+            </a:r>
+            <a:endParaRPr lang="en-US" sz="1700" dirty="0"/>
+          </a:p>
+        </p:txBody>
+      </p:sp>
+      <p:sp>
+        <p:nvSpPr>
+          <p:cNvPr id="10" name="Poder texto 2"/>
+          <p:cNvSpPr txBox="1"/>
+          <p:nvPr/>
+        </p:nvSpPr>
+        <p:spPr>
+          <a:xfrm>
+            <a:off x="5486400" y="1792224"/>
+            <a:ext cx="3017520" cy="548640"/>
           </a:xfrm>
           <a:prstGeom prst="rect">
             <a:avLst/>
@@ -6563,49 +9015,44 @@
           <a:bodyPr wrap="square" lIns="0" tIns="0" rIns="0" bIns="0" rtlCol="0" anchor="t"/>
           <a:lstStyle/>
           <a:p>
-            <a:pPr algn="ctr" indent="0" marL="0">
-              <a:buNone/>
-            </a:pPr>
-            <a:r>
-              <a:rPr lang="en-US" sz="1200" dirty="0">
-                <a:solidFill>
-                  <a:schemeClr val="accent3"/>
-                </a:solidFill>
-              </a:rPr>
-              <a:t>Contra la pared o su propio cuerpo; la cámara tiembla con shake().</a:t>
-            </a:r>
-            <a:endParaRPr lang="en-US" sz="1200" dirty="0"/>
-          </a:p>
-        </p:txBody>
-      </p:sp>
-      <p:sp>
-        <p:nvSpPr>
-          <p:cNvPr id="8" name="Circulo 2"/>
+            <a:pPr indent="0" marL="0">
+              <a:buNone/>
+            </a:pPr>
+            <a:r>
+              <a:rPr lang="en-US" sz="1300" dirty="0">
+                <a:solidFill>
+                  <a:schemeClr val="accent4"/>
+                </a:solidFill>
+              </a:rPr>
+              <a:t>Todo lo que comes vale el doble durante 10 s.</a:t>
+            </a:r>
+            <a:endParaRPr lang="en-US" sz="1300" dirty="0"/>
+          </a:p>
+        </p:txBody>
+      </p:sp>
+      <p:sp>
+        <p:nvSpPr>
+          <p:cNvPr id="11" name="Orbe 3"/>
           <p:cNvSpPr/>
           <p:nvPr/>
         </p:nvSpPr>
         <p:spPr>
           <a:xfrm>
-            <a:off x="4270248" y="1709928"/>
-            <a:ext cx="603504" cy="603504"/>
+            <a:off x="548640" y="2651760"/>
+            <a:ext cx="640080" cy="640080"/>
           </a:xfrm>
           <a:prstGeom prst="ellipse">
             <a:avLst/>
           </a:prstGeom>
           <a:solidFill>
-            <a:schemeClr val="bg2"/>
+            <a:srgbClr val="00B894"/>
           </a:solidFill>
-          <a:ln w="31750">
-            <a:solidFill>
-              <a:schemeClr val="accent1"/>
-            </a:solidFill>
-            <a:prstDash val="solid"/>
-          </a:ln>
+          <a:ln/>
         </p:spPr>
       </p:sp>
       <p:pic>
         <p:nvPicPr>
-          <p:cNvPr id="9" name="Icono 2" descr="preencoded.png">    </p:cNvPr>
+          <p:cNvPr id="12" name="Icono 3" descr="preencoded.png">    </p:cNvPr>
           <p:cNvPicPr>
             <a:picLocks noChangeAspect="1"/>
           </p:cNvPicPr>
@@ -6619,8 +9066,8 @@
         </p:blipFill>
         <p:spPr>
           <a:xfrm>
-            <a:off x="4425696" y="1865376"/>
-            <a:ext cx="292608" cy="292608"/>
+            <a:off x="713232" y="2816352"/>
+            <a:ext cx="310896" cy="310896"/>
           </a:xfrm>
           <a:prstGeom prst="rect">
             <a:avLst/>
@@ -6629,14 +9076,14 @@
       </p:pic>
       <p:sp>
         <p:nvSpPr>
-          <p:cNvPr id="10" name="Paso 2"/>
-          <p:cNvSpPr txBox="1"/>
-          <p:nvPr/>
-        </p:nvSpPr>
-        <p:spPr>
-          <a:xfrm>
-            <a:off x="3429000" y="2514600"/>
-            <a:ext cx="2286000" cy="365760"/>
+          <p:cNvPr id="13" name="Poder 3"/>
+          <p:cNvSpPr txBox="1"/>
+          <p:nvPr/>
+        </p:nvSpPr>
+        <p:spPr>
+          <a:xfrm>
+            <a:off x="1371600" y="2651760"/>
+            <a:ext cx="3017520" cy="310896"/>
           </a:xfrm>
           <a:prstGeom prst="rect">
             <a:avLst/>
@@ -6648,11 +9095,11 @@
           <a:bodyPr wrap="square" lIns="0" tIns="0" rIns="0" bIns="0" rtlCol="0" anchor="ctr"/>
           <a:lstStyle/>
           <a:p>
-            <a:pPr algn="ctr" indent="0" marL="0">
-              <a:buNone/>
-            </a:pPr>
-            <a:r>
-              <a:rPr lang="en-US" sz="1800" b="1" dirty="0">
+            <a:pPr indent="0" marL="0">
+              <a:buNone/>
+            </a:pPr>
+            <a:r>
+              <a:rPr lang="en-US" sz="1700" b="1" dirty="0">
                 <a:solidFill>
                   <a:schemeClr val="tx2"/>
                 </a:solidFill>
@@ -6660,22 +9107,22 @@
                 <a:ea typeface="Segoe UI Semibold" pitchFamily="34" charset="-122"/>
                 <a:cs typeface="Segoe UI Semibold" pitchFamily="34" charset="-120"/>
               </a:rPr>
-              <a:t>2. Récord</a:t>
-            </a:r>
-            <a:endParaRPr lang="en-US" sz="1800" dirty="0"/>
-          </a:p>
-        </p:txBody>
-      </p:sp>
-      <p:sp>
-        <p:nvSpPr>
-          <p:cNvPr id="11" name="Detalle 2"/>
-          <p:cNvSpPr txBox="1"/>
-          <p:nvPr/>
-        </p:nvSpPr>
-        <p:spPr>
-          <a:xfrm>
-            <a:off x="3429000" y="2880360"/>
-            <a:ext cx="2286000" cy="640080"/>
+              <a:t>Escudo</a:t>
+            </a:r>
+            <a:endParaRPr lang="en-US" sz="1700" dirty="0"/>
+          </a:p>
+        </p:txBody>
+      </p:sp>
+      <p:sp>
+        <p:nvSpPr>
+          <p:cNvPr id="14" name="Poder texto 3"/>
+          <p:cNvSpPr txBox="1"/>
+          <p:nvPr/>
+        </p:nvSpPr>
+        <p:spPr>
+          <a:xfrm>
+            <a:off x="1371600" y="2980944"/>
+            <a:ext cx="3017520" cy="548640"/>
           </a:xfrm>
           <a:prstGeom prst="rect">
             <a:avLst/>
@@ -6687,49 +9134,44 @@
           <a:bodyPr wrap="square" lIns="0" tIns="0" rIns="0" bIns="0" rtlCol="0" anchor="t"/>
           <a:lstStyle/>
           <a:p>
-            <a:pPr algn="ctr" indent="0" marL="0">
-              <a:buNone/>
-            </a:pPr>
-            <a:r>
-              <a:rPr lang="en-US" sz="1200" dirty="0">
-                <a:solidFill>
-                  <a:schemeClr val="accent3"/>
-                </a:solidFill>
-              </a:rPr>
-              <a:t>Si se supera la mejor marca, se guarda en localStorage.</a:t>
-            </a:r>
-            <a:endParaRPr lang="en-US" sz="1200" dirty="0"/>
-          </a:p>
-        </p:txBody>
-      </p:sp>
-      <p:sp>
-        <p:nvSpPr>
-          <p:cNvPr id="12" name="Circulo 3"/>
+            <a:pPr indent="0" marL="0">
+              <a:buNone/>
+            </a:pPr>
+            <a:r>
+              <a:rPr lang="en-US" sz="1300" dirty="0">
+                <a:solidFill>
+                  <a:schemeClr val="accent4"/>
+                </a:solidFill>
+              </a:rPr>
+              <a:t>Te salva de un choque: atraviesas la pared o tu cuerpo.</a:t>
+            </a:r>
+            <a:endParaRPr lang="en-US" sz="1300" dirty="0"/>
+          </a:p>
+        </p:txBody>
+      </p:sp>
+      <p:sp>
+        <p:nvSpPr>
+          <p:cNvPr id="15" name="Orbe 4"/>
           <p:cNvSpPr/>
           <p:nvPr/>
         </p:nvSpPr>
         <p:spPr>
           <a:xfrm>
-            <a:off x="7013448" y="1709928"/>
-            <a:ext cx="603504" cy="603504"/>
+            <a:off x="4663440" y="2651760"/>
+            <a:ext cx="640080" cy="640080"/>
           </a:xfrm>
           <a:prstGeom prst="ellipse">
             <a:avLst/>
           </a:prstGeom>
           <a:solidFill>
-            <a:schemeClr val="accent1"/>
+            <a:srgbClr val="E17055"/>
           </a:solidFill>
-          <a:ln w="31750">
-            <a:solidFill>
-              <a:schemeClr val="accent1"/>
-            </a:solidFill>
-            <a:prstDash val="solid"/>
-          </a:ln>
+          <a:ln/>
         </p:spPr>
       </p:sp>
       <p:pic>
         <p:nvPicPr>
-          <p:cNvPr id="13" name="Icono 3" descr="preencoded.png">    </p:cNvPr>
+          <p:cNvPr id="16" name="Icono 4" descr="preencoded.png">    </p:cNvPr>
           <p:cNvPicPr>
             <a:picLocks noChangeAspect="1"/>
           </p:cNvPicPr>
@@ -6743,8 +9185,8 @@
         </p:blipFill>
         <p:spPr>
           <a:xfrm>
-            <a:off x="7168896" y="1865376"/>
-            <a:ext cx="292608" cy="292608"/>
+            <a:off x="4828032" y="2816352"/>
+            <a:ext cx="310896" cy="310896"/>
           </a:xfrm>
           <a:prstGeom prst="rect">
             <a:avLst/>
@@ -6753,14 +9195,14 @@
       </p:pic>
       <p:sp>
         <p:nvSpPr>
-          <p:cNvPr id="14" name="Paso 3"/>
-          <p:cNvSpPr txBox="1"/>
-          <p:nvPr/>
-        </p:nvSpPr>
-        <p:spPr>
-          <a:xfrm>
-            <a:off x="6172200" y="2514600"/>
-            <a:ext cx="2286000" cy="365760"/>
+          <p:cNvPr id="17" name="Poder 4"/>
+          <p:cNvSpPr txBox="1"/>
+          <p:nvPr/>
+        </p:nvSpPr>
+        <p:spPr>
+          <a:xfrm>
+            <a:off x="5486400" y="2651760"/>
+            <a:ext cx="3017520" cy="310896"/>
           </a:xfrm>
           <a:prstGeom prst="rect">
             <a:avLst/>
@@ -6772,11 +9214,11 @@
           <a:bodyPr wrap="square" lIns="0" tIns="0" rIns="0" bIns="0" rtlCol="0" anchor="ctr"/>
           <a:lstStyle/>
           <a:p>
-            <a:pPr algn="ctr" indent="0" marL="0">
-              <a:buNone/>
-            </a:pPr>
-            <a:r>
-              <a:rPr lang="en-US" sz="1800" b="1" dirty="0">
+            <a:pPr indent="0" marL="0">
+              <a:buNone/>
+            </a:pPr>
+            <a:r>
+              <a:rPr lang="en-US" sz="1700" b="1" dirty="0">
                 <a:solidFill>
                   <a:schemeClr val="tx2"/>
                 </a:solidFill>
@@ -6784,22 +9226,22 @@
                 <a:ea typeface="Segoe UI Semibold" pitchFamily="34" charset="-122"/>
                 <a:cs typeface="Segoe UI Semibold" pitchFamily="34" charset="-120"/>
               </a:rPr>
-              <a:t>3. Reinicio</a:t>
-            </a:r>
-            <a:endParaRPr lang="en-US" sz="1800" dirty="0"/>
-          </a:p>
-        </p:txBody>
-      </p:sp>
-      <p:sp>
-        <p:nvSpPr>
-          <p:cNvPr id="15" name="Detalle 3"/>
-          <p:cNvSpPr txBox="1"/>
-          <p:nvPr/>
-        </p:nvSpPr>
-        <p:spPr>
-          <a:xfrm>
-            <a:off x="6172200" y="2880360"/>
-            <a:ext cx="2286000" cy="640080"/>
+              <a:t>Tijeras</a:t>
+            </a:r>
+            <a:endParaRPr lang="en-US" sz="1700" dirty="0"/>
+          </a:p>
+        </p:txBody>
+      </p:sp>
+      <p:sp>
+        <p:nvSpPr>
+          <p:cNvPr id="18" name="Poder texto 4"/>
+          <p:cNvSpPr txBox="1"/>
+          <p:nvPr/>
+        </p:nvSpPr>
+        <p:spPr>
+          <a:xfrm>
+            <a:off x="5486400" y="2980944"/>
+            <a:ext cx="3017520" cy="548640"/>
           </a:xfrm>
           <a:prstGeom prst="rect">
             <a:avLst/>
@@ -6811,16 +9253,52 @@
           <a:bodyPr wrap="square" lIns="0" tIns="0" rIns="0" bIns="0" rtlCol="0" anchor="t"/>
           <a:lstStyle/>
           <a:p>
-            <a:pPr algn="ctr" indent="0" marL="0">
-              <a:buNone/>
-            </a:pPr>
-            <a:r>
-              <a:rPr lang="en-US" sz="1200" dirty="0">
+            <a:pPr indent="0" marL="0">
+              <a:buNone/>
+            </a:pPr>
+            <a:r>
+              <a:rPr lang="en-US" sz="1300" dirty="0">
+                <a:solidFill>
+                  <a:schemeClr val="accent4"/>
+                </a:solidFill>
+              </a:rPr>
+              <a:t>Cortan el 40 % de la cola (desde 8 segmentos).</a:t>
+            </a:r>
+            <a:endParaRPr lang="en-US" sz="1300" dirty="0"/>
+          </a:p>
+        </p:txBody>
+      </p:sp>
+      <p:sp>
+        <p:nvSpPr>
+          <p:cNvPr id="19" name="Nota poderes"/>
+          <p:cNvSpPr txBox="1"/>
+          <p:nvPr/>
+        </p:nvSpPr>
+        <p:spPr>
+          <a:xfrm>
+            <a:off x="548640" y="3977640"/>
+            <a:ext cx="8046720" cy="320040"/>
+          </a:xfrm>
+          <a:prstGeom prst="rect">
+            <a:avLst/>
+          </a:prstGeom>
+          <a:noFill/>
+          <a:ln/>
+        </p:spPr>
+        <p:txBody>
+          <a:bodyPr wrap="square" lIns="0" tIns="0" rIns="0" bIns="0" rtlCol="0" anchor="ctr"/>
+          <a:lstStyle/>
+          <a:p>
+            <a:pPr indent="0" marL="0">
+              <a:buNone/>
+            </a:pPr>
+            <a:r>
+              <a:rPr lang="en-US" sz="1200" i="1" dirty="0">
                 <a:solidFill>
                   <a:schemeClr val="accent3"/>
                 </a:solidFill>
               </a:rPr>
-              <a:t>La tecla Espacio ejecuta scene.restart().</a:t>
+              <a:t>Aparecen cada 6 a 10 s, duran 7 s en el tablero y los efectos activos se muestran abajo a la izquierda.</a:t>
             </a:r>
             <a:endParaRPr lang="en-US" sz="1200" dirty="0"/>
           </a:p>
@@ -6925,13 +9403,13 @@
             <a:r>
               <a:rPr lang="en-US" sz="3200" b="1" dirty="0">
                 <a:solidFill>
-                  <a:schemeClr val="bg1"/>
+                  <a:schemeClr val="tx1"/>
                 </a:solidFill>
                 <a:latin typeface="Segoe UI Semibold" pitchFamily="34" charset="0"/>
                 <a:ea typeface="Segoe UI Semibold" pitchFamily="34" charset="-122"/>
                 <a:cs typeface="Segoe UI Semibold" pitchFamily="34" charset="-120"/>
               </a:rPr>
-              <a:t>Arquitectura del Código</a:t>
+              <a:t>Bucle de Tiempo Fijo</a:t>
             </a:r>
             <a:endParaRPr lang="en-US" sz="3200" dirty="0"/>
           </a:p>
@@ -6939,36 +9417,60 @@
       </p:sp>
       <p:sp>
         <p:nvSpPr>
-          <p:cNvPr id="3" name="Fila 1"/>
+          <p:cNvPr id="3" name="Tarjeta 1"/>
           <p:cNvSpPr/>
           <p:nvPr/>
         </p:nvSpPr>
         <p:spPr>
           <a:xfrm>
-            <a:off x="1371600" y="1463040"/>
-            <a:ext cx="6400800" cy="548640"/>
+            <a:off x="914400" y="1691640"/>
+            <a:ext cx="2286000" cy="2240280"/>
           </a:xfrm>
           <a:prstGeom prst="roundRect">
             <a:avLst>
-              <a:gd name="adj" fmla="val 13333"/>
+              <a:gd name="adj" fmla="val 4898"/>
             </a:avLst>
           </a:prstGeom>
           <a:solidFill>
-            <a:schemeClr val="accent6"/>
+            <a:schemeClr val="bg2"/>
           </a:solidFill>
           <a:ln/>
         </p:spPr>
       </p:sp>
-      <p:sp>
-        <p:nvSpPr>
-          <p:cNvPr id="4" name="Archivo 1"/>
-          <p:cNvSpPr txBox="1"/>
-          <p:nvPr/>
-        </p:nvSpPr>
-        <p:spPr>
-          <a:xfrm>
-            <a:off x="1645920" y="1463040"/>
-            <a:ext cx="1828800" cy="548640"/>
+      <p:pic>
+        <p:nvPicPr>
+          <p:cNvPr id="4" name="Icono 1" descr="preencoded.png">    </p:cNvPr>
+          <p:cNvPicPr>
+            <a:picLocks noChangeAspect="1"/>
+          </p:cNvPicPr>
+          <p:nvPr/>
+        </p:nvPicPr>
+        <p:blipFill>
+          <a:blip r:embed="rId1"/>
+          <a:stretch>
+            <a:fillRect/>
+          </a:stretch>
+        </p:blipFill>
+        <p:spPr>
+          <a:xfrm>
+            <a:off x="1856232" y="1965960"/>
+            <a:ext cx="402336" cy="402336"/>
+          </a:xfrm>
+          <a:prstGeom prst="rect">
+            <a:avLst/>
+          </a:prstGeom>
+        </p:spPr>
+      </p:pic>
+      <p:sp>
+        <p:nvSpPr>
+          <p:cNvPr id="5" name="Titulo tarjeta 1"/>
+          <p:cNvSpPr txBox="1"/>
+          <p:nvPr/>
+        </p:nvSpPr>
+        <p:spPr>
+          <a:xfrm>
+            <a:off x="1051560" y="2560320"/>
+            <a:ext cx="2011680" cy="365760"/>
           </a:xfrm>
           <a:prstGeom prst="rect">
             <a:avLst/>
@@ -6980,92 +9482,116 @@
           <a:bodyPr wrap="square" lIns="0" tIns="0" rIns="0" bIns="0" rtlCol="0" anchor="ctr"/>
           <a:lstStyle/>
           <a:p>
-            <a:pPr indent="0" marL="0">
-              <a:buNone/>
-            </a:pPr>
-            <a:r>
-              <a:rPr lang="en-US" sz="1500" dirty="0">
-                <a:solidFill>
-                  <a:srgbClr val="86EFAC"/>
+            <a:pPr algn="ctr" indent="0" marL="0">
+              <a:buNone/>
+            </a:pPr>
+            <a:r>
+              <a:rPr lang="en-US" sz="1600" b="1" dirty="0">
+                <a:solidFill>
+                  <a:schemeClr val="tx2"/>
                 </a:solidFill>
                 <a:latin typeface="Consolas" pitchFamily="34" charset="0"/>
                 <a:ea typeface="Consolas" pitchFamily="34" charset="-122"/>
                 <a:cs typeface="Consolas" pitchFamily="34" charset="-120"/>
               </a:rPr>
-              <a:t>index.html</a:t>
-            </a:r>
-            <a:endParaRPr lang="en-US" sz="1500" dirty="0"/>
-          </a:p>
-        </p:txBody>
-      </p:sp>
-      <p:sp>
-        <p:nvSpPr>
-          <p:cNvPr id="5" name="Descripcion 1"/>
-          <p:cNvSpPr txBox="1"/>
-          <p:nvPr/>
-        </p:nvSpPr>
-        <p:spPr>
-          <a:xfrm>
-            <a:off x="3520440" y="1463040"/>
-            <a:ext cx="4114800" cy="548640"/>
-          </a:xfrm>
-          <a:prstGeom prst="rect">
-            <a:avLst/>
-          </a:prstGeom>
-          <a:noFill/>
-          <a:ln/>
-        </p:spPr>
-        <p:txBody>
-          <a:bodyPr wrap="square" lIns="0" tIns="0" rIns="0" bIns="0" rtlCol="0" anchor="ctr"/>
-          <a:lstStyle/>
-          <a:p>
-            <a:pPr indent="0" marL="0">
-              <a:buNone/>
-            </a:pPr>
-            <a:r>
-              <a:rPr lang="en-US" sz="1300" dirty="0">
-                <a:solidFill>
-                  <a:srgbClr val="CBD5E1"/>
-                </a:solidFill>
-              </a:rPr>
-              <a:t>Carga Phaser 3.80.1 desde CDN y centra el lienzo.</a:t>
-            </a:r>
-            <a:endParaRPr lang="en-US" sz="1300" dirty="0"/>
-          </a:p>
-        </p:txBody>
-      </p:sp>
-      <p:sp>
-        <p:nvSpPr>
-          <p:cNvPr id="6" name="Fila 2"/>
+              <a:t>update(delta)</a:t>
+            </a:r>
+            <a:endParaRPr lang="en-US" sz="1600" dirty="0"/>
+          </a:p>
+        </p:txBody>
+      </p:sp>
+      <p:sp>
+        <p:nvSpPr>
+          <p:cNvPr id="6" name="Texto tarjeta 1"/>
+          <p:cNvSpPr txBox="1"/>
+          <p:nvPr/>
+        </p:nvSpPr>
+        <p:spPr>
+          <a:xfrm>
+            <a:off x="1097280" y="2971800"/>
+            <a:ext cx="1920240" cy="777240"/>
+          </a:xfrm>
+          <a:prstGeom prst="rect">
+            <a:avLst/>
+          </a:prstGeom>
+          <a:noFill/>
+          <a:ln/>
+        </p:spPr>
+        <p:txBody>
+          <a:bodyPr wrap="square" lIns="0" tIns="0" rIns="0" bIns="0" rtlCol="0" anchor="t"/>
+          <a:lstStyle/>
+          <a:p>
+            <a:pPr algn="ctr" indent="0" marL="0">
+              <a:buNone/>
+            </a:pPr>
+            <a:r>
+              <a:rPr lang="en-US" sz="1200" dirty="0">
+                <a:solidFill>
+                  <a:schemeClr val="accent4"/>
+                </a:solidFill>
+              </a:rPr>
+              <a:t>Acumula el tiempo y ejecuta un paso cada vez que se cumple el intervalo.</a:t>
+            </a:r>
+            <a:endParaRPr lang="en-US" sz="1200" dirty="0"/>
+          </a:p>
+        </p:txBody>
+      </p:sp>
+      <p:sp>
+        <p:nvSpPr>
+          <p:cNvPr id="7" name="Tarjeta 2"/>
           <p:cNvSpPr/>
           <p:nvPr/>
         </p:nvSpPr>
         <p:spPr>
           <a:xfrm>
-            <a:off x="1371600" y="2194560"/>
-            <a:ext cx="6400800" cy="548640"/>
+            <a:off x="3429000" y="1691640"/>
+            <a:ext cx="2286000" cy="2240280"/>
           </a:xfrm>
           <a:prstGeom prst="roundRect">
             <a:avLst>
-              <a:gd name="adj" fmla="val 13333"/>
+              <a:gd name="adj" fmla="val 4898"/>
             </a:avLst>
           </a:prstGeom>
           <a:solidFill>
-            <a:schemeClr val="accent6"/>
+            <a:schemeClr val="bg2"/>
           </a:solidFill>
           <a:ln/>
         </p:spPr>
       </p:sp>
-      <p:sp>
-        <p:nvSpPr>
-          <p:cNvPr id="7" name="Archivo 2"/>
-          <p:cNvSpPr txBox="1"/>
-          <p:nvPr/>
-        </p:nvSpPr>
-        <p:spPr>
-          <a:xfrm>
-            <a:off x="1645920" y="2194560"/>
-            <a:ext cx="1828800" cy="548640"/>
+      <p:pic>
+        <p:nvPicPr>
+          <p:cNvPr id="8" name="Icono 2" descr="preencoded.png">    </p:cNvPr>
+          <p:cNvPicPr>
+            <a:picLocks noChangeAspect="1"/>
+          </p:cNvPicPr>
+          <p:nvPr/>
+        </p:nvPicPr>
+        <p:blipFill>
+          <a:blip r:embed="rId2"/>
+          <a:stretch>
+            <a:fillRect/>
+          </a:stretch>
+        </p:blipFill>
+        <p:spPr>
+          <a:xfrm>
+            <a:off x="4370832" y="1965960"/>
+            <a:ext cx="402336" cy="402336"/>
+          </a:xfrm>
+          <a:prstGeom prst="rect">
+            <a:avLst/>
+          </a:prstGeom>
+        </p:spPr>
+      </p:pic>
+      <p:sp>
+        <p:nvSpPr>
+          <p:cNvPr id="9" name="Titulo tarjeta 2"/>
+          <p:cNvSpPr txBox="1"/>
+          <p:nvPr/>
+        </p:nvSpPr>
+        <p:spPr>
+          <a:xfrm>
+            <a:off x="3566160" y="2560320"/>
+            <a:ext cx="2011680" cy="365760"/>
           </a:xfrm>
           <a:prstGeom prst="rect">
             <a:avLst/>
@@ -7077,251 +9603,178 @@
           <a:bodyPr wrap="square" lIns="0" tIns="0" rIns="0" bIns="0" rtlCol="0" anchor="ctr"/>
           <a:lstStyle/>
           <a:p>
-            <a:pPr indent="0" marL="0">
-              <a:buNone/>
-            </a:pPr>
-            <a:r>
-              <a:rPr lang="en-US" sz="1500" dirty="0">
-                <a:solidFill>
-                  <a:srgbClr val="86EFAC"/>
+            <a:pPr algn="ctr" indent="0" marL="0">
+              <a:buNone/>
+            </a:pPr>
+            <a:r>
+              <a:rPr lang="en-US" sz="1600" b="1" dirty="0">
+                <a:solidFill>
+                  <a:schemeClr val="tx2"/>
+                </a:solidFill>
+                <a:latin typeface="Segoe UI Semibold" pitchFamily="34" charset="0"/>
+                <a:ea typeface="Segoe UI Semibold" pitchFamily="34" charset="-122"/>
+                <a:cs typeface="Segoe UI Semibold" pitchFamily="34" charset="-120"/>
+              </a:rPr>
+              <a:t>Velocidad Progresiva</a:t>
+            </a:r>
+            <a:endParaRPr lang="en-US" sz="1600" dirty="0"/>
+          </a:p>
+        </p:txBody>
+      </p:sp>
+      <p:sp>
+        <p:nvSpPr>
+          <p:cNvPr id="10" name="Texto tarjeta 2"/>
+          <p:cNvSpPr txBox="1"/>
+          <p:nvPr/>
+        </p:nvSpPr>
+        <p:spPr>
+          <a:xfrm>
+            <a:off x="3611880" y="2971800"/>
+            <a:ext cx="1920240" cy="777240"/>
+          </a:xfrm>
+          <a:prstGeom prst="rect">
+            <a:avLst/>
+          </a:prstGeom>
+          <a:noFill/>
+          <a:ln/>
+        </p:spPr>
+        <p:txBody>
+          <a:bodyPr wrap="square" lIns="0" tIns="0" rIns="0" bIns="0" rtlCol="0" anchor="t"/>
+          <a:lstStyle/>
+          <a:p>
+            <a:pPr algn="ctr" indent="0" marL="0">
+              <a:buNone/>
+            </a:pPr>
+            <a:r>
+              <a:rPr lang="en-US" sz="1200" dirty="0">
+                <a:solidFill>
+                  <a:schemeClr val="accent4"/>
+                </a:solidFill>
+              </a:rPr>
+              <a:t>Empieza en 120 ms por paso y baja 3 ms por manzana, hasta 60 ms.</a:t>
+            </a:r>
+            <a:endParaRPr lang="en-US" sz="1200" dirty="0"/>
+          </a:p>
+        </p:txBody>
+      </p:sp>
+      <p:sp>
+        <p:nvSpPr>
+          <p:cNvPr id="11" name="Tarjeta 3"/>
+          <p:cNvSpPr/>
+          <p:nvPr/>
+        </p:nvSpPr>
+        <p:spPr>
+          <a:xfrm>
+            <a:off x="5943600" y="1691640"/>
+            <a:ext cx="2286000" cy="2240280"/>
+          </a:xfrm>
+          <a:prstGeom prst="roundRect">
+            <a:avLst>
+              <a:gd name="adj" fmla="val 4898"/>
+            </a:avLst>
+          </a:prstGeom>
+          <a:solidFill>
+            <a:schemeClr val="bg2"/>
+          </a:solidFill>
+          <a:ln/>
+        </p:spPr>
+      </p:sp>
+      <p:pic>
+        <p:nvPicPr>
+          <p:cNvPr id="12" name="Icono 3" descr="preencoded.png">    </p:cNvPr>
+          <p:cNvPicPr>
+            <a:picLocks noChangeAspect="1"/>
+          </p:cNvPicPr>
+          <p:nvPr/>
+        </p:nvPicPr>
+        <p:blipFill>
+          <a:blip r:embed="rId3"/>
+          <a:stretch>
+            <a:fillRect/>
+          </a:stretch>
+        </p:blipFill>
+        <p:spPr>
+          <a:xfrm>
+            <a:off x="6885432" y="1965960"/>
+            <a:ext cx="402336" cy="402336"/>
+          </a:xfrm>
+          <a:prstGeom prst="rect">
+            <a:avLst/>
+          </a:prstGeom>
+        </p:spPr>
+      </p:pic>
+      <p:sp>
+        <p:nvSpPr>
+          <p:cNvPr id="13" name="Titulo tarjeta 3"/>
+          <p:cNvSpPr txBox="1"/>
+          <p:nvPr/>
+        </p:nvSpPr>
+        <p:spPr>
+          <a:xfrm>
+            <a:off x="6080760" y="2560320"/>
+            <a:ext cx="2011680" cy="365760"/>
+          </a:xfrm>
+          <a:prstGeom prst="rect">
+            <a:avLst/>
+          </a:prstGeom>
+          <a:noFill/>
+          <a:ln/>
+        </p:spPr>
+        <p:txBody>
+          <a:bodyPr wrap="square" lIns="0" tIns="0" rIns="0" bIns="0" rtlCol="0" anchor="ctr"/>
+          <a:lstStyle/>
+          <a:p>
+            <a:pPr algn="ctr" indent="0" marL="0">
+              <a:buNone/>
+            </a:pPr>
+            <a:r>
+              <a:rPr lang="en-US" sz="1600" b="1" dirty="0">
+                <a:solidFill>
+                  <a:schemeClr val="tx2"/>
                 </a:solidFill>
                 <a:latin typeface="Consolas" pitchFamily="34" charset="0"/>
                 <a:ea typeface="Consolas" pitchFamily="34" charset="-122"/>
                 <a:cs typeface="Consolas" pitchFamily="34" charset="-120"/>
               </a:rPr>
-              <a:t>game.js</a:t>
-            </a:r>
-            <a:endParaRPr lang="en-US" sz="1500" dirty="0"/>
-          </a:p>
-        </p:txBody>
-      </p:sp>
-      <p:sp>
-        <p:nvSpPr>
-          <p:cNvPr id="8" name="Descripcion 2"/>
-          <p:cNvSpPr txBox="1"/>
-          <p:nvPr/>
-        </p:nvSpPr>
-        <p:spPr>
-          <a:xfrm>
-            <a:off x="3520440" y="2194560"/>
-            <a:ext cx="4114800" cy="548640"/>
-          </a:xfrm>
-          <a:prstGeom prst="rect">
-            <a:avLst/>
-          </a:prstGeom>
-          <a:noFill/>
-          <a:ln/>
-        </p:spPr>
-        <p:txBody>
-          <a:bodyPr wrap="square" lIns="0" tIns="0" rIns="0" bIns="0" rtlCol="0" anchor="ctr"/>
-          <a:lstStyle/>
-          <a:p>
-            <a:pPr indent="0" marL="0">
-              <a:buNone/>
-            </a:pPr>
-            <a:r>
-              <a:rPr lang="en-US" sz="1300" dirty="0">
-                <a:solidFill>
-                  <a:srgbClr val="CBD5E1"/>
-                </a:solidFill>
-              </a:rPr>
-              <a:t>Constantes, mapa de teclas y récord en localStorage.</a:t>
-            </a:r>
-            <a:endParaRPr lang="en-US" sz="1300" dirty="0"/>
-          </a:p>
-        </p:txBody>
-      </p:sp>
-      <p:sp>
-        <p:nvSpPr>
-          <p:cNvPr id="9" name="Fila 3"/>
-          <p:cNvSpPr/>
-          <p:nvPr/>
-        </p:nvSpPr>
-        <p:spPr>
-          <a:xfrm>
-            <a:off x="1371600" y="2926080"/>
-            <a:ext cx="6400800" cy="548640"/>
-          </a:xfrm>
-          <a:prstGeom prst="roundRect">
-            <a:avLst>
-              <a:gd name="adj" fmla="val 13333"/>
-            </a:avLst>
-          </a:prstGeom>
-          <a:solidFill>
-            <a:schemeClr val="accent6"/>
-          </a:solidFill>
-          <a:ln/>
-        </p:spPr>
-      </p:sp>
-      <p:sp>
-        <p:nvSpPr>
-          <p:cNvPr id="10" name="Archivo 3"/>
-          <p:cNvSpPr txBox="1"/>
-          <p:nvPr/>
-        </p:nvSpPr>
-        <p:spPr>
-          <a:xfrm>
-            <a:off x="1645920" y="2926080"/>
-            <a:ext cx="1828800" cy="548640"/>
-          </a:xfrm>
-          <a:prstGeom prst="rect">
-            <a:avLst/>
-          </a:prstGeom>
-          <a:noFill/>
-          <a:ln/>
-        </p:spPr>
-        <p:txBody>
-          <a:bodyPr wrap="square" lIns="0" tIns="0" rIns="0" bIns="0" rtlCol="0" anchor="ctr"/>
-          <a:lstStyle/>
-          <a:p>
-            <a:pPr indent="0" marL="0">
-              <a:buNone/>
-            </a:pPr>
-            <a:r>
-              <a:rPr lang="en-US" sz="1500" dirty="0">
-                <a:solidFill>
-                  <a:srgbClr val="86EFAC"/>
-                </a:solidFill>
-                <a:latin typeface="Consolas" pitchFamily="34" charset="0"/>
-                <a:ea typeface="Consolas" pitchFamily="34" charset="-122"/>
-                <a:cs typeface="Consolas" pitchFamily="34" charset="-120"/>
-              </a:rPr>
-              <a:t>SnakeScene</a:t>
-            </a:r>
-            <a:endParaRPr lang="en-US" sz="1500" dirty="0"/>
-          </a:p>
-        </p:txBody>
-      </p:sp>
-      <p:sp>
-        <p:nvSpPr>
-          <p:cNvPr id="11" name="Descripcion 3"/>
-          <p:cNvSpPr txBox="1"/>
-          <p:nvPr/>
-        </p:nvSpPr>
-        <p:spPr>
-          <a:xfrm>
-            <a:off x="3520440" y="2926080"/>
-            <a:ext cx="4114800" cy="548640"/>
-          </a:xfrm>
-          <a:prstGeom prst="rect">
-            <a:avLst/>
-          </a:prstGeom>
-          <a:noFill/>
-          <a:ln/>
-        </p:spPr>
-        <p:txBody>
-          <a:bodyPr wrap="square" lIns="0" tIns="0" rIns="0" bIns="0" rtlCol="0" anchor="ctr"/>
-          <a:lstStyle/>
-          <a:p>
-            <a:pPr indent="0" marL="0">
-              <a:buNone/>
-            </a:pPr>
-            <a:r>
-              <a:rPr lang="en-US" sz="1300" dirty="0">
-                <a:solidFill>
-                  <a:srgbClr val="CBD5E1"/>
-                </a:solidFill>
-              </a:rPr>
-              <a:t>Escena única: create, update, step, draw y gameOver.</a:t>
-            </a:r>
-            <a:endParaRPr lang="en-US" sz="1300" dirty="0"/>
-          </a:p>
-        </p:txBody>
-      </p:sp>
-      <p:sp>
-        <p:nvSpPr>
-          <p:cNvPr id="12" name="Fila 4"/>
-          <p:cNvSpPr/>
-          <p:nvPr/>
-        </p:nvSpPr>
-        <p:spPr>
-          <a:xfrm>
-            <a:off x="1371600" y="3657600"/>
-            <a:ext cx="6400800" cy="548640"/>
-          </a:xfrm>
-          <a:prstGeom prst="roundRect">
-            <a:avLst>
-              <a:gd name="adj" fmla="val 13333"/>
-            </a:avLst>
-          </a:prstGeom>
-          <a:solidFill>
-            <a:schemeClr val="accent6"/>
-          </a:solidFill>
-          <a:ln/>
-        </p:spPr>
-      </p:sp>
-      <p:sp>
-        <p:nvSpPr>
-          <p:cNvPr id="13" name="Archivo 4"/>
-          <p:cNvSpPr txBox="1"/>
-          <p:nvPr/>
-        </p:nvSpPr>
-        <p:spPr>
-          <a:xfrm>
-            <a:off x="1645920" y="3657600"/>
-            <a:ext cx="1828800" cy="548640"/>
-          </a:xfrm>
-          <a:prstGeom prst="rect">
-            <a:avLst/>
-          </a:prstGeom>
-          <a:noFill/>
-          <a:ln/>
-        </p:spPr>
-        <p:txBody>
-          <a:bodyPr wrap="square" lIns="0" tIns="0" rIns="0" bIns="0" rtlCol="0" anchor="ctr"/>
-          <a:lstStyle/>
-          <a:p>
-            <a:pPr indent="0" marL="0">
-              <a:buNone/>
-            </a:pPr>
-            <a:r>
-              <a:rPr lang="en-US" sz="1500" dirty="0">
-                <a:solidFill>
-                  <a:srgbClr val="86EFAC"/>
-                </a:solidFill>
-                <a:latin typeface="Consolas" pitchFamily="34" charset="0"/>
-                <a:ea typeface="Consolas" pitchFamily="34" charset="-122"/>
-                <a:cs typeface="Consolas" pitchFamily="34" charset="-120"/>
-              </a:rPr>
-              <a:t>config</a:t>
-            </a:r>
-            <a:endParaRPr lang="en-US" sz="1500" dirty="0"/>
-          </a:p>
-        </p:txBody>
-      </p:sp>
-      <p:sp>
-        <p:nvSpPr>
-          <p:cNvPr id="14" name="Descripcion 4"/>
-          <p:cNvSpPr txBox="1"/>
-          <p:nvPr/>
-        </p:nvSpPr>
-        <p:spPr>
-          <a:xfrm>
-            <a:off x="3520440" y="3657600"/>
-            <a:ext cx="4114800" cy="548640"/>
-          </a:xfrm>
-          <a:prstGeom prst="rect">
-            <a:avLst/>
-          </a:prstGeom>
-          <a:noFill/>
-          <a:ln/>
-        </p:spPr>
-        <p:txBody>
-          <a:bodyPr wrap="square" lIns="0" tIns="0" rIns="0" bIns="0" rtlCol="0" anchor="ctr"/>
-          <a:lstStyle/>
-          <a:p>
-            <a:pPr indent="0" marL="0">
-              <a:buNone/>
-            </a:pPr>
-            <a:r>
-              <a:rPr lang="en-US" sz="1300" dirty="0">
-                <a:solidFill>
-                  <a:srgbClr val="CBD5E1"/>
-                </a:solidFill>
-              </a:rPr>
-              <a:t>Phaser.AUTO, 800 × 600 y una sola escena.</a:t>
-            </a:r>
-            <a:endParaRPr lang="en-US" sz="1300" dirty="0"/>
+              <a:t>stepDelay × 1.6</a:t>
+            </a:r>
+            <a:endParaRPr lang="en-US" sz="1600" dirty="0"/>
+          </a:p>
+        </p:txBody>
+      </p:sp>
+      <p:sp>
+        <p:nvSpPr>
+          <p:cNvPr id="14" name="Texto tarjeta 3"/>
+          <p:cNvSpPr txBox="1"/>
+          <p:nvPr/>
+        </p:nvSpPr>
+        <p:spPr>
+          <a:xfrm>
+            <a:off x="6126480" y="2971800"/>
+            <a:ext cx="1920240" cy="777240"/>
+          </a:xfrm>
+          <a:prstGeom prst="rect">
+            <a:avLst/>
+          </a:prstGeom>
+          <a:noFill/>
+          <a:ln/>
+        </p:spPr>
+        <p:txBody>
+          <a:bodyPr wrap="square" lIns="0" tIns="0" rIns="0" bIns="0" rtlCol="0" anchor="t"/>
+          <a:lstStyle/>
+          <a:p>
+            <a:pPr algn="ctr" indent="0" marL="0">
+              <a:buNone/>
+            </a:pPr>
+            <a:r>
+              <a:rPr lang="en-US" sz="1200" dirty="0">
+                <a:solidFill>
+                  <a:schemeClr val="accent4"/>
+                </a:solidFill>
+              </a:rPr>
+              <a:t>Con el poder Lento, cada paso tarda 1.6 veces más.</a:t>
+            </a:r>
+            <a:endParaRPr lang="en-US" sz="1200" dirty="0"/>
           </a:p>
         </p:txBody>
       </p:sp>
